--- a/SEVEN-G/pptx/es/SEVEN-G_Curso_Partner.pptx
+++ b/SEVEN-G/pptx/es/SEVEN-G_Curso_Partner.pptx
@@ -6006,7 +6006,7 @@
                   <a:srgbClr val="2F2B28"/>
                 </a:solidFill>
               </a:rPr>
-              <a:t>Conserve los códigos (G0–G7, P01–P71, T01–T22) o publique su equivalencia: sus clientes podrán contrastar con la fuente.</a:t>
+              <a:t>Conserve los códigos (G0–G7, P01–P74, T01–T22) o publique su equivalencia: sus clientes podrán contrastar con la fuente.</a:t>
             </a:r>
           </a:p>
           <a:p>
@@ -6294,7 +6294,7 @@
                   <a:srgbClr val="2F2B28"/>
                 </a:solidFill>
               </a:rPr>
-              <a:t>Las 71 plantillas se generan en Word desde Markdown: puede cambiar estilos y portada y regenerarlas con su imagen.</a:t>
+              <a:t>Las 74 plantillas se generan en Word desde Markdown: puede cambiar estilos y portada y regenerarlas con su imagen.</a:t>
             </a:r>
           </a:p>
           <a:p>

--- a/SEVEN-G/pptx/es/SEVEN-G_Curso_Partner.pptx
+++ b/SEVEN-G/pptx/es/SEVEN-G_Curso_Partner.pptx
@@ -7277,6 +7277,40 @@
           </a:p>
         </p:txBody>
       </p:sp>
+      <p:sp>
+        <p:nvSpPr>
+          <p:cNvPr id="258" name="Texto 258"/>
+          <p:cNvSpPr txBox="1"/>
+          <p:nvPr/>
+        </p:nvSpPr>
+        <p:spPr>
+          <a:xfrm>
+            <a:off x="609600" y="5550000"/>
+            <a:ext cx="10972800" cy="1000000"/>
+          </a:xfrm>
+          <a:prstGeom prst="rect">
+            <a:avLst/>
+          </a:prstGeom>
+          <a:noFill/>
+        </p:spPr>
+        <p:txBody>
+          <a:bodyPr wrap="square" anchor="t" lIns="45720" rIns="45720">
+            <a:noAutofit/>
+          </a:bodyPr>
+          <a:lstStyle/>
+          <a:p>
+            <a:pPr algn="ctr"/>
+            <a:r>
+              <a:rPr lang="es-ES" sz="1000" dirty="0">
+                <a:solidFill>
+                  <a:srgbClr val="564D47"/>
+                </a:solidFill>
+              </a:rPr>
+              <a:t>Aviso legal: ayuda metodológica genérica y gratuita, «tal cual» y con fines informativos; no es asesoramiento jurídico ni está revisada jurídicamente para ningún caso. Cada organización la adapta y es responsable de su revisión legal y de su cumplimiento regulatorio; puede no recoger cambios normativos recientes. En la máxima medida permitida por la ley, el autor no asume responsabilidad alguna por los efectos de su aplicación. No otorga certificación de ningún tipo. Detalle en el documento 93.</a:t>
+            </a:r>
+          </a:p>
+        </p:txBody>
+      </p:sp>
     </p:spTree>
   </p:cSld>
   <p:clrMapOvr>

--- a/SEVEN-G/pptx/es/SEVEN-G_Curso_Partner.pptx
+++ b/SEVEN-G/pptx/es/SEVEN-G_Curso_Partner.pptx
@@ -31,6 +31,7 @@
     <p:sldId id="279" r:id="rIdS24"/>
     <p:sldId id="280" r:id="rIdS25"/>
     <p:sldId id="281" r:id="rIdS26"/>
+    <p:sldId id="282" r:id="rIdS27"/>
   </p:sldIdLst>
   <p:sldSz cx="12192000" cy="6858000" type="screen16x9"/>
   <p:notesSz cx="6858000" cy="9144000"/>
@@ -1125,7 +1126,7 @@
       </p:sp>
       <p:pic>
         <p:nvPicPr>
-          <p:cNvPr id="124" name="Imagen 124" descr="Panel del consejo con las tarjetas de cartera y valor"/>
+          <p:cNvPr id="124" name="Imagen 124" descr="Panel del consejo: tarjetas de cartera y valor y la lectura «Qué frena el escalado»"/>
           <p:cNvPicPr>
             <a:picLocks noChangeAspect="1"/>
           </p:cNvPicPr>
@@ -1190,7 +1191,7 @@
                   <a:srgbClr val="2F2B28"/>
                 </a:solidFill>
               </a:rPr>
-              <a:t>15 casos: cuántos hay en uso, en desarrollo, en prueba de concepto, propuestos y fuera.</a:t>
+              <a:t>Arriba, las cifras: 15 casos, costes 2,4 M€ al año, retorno total 7,3 M€ y neto anual 4,8 M€. Cada cifra se pulsa y abre sus casos.</a:t>
             </a:r>
           </a:p>
           <a:p>
@@ -1210,7 +1211,7 @@
                   <a:srgbClr val="2F2B28"/>
                 </a:solidFill>
               </a:rPr>
-              <a:t>Costes 2,4 M€ al año y retorno total 7,3 M€ (eficiencias más retorno): el neto anual es 4,8 M€.</a:t>
+              <a:t>La tarjeta amarilla es la importante: solo el 36 % del valor está validado por control de gestión. En rojo: solo 3 de 15 casos tienen todos los controles.</a:t>
             </a:r>
           </a:p>
           <a:p>
@@ -1230,7 +1231,7 @@
                   <a:srgbClr val="2F2B28"/>
                 </a:solidFill>
               </a:rPr>
-              <a:t>La tarjeta amarilla es la importante: solo el 36 % del valor está validado por control de gestión. El resto es declarado o estimado.</a:t>
+              <a:t>Debajo, «Qué frena el escalado»: los tres frenos por los que empezar, con qué bloquean, qué hacer, quién y el valor en juego (documento 60 §10.4).</a:t>
             </a:r>
           </a:p>
           <a:p>
@@ -1250,7 +1251,7 @@
                   <a:srgbClr val="2F2B28"/>
                 </a:solidFill>
               </a:rPr>
-              <a:t>La capacidad liberada que no se materializa aparece aparte y no suma.</a:t>
+              <a:t>En el ejemplo: primero riesgo y cumplimiento (bloquea G5), después el valor sin validar (bloquea G7 · Escalar) y los casos que no avanzan.</a:t>
             </a:r>
           </a:p>
           <a:p>
@@ -1270,9 +1271,254 @@
                   <a:srgbClr val="2F2B28"/>
                 </a:solidFill>
               </a:rPr>
-              <a:t>En rojo: solo 3 de 15 casos tienen todos los controles (evaluaciones de impacto, seguridad, manual de uso).</a:t>
-            </a:r>
-          </a:p>
+              <a:t>El valor en juego ordena, no promete: es declarado, no validado.</a:t>
+            </a:r>
+          </a:p>
+        </p:txBody>
+      </p:sp>
+      <p:sp>
+        <p:nvSpPr>
+          <p:cNvPr id="126" name="Texto 126"/>
+          <p:cNvSpPr txBox="1"/>
+          <p:nvPr/>
+        </p:nvSpPr>
+        <p:spPr>
+          <a:xfrm>
+            <a:off x="609600" y="6260000"/>
+            <a:ext cx="10972800" cy="450000"/>
+          </a:xfrm>
+          <a:prstGeom prst="rect">
+            <a:avLst/>
+          </a:prstGeom>
+          <a:noFill/>
+        </p:spPr>
+        <p:txBody>
+          <a:bodyPr wrap="square" anchor="t" lIns="45720" rIns="45720">
+            <a:noAutofit/>
+          </a:bodyPr>
+          <a:lstStyle/>
+          <a:p>
+            <a:pPr algn="l"/>
+            <a:r>
+              <a:rPr lang="es-ES" sz="1300" b="1" dirty="0">
+                <a:solidFill>
+                  <a:srgbClr val="0F5499"/>
+                </a:solidFill>
+              </a:rPr>
+              <a:t>Si una cifra del panel no gusta, no se retoca el panel: se corrige la evidencia en el registro y se vuelve a generar.</a:t>
+            </a:r>
+          </a:p>
+        </p:txBody>
+      </p:sp>
+    </p:spTree>
+  </p:cSld>
+  <p:clrMapOvr>
+    <a:overrideClrMapping bg1="lt1" tx1="dk1" bg2="lt2" tx2="dk2" accent1="accent1" accent2="accent2" accent3="accent3" accent4="accent4" accent5="accent5" accent6="accent6" hlink="hlink" folHlink="folHlink"/>
+  </p:clrMapOvr>
+</p:sld>
+</file>
+
+<file path=ppt/slides/slide13.xml><?xml version="1.0" encoding="utf-8"?>
+<p:sld xmlns:a="http://schemas.openxmlformats.org/drawingml/2006/main" xmlns:r="http://schemas.openxmlformats.org/officeDocument/2006/relationships" xmlns:p="http://schemas.openxmlformats.org/presentationml/2006/main">
+  <p:cSld>
+    <p:bg>
+      <p:bgPr>
+        <a:solidFill>
+          <a:srgbClr val="FBE2CD"/>
+        </a:solidFill>
+        <a:effectLst/>
+      </p:bgPr>
+    </p:bg>
+    <p:spTree>
+      <p:nvGrpSpPr>
+        <p:cNvPr id="1" name=""/>
+        <p:cNvGrpSpPr/>
+        <p:nvPr/>
+      </p:nvGrpSpPr>
+      <p:grpSpPr>
+        <a:xfrm>
+          <a:off x="0" y="0"/>
+          <a:ext cx="0" cy="0"/>
+          <a:chOff x="0" y="0"/>
+          <a:chExt cx="0" cy="0"/>
+        </a:xfrm>
+      </p:grpSpPr>
+      <p:sp>
+        <p:nvSpPr>
+          <p:cNvPr id="134" name="Marca"/>
+          <p:cNvSpPr/>
+          <p:nvPr/>
+        </p:nvSpPr>
+        <p:spPr>
+          <a:xfrm>
+            <a:off x="609600" y="365760"/>
+            <a:ext cx="182880" cy="182880"/>
+          </a:xfrm>
+          <a:prstGeom prst="rect">
+            <a:avLst/>
+          </a:prstGeom>
+          <a:solidFill>
+            <a:srgbClr val="990F3D"/>
+          </a:solidFill>
+        </p:spPr>
+        <p:txBody>
+          <a:bodyPr/>
+          <a:lstStyle/>
+          <a:p/>
+        </p:txBody>
+      </p:sp>
+      <p:sp>
+        <p:nvSpPr>
+          <p:cNvPr id="135" name="Texto 135"/>
+          <p:cNvSpPr txBox="1"/>
+          <p:nvPr/>
+        </p:nvSpPr>
+        <p:spPr>
+          <a:xfrm>
+            <a:off x="838200" y="300000"/>
+            <a:ext cx="10500000" cy="320000"/>
+          </a:xfrm>
+          <a:prstGeom prst="rect">
+            <a:avLst/>
+          </a:prstGeom>
+          <a:noFill/>
+        </p:spPr>
+        <p:txBody>
+          <a:bodyPr wrap="square" anchor="ctr" lIns="45720" rIns="45720">
+            <a:noAutofit/>
+          </a:bodyPr>
+          <a:lstStyle/>
+          <a:p>
+            <a:pPr algn="l"/>
+            <a:r>
+              <a:rPr lang="es-ES" sz="1400" b="1" dirty="0">
+                <a:solidFill>
+                  <a:srgbClr val="1A1817"/>
+                </a:solidFill>
+              </a:rPr>
+              <a:t>SEVEN-G · CURSO · PARTNER · INTEGRARLO EN SU METODOLOGÍA</a:t>
+            </a:r>
+          </a:p>
+        </p:txBody>
+      </p:sp>
+      <p:sp>
+        <p:nvSpPr>
+          <p:cNvPr id="136" name="Texto 136"/>
+          <p:cNvSpPr txBox="1"/>
+          <p:nvPr/>
+        </p:nvSpPr>
+        <p:spPr>
+          <a:xfrm>
+            <a:off x="609600" y="700000"/>
+            <a:ext cx="10972800" cy="650000"/>
+          </a:xfrm>
+          <a:prstGeom prst="rect">
+            <a:avLst/>
+          </a:prstGeom>
+          <a:noFill/>
+        </p:spPr>
+        <p:txBody>
+          <a:bodyPr wrap="square" anchor="t" lIns="45720" rIns="45720">
+            <a:noAutofit/>
+          </a:bodyPr>
+          <a:lstStyle/>
+          <a:p>
+            <a:pPr algn="l"/>
+            <a:r>
+              <a:rPr lang="es-ES" sz="2700" b="1" dirty="0">
+                <a:solidFill>
+                  <a:srgbClr val="990F3D"/>
+                </a:solidFill>
+              </a:rPr>
+              <a:t>Dónde está el impacto: esferas × ambición</a:t>
+            </a:r>
+          </a:p>
+        </p:txBody>
+      </p:sp>
+      <p:sp>
+        <p:nvSpPr>
+          <p:cNvPr id="137" name="Texto 137"/>
+          <p:cNvSpPr txBox="1"/>
+          <p:nvPr/>
+        </p:nvSpPr>
+        <p:spPr>
+          <a:xfrm>
+            <a:off x="609600" y="1330000"/>
+            <a:ext cx="10972800" cy="450000"/>
+          </a:xfrm>
+          <a:prstGeom prst="rect">
+            <a:avLst/>
+          </a:prstGeom>
+          <a:noFill/>
+        </p:spPr>
+        <p:txBody>
+          <a:bodyPr wrap="square" anchor="t" lIns="45720" rIns="45720">
+            <a:noAutofit/>
+          </a:bodyPr>
+          <a:lstStyle/>
+          <a:p>
+            <a:pPr algn="l"/>
+            <a:r>
+              <a:rPr lang="es-ES" sz="1500" dirty="0">
+                <a:solidFill>
+                  <a:srgbClr val="564D47"/>
+                </a:solidFill>
+              </a:rPr>
+              <a:t>El mapa de calor de la cartera (T16) en el mismo panel. Datos ficticios</a:t>
+            </a:r>
+          </a:p>
+        </p:txBody>
+      </p:sp>
+      <p:pic>
+        <p:nvPicPr>
+          <p:cNvPr id="131" name="Imagen 131" descr="Mapa de calor de esferas por nivel de ambición con casos, inversión, neto y brechas"/>
+          <p:cNvPicPr>
+            <a:picLocks noChangeAspect="1"/>
+          </p:cNvPicPr>
+          <p:nvPr/>
+        </p:nvPicPr>
+        <p:blipFill>
+          <a:blip r:embed="rIdImg_impacto"/>
+          <a:stretch>
+            <a:fillRect/>
+          </a:stretch>
+        </p:blipFill>
+        <p:spPr>
+          <a:xfrm>
+            <a:off x="609600" y="1900000"/>
+            <a:ext cx="6700000" cy="4243333"/>
+          </a:xfrm>
+          <a:prstGeom prst="rect">
+            <a:avLst/>
+          </a:prstGeom>
+          <a:ln w="12700">
+            <a:solidFill>
+              <a:srgbClr val="C9A78D"/>
+            </a:solidFill>
+          </a:ln>
+        </p:spPr>
+      </p:pic>
+      <p:sp>
+        <p:nvSpPr>
+          <p:cNvPr id="132" name="Texto 132"/>
+          <p:cNvSpPr txBox="1"/>
+          <p:nvPr/>
+        </p:nvSpPr>
+        <p:spPr>
+          <a:xfrm>
+            <a:off x="7509600" y="1850000"/>
+            <a:ext cx="4072800" cy="4400000"/>
+          </a:xfrm>
+          <a:prstGeom prst="rect">
+            <a:avLst/>
+          </a:prstGeom>
+          <a:noFill/>
+        </p:spPr>
+        <p:txBody>
+          <a:bodyPr wrap="square" anchor="t" lIns="45720" rIns="45720">
+            <a:noAutofit/>
+          </a:bodyPr>
+          <a:lstStyle/>
           <a:p>
             <a:pPr marL="285750" indent="-285750">
               <a:spcAft>
@@ -1290,14 +1536,94 @@
                   <a:srgbClr val="2F2B28"/>
                 </a:solidFill>
               </a:rPr>
-              <a:t>Otras páginas: embudo y ciclo de vida, histórico y adopción, riesgo y cumplimiento, inventario.</a:t>
-            </a:r>
-          </a:p>
-        </p:txBody>
-      </p:sp>
-      <p:sp>
-        <p:nvSpPr>
-          <p:cNvPr id="126" name="Texto 126"/>
+              <a:t>Filas: las áreas donde la IA crea valor (cliente, producto, personas, operaciones, datos, conocimiento, decisión). Columnas: optimizar, aumentar, transformar.</a:t>
+            </a:r>
+          </a:p>
+          <a:p>
+            <a:pPr marL="285750" indent="-285750">
+              <a:spcAft>
+                <a:spcPts val="400"/>
+              </a:spcAft>
+              <a:buClr>
+                <a:srgbClr val="990F3D"/>
+              </a:buClr>
+              <a:buFont typeface="Arial"/>
+              <a:buChar char="•"/>
+            </a:pPr>
+            <a:r>
+              <a:rPr lang="es-ES" sz="1300" dirty="0">
+                <a:solidFill>
+                  <a:srgbClr val="2F2B28"/>
+                </a:solidFill>
+              </a:rPr>
+              <a:t>Cada celda: casos, inversión y coste, neto anual y valor validado; el color dice dónde se concentra el gasto.</a:t>
+            </a:r>
+          </a:p>
+          <a:p>
+            <a:pPr marL="285750" indent="-285750">
+              <a:spcAft>
+                <a:spcPts val="400"/>
+              </a:spcAft>
+              <a:buClr>
+                <a:srgbClr val="990F3D"/>
+              </a:buClr>
+              <a:buFont typeface="Arial"/>
+              <a:buChar char="•"/>
+            </a:pPr>
+            <a:r>
+              <a:rPr lang="es-ES" sz="1300" dirty="0">
+                <a:solidFill>
+                  <a:srgbClr val="2F2B28"/>
+                </a:solidFill>
+              </a:rPr>
+              <a:t>«Brecha»: la ambición que aprobó la dirección en C2 para esa esfera no tiene ningún caso que haya superado G2.</a:t>
+            </a:r>
+          </a:p>
+          <a:p>
+            <a:pPr marL="285750" indent="-285750">
+              <a:spcAft>
+                <a:spcPts val="400"/>
+              </a:spcAft>
+              <a:buClr>
+                <a:srgbClr val="990F3D"/>
+              </a:buClr>
+              <a:buFont typeface="Arial"/>
+              <a:buChar char="•"/>
+            </a:pPr>
+            <a:r>
+              <a:rPr lang="es-ES" sz="1300" dirty="0">
+                <a:solidFill>
+                  <a:srgbClr val="2F2B28"/>
+                </a:solidFill>
+              </a:rPr>
+              <a:t>En el ejemplo: el 40 % del gasto está en Cliente, Datos no tiene actividad y cinco esferas tienen brecha.</a:t>
+            </a:r>
+          </a:p>
+          <a:p>
+            <a:pPr marL="285750" indent="-285750">
+              <a:spcAft>
+                <a:spcPts val="400"/>
+              </a:spcAft>
+              <a:buClr>
+                <a:srgbClr val="990F3D"/>
+              </a:buClr>
+              <a:buFont typeface="Arial"/>
+              <a:buChar char="•"/>
+            </a:pPr>
+            <a:r>
+              <a:rPr lang="es-ES" sz="1300" dirty="0">
+                <a:solidFill>
+                  <a:srgbClr val="2F2B28"/>
+                </a:solidFill>
+              </a:rPr>
+              <a:t>La ambición objetivo sale de la tesis aprobada en el registro, no se escribe en el panel.</a:t>
+            </a:r>
+          </a:p>
+        </p:txBody>
+      </p:sp>
+      <p:sp>
+        <p:nvSpPr>
+          <p:cNvPr id="133" name="Texto 133"/>
           <p:cNvSpPr txBox="1"/>
           <p:nvPr/>
         </p:nvSpPr>
@@ -1324,7 +1650,7 @@
                   <a:srgbClr val="0F5499"/>
                 </a:solidFill>
               </a:rPr>
-              <a:t>Si una cifra del panel no gusta, no se retoca el panel: se corrige la evidencia en el registro y se vuelve a generar.</a:t>
+              <a:t>La pregunta que responde: ¿dónde tiene la IA más impacto en la compañía y dónde no estamos jugando? (documento 10 §8)</a:t>
             </a:r>
           </a:p>
         </p:txBody>
@@ -1337,7 +1663,7 @@
 </p:sld>
 </file>
 
-<file path=ppt/slides/slide13.xml><?xml version="1.0" encoding="utf-8"?>
+<file path=ppt/slides/slide14.xml><?xml version="1.0" encoding="utf-8"?>
 <p:sld xmlns:a="http://schemas.openxmlformats.org/drawingml/2006/main" xmlns:r="http://schemas.openxmlformats.org/officeDocument/2006/relationships" xmlns:p="http://schemas.openxmlformats.org/presentationml/2006/main">
   <p:cSld>
     <p:bg>
@@ -1364,7 +1690,7 @@
       </p:grpSpPr>
       <p:sp>
         <p:nvSpPr>
-          <p:cNvPr id="131" name="Marca"/>
+          <p:cNvPr id="138" name="Marca"/>
           <p:cNvSpPr/>
           <p:nvPr/>
         </p:nvSpPr>
@@ -1388,7 +1714,7 @@
       </p:sp>
       <p:sp>
         <p:nvSpPr>
-          <p:cNvPr id="132" name="Texto 132"/>
+          <p:cNvPr id="139" name="Texto 139"/>
           <p:cNvSpPr txBox="1"/>
           <p:nvPr/>
         </p:nvSpPr>
@@ -1422,7 +1748,7 @@
       </p:sp>
       <p:sp>
         <p:nvSpPr>
-          <p:cNvPr id="133" name="Texto 133"/>
+          <p:cNvPr id="140" name="Texto 140"/>
           <p:cNvSpPr txBox="1"/>
           <p:nvPr/>
         </p:nvSpPr>
@@ -1456,7 +1782,7 @@
       </p:sp>
       <p:sp>
         <p:nvSpPr>
-          <p:cNvPr id="134" name="Texto 134"/>
+          <p:cNvPr id="141" name="Texto 141"/>
           <p:cNvSpPr txBox="1"/>
           <p:nvPr/>
         </p:nvSpPr>
@@ -1484,349 +1810,6 @@
                 </a:solidFill>
               </a:rPr>
               <a:t>Datos ficticios, ilustrativos: no describen ninguna compañía real.</a:t>
-            </a:r>
-          </a:p>
-        </p:txBody>
-      </p:sp>
-    </p:spTree>
-  </p:cSld>
-  <p:clrMapOvr>
-    <a:overrideClrMapping bg1="lt1" tx1="dk1" bg2="lt2" tx2="dk2" accent1="accent1" accent2="accent2" accent3="accent3" accent4="accent4" accent5="accent5" accent6="accent6" hlink="hlink" folHlink="folHlink"/>
-  </p:clrMapOvr>
-</p:sld>
-</file>
-
-<file path=ppt/slides/slide14.xml><?xml version="1.0" encoding="utf-8"?>
-<p:sld xmlns:a="http://schemas.openxmlformats.org/drawingml/2006/main" xmlns:r="http://schemas.openxmlformats.org/officeDocument/2006/relationships" xmlns:p="http://schemas.openxmlformats.org/presentationml/2006/main">
-  <p:cSld>
-    <p:bg>
-      <p:bgPr>
-        <a:solidFill>
-          <a:srgbClr val="FBE2CD"/>
-        </a:solidFill>
-        <a:effectLst/>
-      </p:bgPr>
-    </p:bg>
-    <p:spTree>
-      <p:nvGrpSpPr>
-        <p:cNvPr id="1" name=""/>
-        <p:cNvGrpSpPr/>
-        <p:nvPr/>
-      </p:nvGrpSpPr>
-      <p:grpSpPr>
-        <a:xfrm>
-          <a:off x="0" y="0"/>
-          <a:ext cx="0" cy="0"/>
-          <a:chOff x="0" y="0"/>
-          <a:chExt cx="0" cy="0"/>
-        </a:xfrm>
-      </p:grpSpPr>
-      <p:sp>
-        <p:nvSpPr>
-          <p:cNvPr id="138" name="Marca"/>
-          <p:cNvSpPr/>
-          <p:nvPr/>
-        </p:nvSpPr>
-        <p:spPr>
-          <a:xfrm>
-            <a:off x="609600" y="365760"/>
-            <a:ext cx="182880" cy="182880"/>
-          </a:xfrm>
-          <a:prstGeom prst="rect">
-            <a:avLst/>
-          </a:prstGeom>
-          <a:solidFill>
-            <a:srgbClr val="990F3D"/>
-          </a:solidFill>
-        </p:spPr>
-        <p:txBody>
-          <a:bodyPr/>
-          <a:lstStyle/>
-          <a:p/>
-        </p:txBody>
-      </p:sp>
-      <p:sp>
-        <p:nvSpPr>
-          <p:cNvPr id="139" name="Texto 139"/>
-          <p:cNvSpPr txBox="1"/>
-          <p:nvPr/>
-        </p:nvSpPr>
-        <p:spPr>
-          <a:xfrm>
-            <a:off x="838200" y="300000"/>
-            <a:ext cx="10500000" cy="320000"/>
-          </a:xfrm>
-          <a:prstGeom prst="rect">
-            <a:avLst/>
-          </a:prstGeom>
-          <a:noFill/>
-        </p:spPr>
-        <p:txBody>
-          <a:bodyPr wrap="square" anchor="ctr" lIns="45720" rIns="45720">
-            <a:noAutofit/>
-          </a:bodyPr>
-          <a:lstStyle/>
-          <a:p>
-            <a:pPr algn="l"/>
-            <a:r>
-              <a:rPr lang="es-ES" sz="1400" b="1" dirty="0">
-                <a:solidFill>
-                  <a:srgbClr val="1A1817"/>
-                </a:solidFill>
-              </a:rPr>
-              <a:t>SEVEN-G · CURSO · PARTNER · INTEGRARLO EN SU METODOLOGÍA</a:t>
-            </a:r>
-          </a:p>
-        </p:txBody>
-      </p:sp>
-      <p:sp>
-        <p:nvSpPr>
-          <p:cNvPr id="140" name="Texto 140"/>
-          <p:cNvSpPr txBox="1"/>
-          <p:nvPr/>
-        </p:nvSpPr>
-        <p:spPr>
-          <a:xfrm>
-            <a:off x="609600" y="700000"/>
-            <a:ext cx="10972800" cy="650000"/>
-          </a:xfrm>
-          <a:prstGeom prst="rect">
-            <a:avLst/>
-          </a:prstGeom>
-          <a:noFill/>
-        </p:spPr>
-        <p:txBody>
-          <a:bodyPr wrap="square" anchor="t" lIns="45720" rIns="45720">
-            <a:noAutofit/>
-          </a:bodyPr>
-          <a:lstStyle/>
-          <a:p>
-            <a:pPr algn="l"/>
-            <a:r>
-              <a:rPr lang="es-ES" sz="2700" b="1" dirty="0">
-                <a:solidFill>
-                  <a:srgbClr val="990F3D"/>
-                </a:solidFill>
-              </a:rPr>
-              <a:t>Ejemplo 1 · Cuando una iniciativa se para</a:t>
-            </a:r>
-          </a:p>
-        </p:txBody>
-      </p:sp>
-      <p:sp>
-        <p:nvSpPr>
-          <p:cNvPr id="135" name="Texto 135"/>
-          <p:cNvSpPr txBox="1"/>
-          <p:nvPr/>
-        </p:nvSpPr>
-        <p:spPr>
-          <a:xfrm>
-            <a:off x="609600" y="1330000"/>
-            <a:ext cx="10972800" cy="500000"/>
-          </a:xfrm>
-          <a:prstGeom prst="rect">
-            <a:avLst/>
-          </a:prstGeom>
-          <a:noFill/>
-        </p:spPr>
-        <p:txBody>
-          <a:bodyPr wrap="square" anchor="t" lIns="45720" rIns="45720">
-            <a:noAutofit/>
-          </a:bodyPr>
-          <a:lstStyle/>
-          <a:p>
-            <a:pPr algn="l"/>
-            <a:r>
-              <a:rPr lang="es-ES" sz="1700" b="1" dirty="0">
-                <a:solidFill>
-                  <a:srgbClr val="2F2B28"/>
-                </a:solidFill>
-              </a:rPr>
-              <a:t>Cribado de candidaturas en procesos de selección (RR. HH.)</a:t>
-            </a:r>
-          </a:p>
-        </p:txBody>
-      </p:sp>
-      <p:sp>
-        <p:nvSpPr>
-          <p:cNvPr id="136" name="Texto 136"/>
-          <p:cNvSpPr txBox="1"/>
-          <p:nvPr/>
-        </p:nvSpPr>
-        <p:spPr>
-          <a:xfrm>
-            <a:off x="609600" y="1900000"/>
-            <a:ext cx="10972800" cy="3550000"/>
-          </a:xfrm>
-          <a:prstGeom prst="rect">
-            <a:avLst/>
-          </a:prstGeom>
-          <a:noFill/>
-        </p:spPr>
-        <p:txBody>
-          <a:bodyPr wrap="square" anchor="t" lIns="45720" rIns="45720">
-            <a:noAutofit/>
-          </a:bodyPr>
-          <a:lstStyle/>
-          <a:p>
-            <a:pPr marL="285750" indent="-285750">
-              <a:spcAft>
-                <a:spcPts val="400"/>
-              </a:spcAft>
-              <a:buClr>
-                <a:srgbClr val="990F3D"/>
-              </a:buClr>
-              <a:buFont typeface="Arial"/>
-              <a:buChar char="•"/>
-            </a:pPr>
-            <a:r>
-              <a:rPr lang="es-ES" sz="1500" dirty="0">
-                <a:solidFill>
-                  <a:srgbClr val="2F2B28"/>
-                </a:solidFill>
-              </a:rPr>
-              <a:t>Fases 0 y 1: RR. HH. la patrocina (P01–P05). Al decidir sobre personas, la intensidad es Enterprise (P04). Entra en «Propuesto».</a:t>
-            </a:r>
-          </a:p>
-          <a:p>
-            <a:pPr marL="285750" indent="-285750">
-              <a:spcAft>
-                <a:spcPts val="400"/>
-              </a:spcAft>
-              <a:buClr>
-                <a:srgbClr val="990F3D"/>
-              </a:buClr>
-              <a:buFont typeface="Arial"/>
-              <a:buChar char="•"/>
-            </a:pPr>
-            <a:r>
-              <a:rPr lang="es-ES" sz="1500" dirty="0">
-                <a:solidFill>
-                  <a:srgbClr val="2F2B28"/>
-                </a:solidFill>
-              </a:rPr>
-              <a:t>Fase 2: la hipótesis (P08) promete un 40 % menos de tiempo de cribado frente a la línea base (P09). El piloto lo confirma: G2, Continuar.</a:t>
-            </a:r>
-          </a:p>
-          <a:p>
-            <a:pPr marL="285750" indent="-285750">
-              <a:spcAft>
-                <a:spcPts val="400"/>
-              </a:spcAft>
-              <a:buClr>
-                <a:srgbClr val="990F3D"/>
-              </a:buClr>
-              <a:buFont typeface="Arial"/>
-              <a:buChar char="•"/>
-            </a:pPr>
-            <a:r>
-              <a:rPr lang="es-ES" sz="1500" dirty="0">
-                <a:solidFill>
-                  <a:srgbClr val="2F2B28"/>
-                </a:solidFill>
-              </a:rPr>
-              <a:t>Fase 3: la clasificación regulatoria (P11) lo sitúa como sistema de alto riesgo. La prueba de sesgo detecta que penaliza a candidatos de más edad.</a:t>
-            </a:r>
-          </a:p>
-          <a:p>
-            <a:pPr marL="285750" indent="-285750">
-              <a:spcAft>
-                <a:spcPts val="400"/>
-              </a:spcAft>
-              <a:buClr>
-                <a:srgbClr val="990F3D"/>
-              </a:buClr>
-              <a:buFont typeface="Arial"/>
-              <a:buChar char="•"/>
-            </a:pPr>
-            <a:r>
-              <a:rPr lang="es-ES" sz="1500" dirty="0">
-                <a:solidFill>
-                  <a:srgbClr val="2F2B28"/>
-                </a:solidFill>
-              </a:rPr>
-              <a:t>Se itera dos veces ajustando variables: corregir el sesgo destruye la capacidad predictiva que justificaba el proyecto.</a:t>
-            </a:r>
-          </a:p>
-          <a:p>
-            <a:pPr marL="285750" indent="-285750">
-              <a:spcAft>
-                <a:spcPts val="400"/>
-              </a:spcAft>
-              <a:buClr>
-                <a:srgbClr val="990F3D"/>
-              </a:buClr>
-              <a:buFont typeface="Arial"/>
-              <a:buChar char="•"/>
-            </a:pPr>
-            <a:r>
-              <a:rPr lang="es-ES" sz="1500" dirty="0">
-                <a:solidFill>
-                  <a:srgbClr val="2F2B28"/>
-                </a:solidFill>
-              </a:rPr>
-              <a:t>G3: riesgo residual alto sin mitigación viable (P12, P13). El comité de IA decide Parar; queda en P29 con su motivo.</a:t>
-            </a:r>
-          </a:p>
-          <a:p>
-            <a:pPr marL="285750" indent="-285750">
-              <a:spcAft>
-                <a:spcPts val="400"/>
-              </a:spcAft>
-              <a:buClr>
-                <a:srgbClr val="990F3D"/>
-              </a:buClr>
-              <a:buFont typeface="Arial"/>
-              <a:buChar char="•"/>
-            </a:pPr>
-            <a:r>
-              <a:rPr lang="es-ES" sz="1500" dirty="0">
-                <a:solidFill>
-                  <a:srgbClr val="2F2B28"/>
-                </a:solidFill>
-              </a:rPr>
-              <a:t>En el embudo aparece a la derecha de «Prueba de concepto»: Descartado · riesgo inaceptable. Lección: probar el sesgo antes, en la fase 2.</a:t>
-            </a:r>
-          </a:p>
-        </p:txBody>
-      </p:sp>
-      <p:sp>
-        <p:nvSpPr>
-          <p:cNvPr id="137" name="Caja 137"/>
-          <p:cNvSpPr/>
-          <p:nvPr/>
-        </p:nvSpPr>
-        <p:spPr>
-          <a:xfrm>
-            <a:off x="609600" y="5600000"/>
-            <a:ext cx="10972800" cy="900000"/>
-          </a:xfrm>
-          <a:prstGeom prst="roundRect">
-            <a:avLst>
-              <a:gd name="adj" fmla="val 6000"/>
-            </a:avLst>
-          </a:prstGeom>
-          <a:solidFill>
-            <a:srgbClr val="990F3D"/>
-          </a:solidFill>
-          <a:ln>
-            <a:noFill/>
-          </a:ln>
-        </p:spPr>
-        <p:txBody>
-          <a:bodyPr wrap="square" anchor="ctr" lIns="45720" rIns="45720">
-            <a:noAutofit/>
-          </a:bodyPr>
-          <a:lstStyle/>
-          <a:p>
-            <a:pPr algn="ctr"/>
-            <a:r>
-              <a:rPr lang="es-ES" sz="2100" b="1" dirty="0">
-                <a:solidFill>
-                  <a:srgbClr val="FFFFFF"/>
-                </a:solidFill>
-              </a:rPr>
-              <a:t>PARADA EN G3 · SE EVITÓ CONSTRUIR Y OPERAR UN SISTEMA INVIABLE</a:t>
             </a:r>
           </a:p>
         </p:txBody>
@@ -1866,7 +1849,7 @@
       </p:grpSpPr>
       <p:sp>
         <p:nvSpPr>
-          <p:cNvPr id="158" name="Marca"/>
+          <p:cNvPr id="145" name="Marca"/>
           <p:cNvSpPr/>
           <p:nvPr/>
         </p:nvSpPr>
@@ -1890,7 +1873,7 @@
       </p:sp>
       <p:sp>
         <p:nvSpPr>
-          <p:cNvPr id="159" name="Texto 159"/>
+          <p:cNvPr id="146" name="Texto 146"/>
           <p:cNvSpPr txBox="1"/>
           <p:nvPr/>
         </p:nvSpPr>
@@ -1924,7 +1907,7 @@
       </p:sp>
       <p:sp>
         <p:nvSpPr>
-          <p:cNvPr id="160" name="Texto 160"/>
+          <p:cNvPr id="147" name="Texto 147"/>
           <p:cNvSpPr txBox="1"/>
           <p:nvPr/>
         </p:nvSpPr>
@@ -1951,21 +1934,21 @@
                   <a:srgbClr val="990F3D"/>
                 </a:solidFill>
               </a:rPr>
-              <a:t>La iniciativa 1, sobre el ciclo de vida</a:t>
-            </a:r>
-          </a:p>
-        </p:txBody>
-      </p:sp>
-      <p:sp>
-        <p:nvSpPr>
-          <p:cNvPr id="161" name="Texto 161"/>
+              <a:t>Ejemplo 1 · Cuando una iniciativa se para</a:t>
+            </a:r>
+          </a:p>
+        </p:txBody>
+      </p:sp>
+      <p:sp>
+        <p:nvSpPr>
+          <p:cNvPr id="142" name="Texto 142"/>
           <p:cNvSpPr txBox="1"/>
           <p:nvPr/>
         </p:nvSpPr>
         <p:spPr>
           <a:xfrm>
             <a:off x="609600" y="1330000"/>
-            <a:ext cx="10972800" cy="450000"/>
+            <a:ext cx="10972800" cy="500000"/>
           </a:xfrm>
           <a:prstGeom prst="rect">
             <a:avLst/>
@@ -1980,26 +1963,169 @@
           <a:p>
             <a:pPr algn="l"/>
             <a:r>
+              <a:rPr lang="es-ES" sz="1700" b="1" dirty="0">
+                <a:solidFill>
+                  <a:srgbClr val="2F2B28"/>
+                </a:solidFill>
+              </a:rPr>
+              <a:t>Cribado de candidaturas en procesos de selección (RR. HH.)</a:t>
+            </a:r>
+          </a:p>
+        </p:txBody>
+      </p:sp>
+      <p:sp>
+        <p:nvSpPr>
+          <p:cNvPr id="143" name="Texto 143"/>
+          <p:cNvSpPr txBox="1"/>
+          <p:nvPr/>
+        </p:nvSpPr>
+        <p:spPr>
+          <a:xfrm>
+            <a:off x="609600" y="1900000"/>
+            <a:ext cx="10972800" cy="3550000"/>
+          </a:xfrm>
+          <a:prstGeom prst="rect">
+            <a:avLst/>
+          </a:prstGeom>
+          <a:noFill/>
+        </p:spPr>
+        <p:txBody>
+          <a:bodyPr wrap="square" anchor="t" lIns="45720" rIns="45720">
+            <a:noAutofit/>
+          </a:bodyPr>
+          <a:lstStyle/>
+          <a:p>
+            <a:pPr marL="285750" indent="-285750">
+              <a:spcAft>
+                <a:spcPts val="400"/>
+              </a:spcAft>
+              <a:buClr>
+                <a:srgbClr val="990F3D"/>
+              </a:buClr>
+              <a:buFont typeface="Arial"/>
+              <a:buChar char="•"/>
+            </a:pPr>
+            <a:r>
               <a:rPr lang="es-ES" sz="1500" dirty="0">
                 <a:solidFill>
-                  <a:srgbClr val="564D47"/>
-                </a:solidFill>
-              </a:rPr>
-              <a:t>Llegó a la fase 3 y no superó la puerta G3</a:t>
-            </a:r>
-          </a:p>
-        </p:txBody>
-      </p:sp>
-      <p:sp>
-        <p:nvSpPr>
-          <p:cNvPr id="141" name="Caja 141"/>
+                  <a:srgbClr val="2F2B28"/>
+                </a:solidFill>
+              </a:rPr>
+              <a:t>Fases 0 y 1: RR. HH. la patrocina (P01–P05). Al decidir sobre personas, la intensidad es Enterprise (P04). Entra en «Propuesto».</a:t>
+            </a:r>
+          </a:p>
+          <a:p>
+            <a:pPr marL="285750" indent="-285750">
+              <a:spcAft>
+                <a:spcPts val="400"/>
+              </a:spcAft>
+              <a:buClr>
+                <a:srgbClr val="990F3D"/>
+              </a:buClr>
+              <a:buFont typeface="Arial"/>
+              <a:buChar char="•"/>
+            </a:pPr>
+            <a:r>
+              <a:rPr lang="es-ES" sz="1500" dirty="0">
+                <a:solidFill>
+                  <a:srgbClr val="2F2B28"/>
+                </a:solidFill>
+              </a:rPr>
+              <a:t>Fase 2: la hipótesis (P08) promete un 40 % menos de tiempo de cribado frente a la línea base (P09). El piloto lo confirma: G2, Continuar.</a:t>
+            </a:r>
+          </a:p>
+          <a:p>
+            <a:pPr marL="285750" indent="-285750">
+              <a:spcAft>
+                <a:spcPts val="400"/>
+              </a:spcAft>
+              <a:buClr>
+                <a:srgbClr val="990F3D"/>
+              </a:buClr>
+              <a:buFont typeface="Arial"/>
+              <a:buChar char="•"/>
+            </a:pPr>
+            <a:r>
+              <a:rPr lang="es-ES" sz="1500" dirty="0">
+                <a:solidFill>
+                  <a:srgbClr val="2F2B28"/>
+                </a:solidFill>
+              </a:rPr>
+              <a:t>Fase 3: la clasificación regulatoria (P11) lo sitúa como sistema de alto riesgo. La prueba de sesgo detecta que penaliza a candidatos de más edad.</a:t>
+            </a:r>
+          </a:p>
+          <a:p>
+            <a:pPr marL="285750" indent="-285750">
+              <a:spcAft>
+                <a:spcPts val="400"/>
+              </a:spcAft>
+              <a:buClr>
+                <a:srgbClr val="990F3D"/>
+              </a:buClr>
+              <a:buFont typeface="Arial"/>
+              <a:buChar char="•"/>
+            </a:pPr>
+            <a:r>
+              <a:rPr lang="es-ES" sz="1500" dirty="0">
+                <a:solidFill>
+                  <a:srgbClr val="2F2B28"/>
+                </a:solidFill>
+              </a:rPr>
+              <a:t>Se itera dos veces ajustando variables: corregir el sesgo destruye la capacidad predictiva que justificaba el proyecto.</a:t>
+            </a:r>
+          </a:p>
+          <a:p>
+            <a:pPr marL="285750" indent="-285750">
+              <a:spcAft>
+                <a:spcPts val="400"/>
+              </a:spcAft>
+              <a:buClr>
+                <a:srgbClr val="990F3D"/>
+              </a:buClr>
+              <a:buFont typeface="Arial"/>
+              <a:buChar char="•"/>
+            </a:pPr>
+            <a:r>
+              <a:rPr lang="es-ES" sz="1500" dirty="0">
+                <a:solidFill>
+                  <a:srgbClr val="2F2B28"/>
+                </a:solidFill>
+              </a:rPr>
+              <a:t>G3: riesgo residual alto sin mitigación viable (P12, P13). El comité de IA decide Parar; queda en P29 con su motivo.</a:t>
+            </a:r>
+          </a:p>
+          <a:p>
+            <a:pPr marL="285750" indent="-285750">
+              <a:spcAft>
+                <a:spcPts val="400"/>
+              </a:spcAft>
+              <a:buClr>
+                <a:srgbClr val="990F3D"/>
+              </a:buClr>
+              <a:buFont typeface="Arial"/>
+              <a:buChar char="•"/>
+            </a:pPr>
+            <a:r>
+              <a:rPr lang="es-ES" sz="1500" dirty="0">
+                <a:solidFill>
+                  <a:srgbClr val="2F2B28"/>
+                </a:solidFill>
+              </a:rPr>
+              <a:t>En el embudo aparece a la derecha de «Prueba de concepto»: Descartado · riesgo inaceptable. Lección: probar el sesgo antes, en la fase 2.</a:t>
+            </a:r>
+          </a:p>
+        </p:txBody>
+      </p:sp>
+      <p:sp>
+        <p:nvSpPr>
+          <p:cNvPr id="144" name="Caja 144"/>
           <p:cNvSpPr/>
           <p:nvPr/>
         </p:nvSpPr>
         <p:spPr>
           <a:xfrm>
-            <a:off x="681000" y="2350000"/>
-            <a:ext cx="1240000" cy="1500000"/>
+            <a:off x="609600" y="5600000"/>
+            <a:ext cx="10972800" cy="900000"/>
           </a:xfrm>
           <a:prstGeom prst="roundRect">
             <a:avLst>
@@ -2021,693 +2147,12 @@
           <a:p>
             <a:pPr algn="ctr"/>
             <a:r>
-              <a:rPr lang="es-ES" sz="2400" b="1" dirty="0">
+              <a:rPr lang="es-ES" sz="2100" b="1" dirty="0">
                 <a:solidFill>
                   <a:srgbClr val="FFFFFF"/>
                 </a:solidFill>
               </a:rPr>
-              <a:t>F0</a:t>
-            </a:r>
-          </a:p>
-          <a:p>
-            <a:pPr algn="ctr"/>
-            <a:r>
-              <a:rPr lang="es-ES" sz="1050" dirty="0">
-                <a:solidFill>
-                  <a:srgbClr val="FFFFFF"/>
-                </a:solidFill>
-              </a:rPr>
-              <a:t>Contexto y restricciones</a:t>
-            </a:r>
-          </a:p>
-        </p:txBody>
-      </p:sp>
-      <p:sp>
-        <p:nvSpPr>
-          <p:cNvPr id="142" name="Texto 142"/>
-          <p:cNvSpPr txBox="1"/>
-          <p:nvPr/>
-        </p:nvSpPr>
-        <p:spPr>
-          <a:xfrm>
-            <a:off x="1591000" y="3900000"/>
-            <a:ext cx="800000" cy="300000"/>
-          </a:xfrm>
-          <a:prstGeom prst="rect">
-            <a:avLst/>
-          </a:prstGeom>
-          <a:noFill/>
-        </p:spPr>
-        <p:txBody>
-          <a:bodyPr wrap="square" anchor="t" lIns="45720" rIns="45720">
-            <a:noAutofit/>
-          </a:bodyPr>
-          <a:lstStyle/>
-          <a:p>
-            <a:pPr algn="ctr"/>
-            <a:r>
-              <a:rPr lang="es-ES" sz="1200" b="1" dirty="0">
-                <a:solidFill>
-                  <a:srgbClr val="990F3D"/>
-                </a:solidFill>
-              </a:rPr>
-              <a:t>G0</a:t>
-            </a:r>
-          </a:p>
-        </p:txBody>
-      </p:sp>
-      <p:sp>
-        <p:nvSpPr>
-          <p:cNvPr id="143" name="Caja 143"/>
-          <p:cNvSpPr/>
-          <p:nvPr/>
-        </p:nvSpPr>
-        <p:spPr>
-          <a:xfrm>
-            <a:off x="2051000" y="2350000"/>
-            <a:ext cx="1240000" cy="1500000"/>
-          </a:xfrm>
-          <a:prstGeom prst="roundRect">
-            <a:avLst>
-              <a:gd name="adj" fmla="val 6000"/>
-            </a:avLst>
-          </a:prstGeom>
-          <a:solidFill>
-            <a:srgbClr val="990F3D"/>
-          </a:solidFill>
-          <a:ln>
-            <a:noFill/>
-          </a:ln>
-        </p:spPr>
-        <p:txBody>
-          <a:bodyPr wrap="square" anchor="ctr" lIns="45720" rIns="45720">
-            <a:noAutofit/>
-          </a:bodyPr>
-          <a:lstStyle/>
-          <a:p>
-            <a:pPr algn="ctr"/>
-            <a:r>
-              <a:rPr lang="es-ES" sz="2400" b="1" dirty="0">
-                <a:solidFill>
-                  <a:srgbClr val="FFFFFF"/>
-                </a:solidFill>
-              </a:rPr>
-              <a:t>F1</a:t>
-            </a:r>
-          </a:p>
-          <a:p>
-            <a:pPr algn="ctr"/>
-            <a:r>
-              <a:rPr lang="es-ES" sz="1050" dirty="0">
-                <a:solidFill>
-                  <a:srgbClr val="FFFFFF"/>
-                </a:solidFill>
-              </a:rPr>
-              <a:t>Descubrimiento de oportunidades</a:t>
-            </a:r>
-          </a:p>
-        </p:txBody>
-      </p:sp>
-      <p:sp>
-        <p:nvSpPr>
-          <p:cNvPr id="144" name="Texto 144"/>
-          <p:cNvSpPr txBox="1"/>
-          <p:nvPr/>
-        </p:nvSpPr>
-        <p:spPr>
-          <a:xfrm>
-            <a:off x="2961000" y="3900000"/>
-            <a:ext cx="800000" cy="300000"/>
-          </a:xfrm>
-          <a:prstGeom prst="rect">
-            <a:avLst/>
-          </a:prstGeom>
-          <a:noFill/>
-        </p:spPr>
-        <p:txBody>
-          <a:bodyPr wrap="square" anchor="t" lIns="45720" rIns="45720">
-            <a:noAutofit/>
-          </a:bodyPr>
-          <a:lstStyle/>
-          <a:p>
-            <a:pPr algn="ctr"/>
-            <a:r>
-              <a:rPr lang="es-ES" sz="1200" b="1" dirty="0">
-                <a:solidFill>
-                  <a:srgbClr val="990F3D"/>
-                </a:solidFill>
-              </a:rPr>
-              <a:t>G1</a:t>
-            </a:r>
-          </a:p>
-        </p:txBody>
-      </p:sp>
-      <p:sp>
-        <p:nvSpPr>
-          <p:cNvPr id="145" name="Caja 145"/>
-          <p:cNvSpPr/>
-          <p:nvPr/>
-        </p:nvSpPr>
-        <p:spPr>
-          <a:xfrm>
-            <a:off x="3421000" y="2350000"/>
-            <a:ext cx="1240000" cy="1500000"/>
-          </a:xfrm>
-          <a:prstGeom prst="roundRect">
-            <a:avLst>
-              <a:gd name="adj" fmla="val 6000"/>
-            </a:avLst>
-          </a:prstGeom>
-          <a:solidFill>
-            <a:srgbClr val="990F3D"/>
-          </a:solidFill>
-          <a:ln>
-            <a:noFill/>
-          </a:ln>
-        </p:spPr>
-        <p:txBody>
-          <a:bodyPr wrap="square" anchor="ctr" lIns="45720" rIns="45720">
-            <a:noAutofit/>
-          </a:bodyPr>
-          <a:lstStyle/>
-          <a:p>
-            <a:pPr algn="ctr"/>
-            <a:r>
-              <a:rPr lang="es-ES" sz="2400" b="1" dirty="0">
-                <a:solidFill>
-                  <a:srgbClr val="FFFFFF"/>
-                </a:solidFill>
-              </a:rPr>
-              <a:t>F2</a:t>
-            </a:r>
-          </a:p>
-          <a:p>
-            <a:pPr algn="ctr"/>
-            <a:r>
-              <a:rPr lang="es-ES" sz="1050" dirty="0">
-                <a:solidFill>
-                  <a:srgbClr val="FFFFFF"/>
-                </a:solidFill>
-              </a:rPr>
-              <a:t>Hipótesis de valor</a:t>
-            </a:r>
-          </a:p>
-        </p:txBody>
-      </p:sp>
-      <p:sp>
-        <p:nvSpPr>
-          <p:cNvPr id="146" name="Texto 146"/>
-          <p:cNvSpPr txBox="1"/>
-          <p:nvPr/>
-        </p:nvSpPr>
-        <p:spPr>
-          <a:xfrm>
-            <a:off x="4331000" y="3900000"/>
-            <a:ext cx="800000" cy="300000"/>
-          </a:xfrm>
-          <a:prstGeom prst="rect">
-            <a:avLst/>
-          </a:prstGeom>
-          <a:noFill/>
-        </p:spPr>
-        <p:txBody>
-          <a:bodyPr wrap="square" anchor="t" lIns="45720" rIns="45720">
-            <a:noAutofit/>
-          </a:bodyPr>
-          <a:lstStyle/>
-          <a:p>
-            <a:pPr algn="ctr"/>
-            <a:r>
-              <a:rPr lang="es-ES" sz="1200" b="1" dirty="0">
-                <a:solidFill>
-                  <a:srgbClr val="990F3D"/>
-                </a:solidFill>
-              </a:rPr>
-              <a:t>G2</a:t>
-            </a:r>
-          </a:p>
-        </p:txBody>
-      </p:sp>
-      <p:sp>
-        <p:nvSpPr>
-          <p:cNvPr id="147" name="Caja 147"/>
-          <p:cNvSpPr/>
-          <p:nvPr/>
-        </p:nvSpPr>
-        <p:spPr>
-          <a:xfrm>
-            <a:off x="4791000" y="2350000"/>
-            <a:ext cx="1240000" cy="1500000"/>
-          </a:xfrm>
-          <a:prstGeom prst="roundRect">
-            <a:avLst>
-              <a:gd name="adj" fmla="val 6000"/>
-            </a:avLst>
-          </a:prstGeom>
-          <a:solidFill>
-            <a:srgbClr val="990F3D"/>
-          </a:solidFill>
-          <a:ln>
-            <a:noFill/>
-          </a:ln>
-        </p:spPr>
-        <p:txBody>
-          <a:bodyPr wrap="square" anchor="ctr" lIns="45720" rIns="45720">
-            <a:noAutofit/>
-          </a:bodyPr>
-          <a:lstStyle/>
-          <a:p>
-            <a:pPr algn="ctr"/>
-            <a:r>
-              <a:rPr lang="es-ES" sz="2400" b="1" dirty="0">
-                <a:solidFill>
-                  <a:srgbClr val="FFFFFF"/>
-                </a:solidFill>
-              </a:rPr>
-              <a:t>F3</a:t>
-            </a:r>
-          </a:p>
-          <a:p>
-            <a:pPr algn="ctr"/>
-            <a:r>
-              <a:rPr lang="es-ES" sz="1050" dirty="0">
-                <a:solidFill>
-                  <a:srgbClr val="FFFFFF"/>
-                </a:solidFill>
-              </a:rPr>
-              <a:t>Viabilidad y riesgo</a:t>
-            </a:r>
-          </a:p>
-        </p:txBody>
-      </p:sp>
-      <p:sp>
-        <p:nvSpPr>
-          <p:cNvPr id="148" name="Texto 148"/>
-          <p:cNvSpPr txBox="1"/>
-          <p:nvPr/>
-        </p:nvSpPr>
-        <p:spPr>
-          <a:xfrm>
-            <a:off x="5701000" y="3900000"/>
-            <a:ext cx="800000" cy="300000"/>
-          </a:xfrm>
-          <a:prstGeom prst="rect">
-            <a:avLst/>
-          </a:prstGeom>
-          <a:noFill/>
-        </p:spPr>
-        <p:txBody>
-          <a:bodyPr wrap="square" anchor="t" lIns="45720" rIns="45720">
-            <a:noAutofit/>
-          </a:bodyPr>
-          <a:lstStyle/>
-          <a:p>
-            <a:pPr algn="ctr"/>
-            <a:r>
-              <a:rPr lang="es-ES" sz="1200" b="1" dirty="0">
-                <a:solidFill>
-                  <a:srgbClr val="990F3D"/>
-                </a:solidFill>
-              </a:rPr>
-              <a:t>G3</a:t>
-            </a:r>
-          </a:p>
-        </p:txBody>
-      </p:sp>
-      <p:sp>
-        <p:nvSpPr>
-          <p:cNvPr id="149" name="Caja 149"/>
-          <p:cNvSpPr/>
-          <p:nvPr/>
-        </p:nvSpPr>
-        <p:spPr>
-          <a:xfrm>
-            <a:off x="6161000" y="2350000"/>
-            <a:ext cx="1240000" cy="1500000"/>
-          </a:xfrm>
-          <a:prstGeom prst="roundRect">
-            <a:avLst>
-              <a:gd name="adj" fmla="val 6000"/>
-            </a:avLst>
-          </a:prstGeom>
-          <a:solidFill>
-            <a:srgbClr val="C9A78D"/>
-          </a:solidFill>
-          <a:ln>
-            <a:noFill/>
-          </a:ln>
-        </p:spPr>
-        <p:txBody>
-          <a:bodyPr wrap="square" anchor="ctr" lIns="45720" rIns="45720">
-            <a:noAutofit/>
-          </a:bodyPr>
-          <a:lstStyle/>
-          <a:p>
-            <a:pPr algn="ctr"/>
-            <a:r>
-              <a:rPr lang="es-ES" sz="2400" b="1" dirty="0">
-                <a:solidFill>
-                  <a:srgbClr val="564D47"/>
-                </a:solidFill>
-              </a:rPr>
-              <a:t>F4</a:t>
-            </a:r>
-          </a:p>
-          <a:p>
-            <a:pPr algn="ctr"/>
-            <a:r>
-              <a:rPr lang="es-ES" sz="1050" dirty="0">
-                <a:solidFill>
-                  <a:srgbClr val="564D47"/>
-                </a:solidFill>
-              </a:rPr>
-              <a:t>Diseño de la solución</a:t>
-            </a:r>
-          </a:p>
-        </p:txBody>
-      </p:sp>
-      <p:sp>
-        <p:nvSpPr>
-          <p:cNvPr id="150" name="Texto 150"/>
-          <p:cNvSpPr txBox="1"/>
-          <p:nvPr/>
-        </p:nvSpPr>
-        <p:spPr>
-          <a:xfrm>
-            <a:off x="7071000" y="3900000"/>
-            <a:ext cx="800000" cy="300000"/>
-          </a:xfrm>
-          <a:prstGeom prst="rect">
-            <a:avLst/>
-          </a:prstGeom>
-          <a:noFill/>
-        </p:spPr>
-        <p:txBody>
-          <a:bodyPr wrap="square" anchor="t" lIns="45720" rIns="45720">
-            <a:noAutofit/>
-          </a:bodyPr>
-          <a:lstStyle/>
-          <a:p>
-            <a:pPr algn="ctr"/>
-            <a:r>
-              <a:rPr lang="es-ES" sz="1200" b="1" dirty="0">
-                <a:solidFill>
-                  <a:srgbClr val="990F3D"/>
-                </a:solidFill>
-              </a:rPr>
-              <a:t>G4</a:t>
-            </a:r>
-          </a:p>
-        </p:txBody>
-      </p:sp>
-      <p:sp>
-        <p:nvSpPr>
-          <p:cNvPr id="151" name="Caja 151"/>
-          <p:cNvSpPr/>
-          <p:nvPr/>
-        </p:nvSpPr>
-        <p:spPr>
-          <a:xfrm>
-            <a:off x="7531000" y="2350000"/>
-            <a:ext cx="1240000" cy="1500000"/>
-          </a:xfrm>
-          <a:prstGeom prst="roundRect">
-            <a:avLst>
-              <a:gd name="adj" fmla="val 6000"/>
-            </a:avLst>
-          </a:prstGeom>
-          <a:solidFill>
-            <a:srgbClr val="C9A78D"/>
-          </a:solidFill>
-          <a:ln>
-            <a:noFill/>
-          </a:ln>
-        </p:spPr>
-        <p:txBody>
-          <a:bodyPr wrap="square" anchor="ctr" lIns="45720" rIns="45720">
-            <a:noAutofit/>
-          </a:bodyPr>
-          <a:lstStyle/>
-          <a:p>
-            <a:pPr algn="ctr"/>
-            <a:r>
-              <a:rPr lang="es-ES" sz="2400" b="1" dirty="0">
-                <a:solidFill>
-                  <a:srgbClr val="564D47"/>
-                </a:solidFill>
-              </a:rPr>
-              <a:t>F5</a:t>
-            </a:r>
-          </a:p>
-          <a:p>
-            <a:pPr algn="ctr"/>
-            <a:r>
-              <a:rPr lang="es-ES" sz="1050" dirty="0">
-                <a:solidFill>
-                  <a:srgbClr val="564D47"/>
-                </a:solidFill>
-              </a:rPr>
-              <a:t>Entrega y validación</a:t>
-            </a:r>
-          </a:p>
-        </p:txBody>
-      </p:sp>
-      <p:sp>
-        <p:nvSpPr>
-          <p:cNvPr id="152" name="Texto 152"/>
-          <p:cNvSpPr txBox="1"/>
-          <p:nvPr/>
-        </p:nvSpPr>
-        <p:spPr>
-          <a:xfrm>
-            <a:off x="8441000" y="3900000"/>
-            <a:ext cx="800000" cy="300000"/>
-          </a:xfrm>
-          <a:prstGeom prst="rect">
-            <a:avLst/>
-          </a:prstGeom>
-          <a:noFill/>
-        </p:spPr>
-        <p:txBody>
-          <a:bodyPr wrap="square" anchor="t" lIns="45720" rIns="45720">
-            <a:noAutofit/>
-          </a:bodyPr>
-          <a:lstStyle/>
-          <a:p>
-            <a:pPr algn="ctr"/>
-            <a:r>
-              <a:rPr lang="es-ES" sz="1200" b="1" dirty="0">
-                <a:solidFill>
-                  <a:srgbClr val="990F3D"/>
-                </a:solidFill>
-              </a:rPr>
-              <a:t>G5</a:t>
-            </a:r>
-          </a:p>
-        </p:txBody>
-      </p:sp>
-      <p:sp>
-        <p:nvSpPr>
-          <p:cNvPr id="153" name="Caja 153"/>
-          <p:cNvSpPr/>
-          <p:nvPr/>
-        </p:nvSpPr>
-        <p:spPr>
-          <a:xfrm>
-            <a:off x="8901000" y="2350000"/>
-            <a:ext cx="1240000" cy="1500000"/>
-          </a:xfrm>
-          <a:prstGeom prst="roundRect">
-            <a:avLst>
-              <a:gd name="adj" fmla="val 6000"/>
-            </a:avLst>
-          </a:prstGeom>
-          <a:solidFill>
-            <a:srgbClr val="C9A78D"/>
-          </a:solidFill>
-          <a:ln>
-            <a:noFill/>
-          </a:ln>
-        </p:spPr>
-        <p:txBody>
-          <a:bodyPr wrap="square" anchor="ctr" lIns="45720" rIns="45720">
-            <a:noAutofit/>
-          </a:bodyPr>
-          <a:lstStyle/>
-          <a:p>
-            <a:pPr algn="ctr"/>
-            <a:r>
-              <a:rPr lang="es-ES" sz="2400" b="1" dirty="0">
-                <a:solidFill>
-                  <a:srgbClr val="564D47"/>
-                </a:solidFill>
-              </a:rPr>
-              <a:t>F6</a:t>
-            </a:r>
-          </a:p>
-          <a:p>
-            <a:pPr algn="ctr"/>
-            <a:r>
-              <a:rPr lang="es-ES" sz="1050" dirty="0">
-                <a:solidFill>
-                  <a:srgbClr val="564D47"/>
-                </a:solidFill>
-              </a:rPr>
-              <a:t>Operación y gobierno</a:t>
-            </a:r>
-          </a:p>
-        </p:txBody>
-      </p:sp>
-      <p:sp>
-        <p:nvSpPr>
-          <p:cNvPr id="154" name="Texto 154"/>
-          <p:cNvSpPr txBox="1"/>
-          <p:nvPr/>
-        </p:nvSpPr>
-        <p:spPr>
-          <a:xfrm>
-            <a:off x="9811000" y="3900000"/>
-            <a:ext cx="800000" cy="300000"/>
-          </a:xfrm>
-          <a:prstGeom prst="rect">
-            <a:avLst/>
-          </a:prstGeom>
-          <a:noFill/>
-        </p:spPr>
-        <p:txBody>
-          <a:bodyPr wrap="square" anchor="t" lIns="45720" rIns="45720">
-            <a:noAutofit/>
-          </a:bodyPr>
-          <a:lstStyle/>
-          <a:p>
-            <a:pPr algn="ctr"/>
-            <a:r>
-              <a:rPr lang="es-ES" sz="1200" b="1" dirty="0">
-                <a:solidFill>
-                  <a:srgbClr val="990F3D"/>
-                </a:solidFill>
-              </a:rPr>
-              <a:t>R6</a:t>
-            </a:r>
-          </a:p>
-        </p:txBody>
-      </p:sp>
-      <p:sp>
-        <p:nvSpPr>
-          <p:cNvPr id="155" name="Caja 155"/>
-          <p:cNvSpPr/>
-          <p:nvPr/>
-        </p:nvSpPr>
-        <p:spPr>
-          <a:xfrm>
-            <a:off x="10271000" y="2350000"/>
-            <a:ext cx="1240000" cy="1500000"/>
-          </a:xfrm>
-          <a:prstGeom prst="roundRect">
-            <a:avLst>
-              <a:gd name="adj" fmla="val 6000"/>
-            </a:avLst>
-          </a:prstGeom>
-          <a:solidFill>
-            <a:srgbClr val="C9A78D"/>
-          </a:solidFill>
-          <a:ln>
-            <a:noFill/>
-          </a:ln>
-        </p:spPr>
-        <p:txBody>
-          <a:bodyPr wrap="square" anchor="ctr" lIns="45720" rIns="45720">
-            <a:noAutofit/>
-          </a:bodyPr>
-          <a:lstStyle/>
-          <a:p>
-            <a:pPr algn="ctr"/>
-            <a:r>
-              <a:rPr lang="es-ES" sz="2400" b="1" dirty="0">
-                <a:solidFill>
-                  <a:srgbClr val="564D47"/>
-                </a:solidFill>
-              </a:rPr>
-              <a:t>F7</a:t>
-            </a:r>
-          </a:p>
-          <a:p>
-            <a:pPr algn="ctr"/>
-            <a:r>
-              <a:rPr lang="es-ES" sz="1050" dirty="0">
-                <a:solidFill>
-                  <a:srgbClr val="564D47"/>
-                </a:solidFill>
-              </a:rPr>
-              <a:t>Evolución o retirada</a:t>
-            </a:r>
-          </a:p>
-        </p:txBody>
-      </p:sp>
-      <p:sp>
-        <p:nvSpPr>
-          <p:cNvPr id="156" name="Texto 156"/>
-          <p:cNvSpPr txBox="1"/>
-          <p:nvPr/>
-        </p:nvSpPr>
-        <p:spPr>
-          <a:xfrm>
-            <a:off x="11181000" y="3900000"/>
-            <a:ext cx="800000" cy="300000"/>
-          </a:xfrm>
-          <a:prstGeom prst="rect">
-            <a:avLst/>
-          </a:prstGeom>
-          <a:noFill/>
-        </p:spPr>
-        <p:txBody>
-          <a:bodyPr wrap="square" anchor="t" lIns="45720" rIns="45720">
-            <a:noAutofit/>
-          </a:bodyPr>
-          <a:lstStyle/>
-          <a:p>
-            <a:pPr algn="ctr"/>
-            <a:r>
-              <a:rPr lang="es-ES" sz="1200" b="1" dirty="0">
-                <a:solidFill>
-                  <a:srgbClr val="990F3D"/>
-                </a:solidFill>
-              </a:rPr>
-              <a:t>G7</a:t>
-            </a:r>
-          </a:p>
-        </p:txBody>
-      </p:sp>
-      <p:sp>
-        <p:nvSpPr>
-          <p:cNvPr id="157" name="Texto 157"/>
-          <p:cNvSpPr txBox="1"/>
-          <p:nvPr/>
-        </p:nvSpPr>
-        <p:spPr>
-          <a:xfrm>
-            <a:off x="609600" y="4430000"/>
-            <a:ext cx="10972800" cy="600000"/>
-          </a:xfrm>
-          <a:prstGeom prst="rect">
-            <a:avLst/>
-          </a:prstGeom>
-          <a:noFill/>
-        </p:spPr>
-        <p:txBody>
-          <a:bodyPr wrap="square" anchor="t" lIns="45720" rIns="45720">
-            <a:noAutofit/>
-          </a:bodyPr>
-          <a:lstStyle/>
-          <a:p>
-            <a:pPr algn="ctr"/>
-            <a:r>
-              <a:rPr lang="es-ES" sz="2200" b="1" dirty="0">
-                <a:solidFill>
-                  <a:srgbClr val="990F3D"/>
-                </a:solidFill>
-              </a:rPr>
-              <a:t>PARADA EN G3 · sale del embudo como «Descartado», con su motivo</a:t>
+              <a:t>PARADA EN G3 · SE EVITÓ CONSTRUIR Y OPERAR UN SISTEMA INVIABLE</a:t>
             </a:r>
           </a:p>
         </p:txBody>
@@ -2832,21 +2277,21 @@
                   <a:srgbClr val="990F3D"/>
                 </a:solidFill>
               </a:rPr>
-              <a:t>Ejemplo 2 · Cuando una iniciativa llega a producción</a:t>
-            </a:r>
-          </a:p>
-        </p:txBody>
-      </p:sp>
-      <p:sp>
-        <p:nvSpPr>
-          <p:cNvPr id="162" name="Texto 162"/>
+              <a:t>La iniciativa 1, sobre el ciclo de vida</a:t>
+            </a:r>
+          </a:p>
+        </p:txBody>
+      </p:sp>
+      <p:sp>
+        <p:nvSpPr>
+          <p:cNvPr id="168" name="Texto 168"/>
           <p:cNvSpPr txBox="1"/>
           <p:nvPr/>
         </p:nvSpPr>
         <p:spPr>
           <a:xfrm>
             <a:off x="609600" y="1330000"/>
-            <a:ext cx="10972800" cy="500000"/>
+            <a:ext cx="10972800" cy="450000"/>
           </a:xfrm>
           <a:prstGeom prst="rect">
             <a:avLst/>
@@ -2861,169 +2306,26 @@
           <a:p>
             <a:pPr algn="l"/>
             <a:r>
-              <a:rPr lang="es-ES" sz="1700" b="1" dirty="0">
-                <a:solidFill>
-                  <a:srgbClr val="2F2B28"/>
-                </a:solidFill>
-              </a:rPr>
-              <a:t>Asistente de respuesta a incidencias de TI de primer nivel</a:t>
-            </a:r>
-          </a:p>
-        </p:txBody>
-      </p:sp>
-      <p:sp>
-        <p:nvSpPr>
-          <p:cNvPr id="163" name="Texto 163"/>
-          <p:cNvSpPr txBox="1"/>
-          <p:nvPr/>
-        </p:nvSpPr>
-        <p:spPr>
-          <a:xfrm>
-            <a:off x="609600" y="1900000"/>
-            <a:ext cx="10972800" cy="3550000"/>
-          </a:xfrm>
-          <a:prstGeom prst="rect">
-            <a:avLst/>
-          </a:prstGeom>
-          <a:noFill/>
-        </p:spPr>
-        <p:txBody>
-          <a:bodyPr wrap="square" anchor="t" lIns="45720" rIns="45720">
-            <a:noAutofit/>
-          </a:bodyPr>
-          <a:lstStyle/>
-          <a:p>
-            <a:pPr marL="285750" indent="-285750">
-              <a:spcAft>
-                <a:spcPts val="400"/>
-              </a:spcAft>
-              <a:buClr>
-                <a:srgbClr val="990F3D"/>
-              </a:buClr>
-              <a:buFont typeface="Arial"/>
-              <a:buChar char="•"/>
-            </a:pPr>
-            <a:r>
               <a:rPr lang="es-ES" sz="1500" dirty="0">
                 <a:solidFill>
-                  <a:srgbClr val="2F2B28"/>
-                </a:solidFill>
-              </a:rPr>
-              <a:t>Fases 0 y 1: TI la patrocina; frente a la alternativa sin IA (más plantilla), se propone la esfera de operaciones con ambición Optimizar (P07).</a:t>
-            </a:r>
-          </a:p>
-          <a:p>
-            <a:pPr marL="285750" indent="-285750">
-              <a:spcAft>
-                <a:spcPts val="400"/>
-              </a:spcAft>
-              <a:buClr>
-                <a:srgbClr val="990F3D"/>
-              </a:buClr>
-              <a:buFont typeface="Arial"/>
-              <a:buChar char="•"/>
-            </a:pPr>
-            <a:r>
-              <a:rPr lang="es-ES" sz="1500" dirty="0">
-                <a:solidFill>
-                  <a:srgbClr val="2F2B28"/>
-                </a:solidFill>
-              </a:rPr>
-              <a:t>Fase 2: hipótesis de un 30 % menos de tiempo de resolución en incidencias sencillas; el piloto controlado da un 32 %.</a:t>
-            </a:r>
-          </a:p>
-          <a:p>
-            <a:pPr marL="285750" indent="-285750">
-              <a:spcAft>
-                <a:spcPts val="400"/>
-              </a:spcAft>
-              <a:buClr>
-                <a:srgbClr val="990F3D"/>
-              </a:buClr>
-              <a:buFont typeface="Arial"/>
-              <a:buChar char="•"/>
-            </a:pPr>
-            <a:r>
-              <a:rPr lang="es-ES" sz="1500" dirty="0">
-                <a:solidFill>
-                  <a:srgbClr val="2F2B28"/>
-                </a:solidFill>
-              </a:rPr>
-              <a:t>Fase 3: sin sesgo relevante, riesgo residual medio aceptado por su órgano (P12), proveedor evaluado (P14). G3, Continuar.</a:t>
-            </a:r>
-          </a:p>
-          <a:p>
-            <a:pPr marL="285750" indent="-285750">
-              <a:spcAft>
-                <a:spcPts val="400"/>
-              </a:spcAft>
-              <a:buClr>
-                <a:srgbClr val="990F3D"/>
-              </a:buClr>
-              <a:buFont typeface="Arial"/>
-              <a:buChar char="•"/>
-            </a:pPr>
-            <a:r>
-              <a:rPr lang="es-ES" sz="1500" dirty="0">
-                <a:solidFill>
-                  <a:srgbClr val="2F2B28"/>
-                </a:solidFill>
-              </a:rPr>
-              <a:t>Fases 4 y 5: supervisión humana obligatoria por encima de cierta gravedad (P17), reversión probada (P19) y firma de puesta en producción (P23).</a:t>
-            </a:r>
-          </a:p>
-          <a:p>
-            <a:pPr marL="285750" indent="-285750">
-              <a:spcAft>
-                <a:spcPts val="400"/>
-              </a:spcAft>
-              <a:buClr>
-                <a:srgbClr val="990F3D"/>
-              </a:buClr>
-              <a:buFont typeface="Arial"/>
-              <a:buChar char="•"/>
-            </a:pPr>
-            <a:r>
-              <a:rPr lang="es-ES" sz="1500" dirty="0">
-                <a:solidFill>
-                  <a:srgbClr val="2F2B28"/>
-                </a:solidFill>
-              </a:rPr>
-              <a:t>Fase 6: catorce meses en uso. Control de gestión valida 1,1 M€ al año (P28); la capacidad liberada se reasignó a incidencias complejas.</a:t>
-            </a:r>
-          </a:p>
-          <a:p>
-            <a:pPr marL="285750" indent="-285750">
-              <a:spcAft>
-                <a:spcPts val="400"/>
-              </a:spcAft>
-              <a:buClr>
-                <a:srgbClr val="990F3D"/>
-              </a:buClr>
-              <a:buFont typeface="Arial"/>
-              <a:buChar char="•"/>
-            </a:pPr>
-            <a:r>
-              <a:rPr lang="es-ES" sz="1500" dirty="0">
-                <a:solidFill>
-                  <a:srgbClr val="2F2B28"/>
-                </a:solidFill>
-              </a:rPr>
-              <a:t>En el embudo está en «En uso»; en el panel suma al neto anual porque su valor está validado, no declarado.</a:t>
-            </a:r>
-          </a:p>
-        </p:txBody>
-      </p:sp>
-      <p:sp>
-        <p:nvSpPr>
-          <p:cNvPr id="164" name="Caja 164"/>
+                  <a:srgbClr val="564D47"/>
+                </a:solidFill>
+              </a:rPr>
+              <a:t>Llegó a la fase 3 y no superó la puerta G3</a:t>
+            </a:r>
+          </a:p>
+        </p:txBody>
+      </p:sp>
+      <p:sp>
+        <p:nvSpPr>
+          <p:cNvPr id="148" name="Caja 148"/>
           <p:cNvSpPr/>
           <p:nvPr/>
         </p:nvSpPr>
         <p:spPr>
           <a:xfrm>
-            <a:off x="609600" y="5600000"/>
-            <a:ext cx="10972800" cy="900000"/>
+            <a:off x="681000" y="2350000"/>
+            <a:ext cx="1240000" cy="1500000"/>
           </a:xfrm>
           <a:prstGeom prst="roundRect">
             <a:avLst>
@@ -3031,7 +2333,7 @@
             </a:avLst>
           </a:prstGeom>
           <a:solidFill>
-            <a:srgbClr val="0D7680"/>
+            <a:srgbClr val="990F3D"/>
           </a:solidFill>
           <a:ln>
             <a:noFill/>
@@ -3045,12 +2347,693 @@
           <a:p>
             <a:pPr algn="ctr"/>
             <a:r>
-              <a:rPr lang="es-ES" sz="2100" b="1" dirty="0">
+              <a:rPr lang="es-ES" sz="2400" b="1" dirty="0">
                 <a:solidFill>
                   <a:srgbClr val="FFFFFF"/>
                 </a:solidFill>
               </a:rPr>
-              <a:t>EN PRODUCCIÓN · 1,1 M€ DE RETORNO ANUAL VALIDADO · R6 TRIMESTRAL</a:t>
+              <a:t>F0</a:t>
+            </a:r>
+          </a:p>
+          <a:p>
+            <a:pPr algn="ctr"/>
+            <a:r>
+              <a:rPr lang="es-ES" sz="1050" dirty="0">
+                <a:solidFill>
+                  <a:srgbClr val="FFFFFF"/>
+                </a:solidFill>
+              </a:rPr>
+              <a:t>Contexto y restricciones</a:t>
+            </a:r>
+          </a:p>
+        </p:txBody>
+      </p:sp>
+      <p:sp>
+        <p:nvSpPr>
+          <p:cNvPr id="149" name="Texto 149"/>
+          <p:cNvSpPr txBox="1"/>
+          <p:nvPr/>
+        </p:nvSpPr>
+        <p:spPr>
+          <a:xfrm>
+            <a:off x="1591000" y="3900000"/>
+            <a:ext cx="800000" cy="300000"/>
+          </a:xfrm>
+          <a:prstGeom prst="rect">
+            <a:avLst/>
+          </a:prstGeom>
+          <a:noFill/>
+        </p:spPr>
+        <p:txBody>
+          <a:bodyPr wrap="square" anchor="t" lIns="45720" rIns="45720">
+            <a:noAutofit/>
+          </a:bodyPr>
+          <a:lstStyle/>
+          <a:p>
+            <a:pPr algn="ctr"/>
+            <a:r>
+              <a:rPr lang="es-ES" sz="1200" b="1" dirty="0">
+                <a:solidFill>
+                  <a:srgbClr val="990F3D"/>
+                </a:solidFill>
+              </a:rPr>
+              <a:t>G0</a:t>
+            </a:r>
+          </a:p>
+        </p:txBody>
+      </p:sp>
+      <p:sp>
+        <p:nvSpPr>
+          <p:cNvPr id="150" name="Caja 150"/>
+          <p:cNvSpPr/>
+          <p:nvPr/>
+        </p:nvSpPr>
+        <p:spPr>
+          <a:xfrm>
+            <a:off x="2051000" y="2350000"/>
+            <a:ext cx="1240000" cy="1500000"/>
+          </a:xfrm>
+          <a:prstGeom prst="roundRect">
+            <a:avLst>
+              <a:gd name="adj" fmla="val 6000"/>
+            </a:avLst>
+          </a:prstGeom>
+          <a:solidFill>
+            <a:srgbClr val="990F3D"/>
+          </a:solidFill>
+          <a:ln>
+            <a:noFill/>
+          </a:ln>
+        </p:spPr>
+        <p:txBody>
+          <a:bodyPr wrap="square" anchor="ctr" lIns="45720" rIns="45720">
+            <a:noAutofit/>
+          </a:bodyPr>
+          <a:lstStyle/>
+          <a:p>
+            <a:pPr algn="ctr"/>
+            <a:r>
+              <a:rPr lang="es-ES" sz="2400" b="1" dirty="0">
+                <a:solidFill>
+                  <a:srgbClr val="FFFFFF"/>
+                </a:solidFill>
+              </a:rPr>
+              <a:t>F1</a:t>
+            </a:r>
+          </a:p>
+          <a:p>
+            <a:pPr algn="ctr"/>
+            <a:r>
+              <a:rPr lang="es-ES" sz="1050" dirty="0">
+                <a:solidFill>
+                  <a:srgbClr val="FFFFFF"/>
+                </a:solidFill>
+              </a:rPr>
+              <a:t>Descubrimiento de oportunidades</a:t>
+            </a:r>
+          </a:p>
+        </p:txBody>
+      </p:sp>
+      <p:sp>
+        <p:nvSpPr>
+          <p:cNvPr id="151" name="Texto 151"/>
+          <p:cNvSpPr txBox="1"/>
+          <p:nvPr/>
+        </p:nvSpPr>
+        <p:spPr>
+          <a:xfrm>
+            <a:off x="2961000" y="3900000"/>
+            <a:ext cx="800000" cy="300000"/>
+          </a:xfrm>
+          <a:prstGeom prst="rect">
+            <a:avLst/>
+          </a:prstGeom>
+          <a:noFill/>
+        </p:spPr>
+        <p:txBody>
+          <a:bodyPr wrap="square" anchor="t" lIns="45720" rIns="45720">
+            <a:noAutofit/>
+          </a:bodyPr>
+          <a:lstStyle/>
+          <a:p>
+            <a:pPr algn="ctr"/>
+            <a:r>
+              <a:rPr lang="es-ES" sz="1200" b="1" dirty="0">
+                <a:solidFill>
+                  <a:srgbClr val="990F3D"/>
+                </a:solidFill>
+              </a:rPr>
+              <a:t>G1</a:t>
+            </a:r>
+          </a:p>
+        </p:txBody>
+      </p:sp>
+      <p:sp>
+        <p:nvSpPr>
+          <p:cNvPr id="152" name="Caja 152"/>
+          <p:cNvSpPr/>
+          <p:nvPr/>
+        </p:nvSpPr>
+        <p:spPr>
+          <a:xfrm>
+            <a:off x="3421000" y="2350000"/>
+            <a:ext cx="1240000" cy="1500000"/>
+          </a:xfrm>
+          <a:prstGeom prst="roundRect">
+            <a:avLst>
+              <a:gd name="adj" fmla="val 6000"/>
+            </a:avLst>
+          </a:prstGeom>
+          <a:solidFill>
+            <a:srgbClr val="990F3D"/>
+          </a:solidFill>
+          <a:ln>
+            <a:noFill/>
+          </a:ln>
+        </p:spPr>
+        <p:txBody>
+          <a:bodyPr wrap="square" anchor="ctr" lIns="45720" rIns="45720">
+            <a:noAutofit/>
+          </a:bodyPr>
+          <a:lstStyle/>
+          <a:p>
+            <a:pPr algn="ctr"/>
+            <a:r>
+              <a:rPr lang="es-ES" sz="2400" b="1" dirty="0">
+                <a:solidFill>
+                  <a:srgbClr val="FFFFFF"/>
+                </a:solidFill>
+              </a:rPr>
+              <a:t>F2</a:t>
+            </a:r>
+          </a:p>
+          <a:p>
+            <a:pPr algn="ctr"/>
+            <a:r>
+              <a:rPr lang="es-ES" sz="1050" dirty="0">
+                <a:solidFill>
+                  <a:srgbClr val="FFFFFF"/>
+                </a:solidFill>
+              </a:rPr>
+              <a:t>Hipótesis de valor</a:t>
+            </a:r>
+          </a:p>
+        </p:txBody>
+      </p:sp>
+      <p:sp>
+        <p:nvSpPr>
+          <p:cNvPr id="153" name="Texto 153"/>
+          <p:cNvSpPr txBox="1"/>
+          <p:nvPr/>
+        </p:nvSpPr>
+        <p:spPr>
+          <a:xfrm>
+            <a:off x="4331000" y="3900000"/>
+            <a:ext cx="800000" cy="300000"/>
+          </a:xfrm>
+          <a:prstGeom prst="rect">
+            <a:avLst/>
+          </a:prstGeom>
+          <a:noFill/>
+        </p:spPr>
+        <p:txBody>
+          <a:bodyPr wrap="square" anchor="t" lIns="45720" rIns="45720">
+            <a:noAutofit/>
+          </a:bodyPr>
+          <a:lstStyle/>
+          <a:p>
+            <a:pPr algn="ctr"/>
+            <a:r>
+              <a:rPr lang="es-ES" sz="1200" b="1" dirty="0">
+                <a:solidFill>
+                  <a:srgbClr val="990F3D"/>
+                </a:solidFill>
+              </a:rPr>
+              <a:t>G2</a:t>
+            </a:r>
+          </a:p>
+        </p:txBody>
+      </p:sp>
+      <p:sp>
+        <p:nvSpPr>
+          <p:cNvPr id="154" name="Caja 154"/>
+          <p:cNvSpPr/>
+          <p:nvPr/>
+        </p:nvSpPr>
+        <p:spPr>
+          <a:xfrm>
+            <a:off x="4791000" y="2350000"/>
+            <a:ext cx="1240000" cy="1500000"/>
+          </a:xfrm>
+          <a:prstGeom prst="roundRect">
+            <a:avLst>
+              <a:gd name="adj" fmla="val 6000"/>
+            </a:avLst>
+          </a:prstGeom>
+          <a:solidFill>
+            <a:srgbClr val="990F3D"/>
+          </a:solidFill>
+          <a:ln>
+            <a:noFill/>
+          </a:ln>
+        </p:spPr>
+        <p:txBody>
+          <a:bodyPr wrap="square" anchor="ctr" lIns="45720" rIns="45720">
+            <a:noAutofit/>
+          </a:bodyPr>
+          <a:lstStyle/>
+          <a:p>
+            <a:pPr algn="ctr"/>
+            <a:r>
+              <a:rPr lang="es-ES" sz="2400" b="1" dirty="0">
+                <a:solidFill>
+                  <a:srgbClr val="FFFFFF"/>
+                </a:solidFill>
+              </a:rPr>
+              <a:t>F3</a:t>
+            </a:r>
+          </a:p>
+          <a:p>
+            <a:pPr algn="ctr"/>
+            <a:r>
+              <a:rPr lang="es-ES" sz="1050" dirty="0">
+                <a:solidFill>
+                  <a:srgbClr val="FFFFFF"/>
+                </a:solidFill>
+              </a:rPr>
+              <a:t>Viabilidad y riesgo</a:t>
+            </a:r>
+          </a:p>
+        </p:txBody>
+      </p:sp>
+      <p:sp>
+        <p:nvSpPr>
+          <p:cNvPr id="155" name="Texto 155"/>
+          <p:cNvSpPr txBox="1"/>
+          <p:nvPr/>
+        </p:nvSpPr>
+        <p:spPr>
+          <a:xfrm>
+            <a:off x="5701000" y="3900000"/>
+            <a:ext cx="800000" cy="300000"/>
+          </a:xfrm>
+          <a:prstGeom prst="rect">
+            <a:avLst/>
+          </a:prstGeom>
+          <a:noFill/>
+        </p:spPr>
+        <p:txBody>
+          <a:bodyPr wrap="square" anchor="t" lIns="45720" rIns="45720">
+            <a:noAutofit/>
+          </a:bodyPr>
+          <a:lstStyle/>
+          <a:p>
+            <a:pPr algn="ctr"/>
+            <a:r>
+              <a:rPr lang="es-ES" sz="1200" b="1" dirty="0">
+                <a:solidFill>
+                  <a:srgbClr val="990F3D"/>
+                </a:solidFill>
+              </a:rPr>
+              <a:t>G3</a:t>
+            </a:r>
+          </a:p>
+        </p:txBody>
+      </p:sp>
+      <p:sp>
+        <p:nvSpPr>
+          <p:cNvPr id="156" name="Caja 156"/>
+          <p:cNvSpPr/>
+          <p:nvPr/>
+        </p:nvSpPr>
+        <p:spPr>
+          <a:xfrm>
+            <a:off x="6161000" y="2350000"/>
+            <a:ext cx="1240000" cy="1500000"/>
+          </a:xfrm>
+          <a:prstGeom prst="roundRect">
+            <a:avLst>
+              <a:gd name="adj" fmla="val 6000"/>
+            </a:avLst>
+          </a:prstGeom>
+          <a:solidFill>
+            <a:srgbClr val="C9A78D"/>
+          </a:solidFill>
+          <a:ln>
+            <a:noFill/>
+          </a:ln>
+        </p:spPr>
+        <p:txBody>
+          <a:bodyPr wrap="square" anchor="ctr" lIns="45720" rIns="45720">
+            <a:noAutofit/>
+          </a:bodyPr>
+          <a:lstStyle/>
+          <a:p>
+            <a:pPr algn="ctr"/>
+            <a:r>
+              <a:rPr lang="es-ES" sz="2400" b="1" dirty="0">
+                <a:solidFill>
+                  <a:srgbClr val="564D47"/>
+                </a:solidFill>
+              </a:rPr>
+              <a:t>F4</a:t>
+            </a:r>
+          </a:p>
+          <a:p>
+            <a:pPr algn="ctr"/>
+            <a:r>
+              <a:rPr lang="es-ES" sz="1050" dirty="0">
+                <a:solidFill>
+                  <a:srgbClr val="564D47"/>
+                </a:solidFill>
+              </a:rPr>
+              <a:t>Diseño de la solución</a:t>
+            </a:r>
+          </a:p>
+        </p:txBody>
+      </p:sp>
+      <p:sp>
+        <p:nvSpPr>
+          <p:cNvPr id="157" name="Texto 157"/>
+          <p:cNvSpPr txBox="1"/>
+          <p:nvPr/>
+        </p:nvSpPr>
+        <p:spPr>
+          <a:xfrm>
+            <a:off x="7071000" y="3900000"/>
+            <a:ext cx="800000" cy="300000"/>
+          </a:xfrm>
+          <a:prstGeom prst="rect">
+            <a:avLst/>
+          </a:prstGeom>
+          <a:noFill/>
+        </p:spPr>
+        <p:txBody>
+          <a:bodyPr wrap="square" anchor="t" lIns="45720" rIns="45720">
+            <a:noAutofit/>
+          </a:bodyPr>
+          <a:lstStyle/>
+          <a:p>
+            <a:pPr algn="ctr"/>
+            <a:r>
+              <a:rPr lang="es-ES" sz="1200" b="1" dirty="0">
+                <a:solidFill>
+                  <a:srgbClr val="990F3D"/>
+                </a:solidFill>
+              </a:rPr>
+              <a:t>G4</a:t>
+            </a:r>
+          </a:p>
+        </p:txBody>
+      </p:sp>
+      <p:sp>
+        <p:nvSpPr>
+          <p:cNvPr id="158" name="Caja 158"/>
+          <p:cNvSpPr/>
+          <p:nvPr/>
+        </p:nvSpPr>
+        <p:spPr>
+          <a:xfrm>
+            <a:off x="7531000" y="2350000"/>
+            <a:ext cx="1240000" cy="1500000"/>
+          </a:xfrm>
+          <a:prstGeom prst="roundRect">
+            <a:avLst>
+              <a:gd name="adj" fmla="val 6000"/>
+            </a:avLst>
+          </a:prstGeom>
+          <a:solidFill>
+            <a:srgbClr val="C9A78D"/>
+          </a:solidFill>
+          <a:ln>
+            <a:noFill/>
+          </a:ln>
+        </p:spPr>
+        <p:txBody>
+          <a:bodyPr wrap="square" anchor="ctr" lIns="45720" rIns="45720">
+            <a:noAutofit/>
+          </a:bodyPr>
+          <a:lstStyle/>
+          <a:p>
+            <a:pPr algn="ctr"/>
+            <a:r>
+              <a:rPr lang="es-ES" sz="2400" b="1" dirty="0">
+                <a:solidFill>
+                  <a:srgbClr val="564D47"/>
+                </a:solidFill>
+              </a:rPr>
+              <a:t>F5</a:t>
+            </a:r>
+          </a:p>
+          <a:p>
+            <a:pPr algn="ctr"/>
+            <a:r>
+              <a:rPr lang="es-ES" sz="1050" dirty="0">
+                <a:solidFill>
+                  <a:srgbClr val="564D47"/>
+                </a:solidFill>
+              </a:rPr>
+              <a:t>Entrega y validación</a:t>
+            </a:r>
+          </a:p>
+        </p:txBody>
+      </p:sp>
+      <p:sp>
+        <p:nvSpPr>
+          <p:cNvPr id="159" name="Texto 159"/>
+          <p:cNvSpPr txBox="1"/>
+          <p:nvPr/>
+        </p:nvSpPr>
+        <p:spPr>
+          <a:xfrm>
+            <a:off x="8441000" y="3900000"/>
+            <a:ext cx="800000" cy="300000"/>
+          </a:xfrm>
+          <a:prstGeom prst="rect">
+            <a:avLst/>
+          </a:prstGeom>
+          <a:noFill/>
+        </p:spPr>
+        <p:txBody>
+          <a:bodyPr wrap="square" anchor="t" lIns="45720" rIns="45720">
+            <a:noAutofit/>
+          </a:bodyPr>
+          <a:lstStyle/>
+          <a:p>
+            <a:pPr algn="ctr"/>
+            <a:r>
+              <a:rPr lang="es-ES" sz="1200" b="1" dirty="0">
+                <a:solidFill>
+                  <a:srgbClr val="990F3D"/>
+                </a:solidFill>
+              </a:rPr>
+              <a:t>G5</a:t>
+            </a:r>
+          </a:p>
+        </p:txBody>
+      </p:sp>
+      <p:sp>
+        <p:nvSpPr>
+          <p:cNvPr id="160" name="Caja 160"/>
+          <p:cNvSpPr/>
+          <p:nvPr/>
+        </p:nvSpPr>
+        <p:spPr>
+          <a:xfrm>
+            <a:off x="8901000" y="2350000"/>
+            <a:ext cx="1240000" cy="1500000"/>
+          </a:xfrm>
+          <a:prstGeom prst="roundRect">
+            <a:avLst>
+              <a:gd name="adj" fmla="val 6000"/>
+            </a:avLst>
+          </a:prstGeom>
+          <a:solidFill>
+            <a:srgbClr val="C9A78D"/>
+          </a:solidFill>
+          <a:ln>
+            <a:noFill/>
+          </a:ln>
+        </p:spPr>
+        <p:txBody>
+          <a:bodyPr wrap="square" anchor="ctr" lIns="45720" rIns="45720">
+            <a:noAutofit/>
+          </a:bodyPr>
+          <a:lstStyle/>
+          <a:p>
+            <a:pPr algn="ctr"/>
+            <a:r>
+              <a:rPr lang="es-ES" sz="2400" b="1" dirty="0">
+                <a:solidFill>
+                  <a:srgbClr val="564D47"/>
+                </a:solidFill>
+              </a:rPr>
+              <a:t>F6</a:t>
+            </a:r>
+          </a:p>
+          <a:p>
+            <a:pPr algn="ctr"/>
+            <a:r>
+              <a:rPr lang="es-ES" sz="1050" dirty="0">
+                <a:solidFill>
+                  <a:srgbClr val="564D47"/>
+                </a:solidFill>
+              </a:rPr>
+              <a:t>Operación y gobierno</a:t>
+            </a:r>
+          </a:p>
+        </p:txBody>
+      </p:sp>
+      <p:sp>
+        <p:nvSpPr>
+          <p:cNvPr id="161" name="Texto 161"/>
+          <p:cNvSpPr txBox="1"/>
+          <p:nvPr/>
+        </p:nvSpPr>
+        <p:spPr>
+          <a:xfrm>
+            <a:off x="9811000" y="3900000"/>
+            <a:ext cx="800000" cy="300000"/>
+          </a:xfrm>
+          <a:prstGeom prst="rect">
+            <a:avLst/>
+          </a:prstGeom>
+          <a:noFill/>
+        </p:spPr>
+        <p:txBody>
+          <a:bodyPr wrap="square" anchor="t" lIns="45720" rIns="45720">
+            <a:noAutofit/>
+          </a:bodyPr>
+          <a:lstStyle/>
+          <a:p>
+            <a:pPr algn="ctr"/>
+            <a:r>
+              <a:rPr lang="es-ES" sz="1200" b="1" dirty="0">
+                <a:solidFill>
+                  <a:srgbClr val="990F3D"/>
+                </a:solidFill>
+              </a:rPr>
+              <a:t>R6</a:t>
+            </a:r>
+          </a:p>
+        </p:txBody>
+      </p:sp>
+      <p:sp>
+        <p:nvSpPr>
+          <p:cNvPr id="162" name="Caja 162"/>
+          <p:cNvSpPr/>
+          <p:nvPr/>
+        </p:nvSpPr>
+        <p:spPr>
+          <a:xfrm>
+            <a:off x="10271000" y="2350000"/>
+            <a:ext cx="1240000" cy="1500000"/>
+          </a:xfrm>
+          <a:prstGeom prst="roundRect">
+            <a:avLst>
+              <a:gd name="adj" fmla="val 6000"/>
+            </a:avLst>
+          </a:prstGeom>
+          <a:solidFill>
+            <a:srgbClr val="C9A78D"/>
+          </a:solidFill>
+          <a:ln>
+            <a:noFill/>
+          </a:ln>
+        </p:spPr>
+        <p:txBody>
+          <a:bodyPr wrap="square" anchor="ctr" lIns="45720" rIns="45720">
+            <a:noAutofit/>
+          </a:bodyPr>
+          <a:lstStyle/>
+          <a:p>
+            <a:pPr algn="ctr"/>
+            <a:r>
+              <a:rPr lang="es-ES" sz="2400" b="1" dirty="0">
+                <a:solidFill>
+                  <a:srgbClr val="564D47"/>
+                </a:solidFill>
+              </a:rPr>
+              <a:t>F7</a:t>
+            </a:r>
+          </a:p>
+          <a:p>
+            <a:pPr algn="ctr"/>
+            <a:r>
+              <a:rPr lang="es-ES" sz="1050" dirty="0">
+                <a:solidFill>
+                  <a:srgbClr val="564D47"/>
+                </a:solidFill>
+              </a:rPr>
+              <a:t>Evolución o retirada</a:t>
+            </a:r>
+          </a:p>
+        </p:txBody>
+      </p:sp>
+      <p:sp>
+        <p:nvSpPr>
+          <p:cNvPr id="163" name="Texto 163"/>
+          <p:cNvSpPr txBox="1"/>
+          <p:nvPr/>
+        </p:nvSpPr>
+        <p:spPr>
+          <a:xfrm>
+            <a:off x="11181000" y="3900000"/>
+            <a:ext cx="800000" cy="300000"/>
+          </a:xfrm>
+          <a:prstGeom prst="rect">
+            <a:avLst/>
+          </a:prstGeom>
+          <a:noFill/>
+        </p:spPr>
+        <p:txBody>
+          <a:bodyPr wrap="square" anchor="t" lIns="45720" rIns="45720">
+            <a:noAutofit/>
+          </a:bodyPr>
+          <a:lstStyle/>
+          <a:p>
+            <a:pPr algn="ctr"/>
+            <a:r>
+              <a:rPr lang="es-ES" sz="1200" b="1" dirty="0">
+                <a:solidFill>
+                  <a:srgbClr val="990F3D"/>
+                </a:solidFill>
+              </a:rPr>
+              <a:t>G7</a:t>
+            </a:r>
+          </a:p>
+        </p:txBody>
+      </p:sp>
+      <p:sp>
+        <p:nvSpPr>
+          <p:cNvPr id="164" name="Texto 164"/>
+          <p:cNvSpPr txBox="1"/>
+          <p:nvPr/>
+        </p:nvSpPr>
+        <p:spPr>
+          <a:xfrm>
+            <a:off x="609600" y="4430000"/>
+            <a:ext cx="10972800" cy="600000"/>
+          </a:xfrm>
+          <a:prstGeom prst="rect">
+            <a:avLst/>
+          </a:prstGeom>
+          <a:noFill/>
+        </p:spPr>
+        <p:txBody>
+          <a:bodyPr wrap="square" anchor="t" lIns="45720" rIns="45720">
+            <a:noAutofit/>
+          </a:bodyPr>
+          <a:lstStyle/>
+          <a:p>
+            <a:pPr algn="ctr"/>
+            <a:r>
+              <a:rPr lang="es-ES" sz="2200" b="1" dirty="0">
+                <a:solidFill>
+                  <a:srgbClr val="990F3D"/>
+                </a:solidFill>
+              </a:rPr>
+              <a:t>PARADA EN G3 · sale del embudo como «Descartado», con su motivo</a:t>
             </a:r>
           </a:p>
         </p:txBody>
@@ -3090,7 +3073,7 @@
       </p:grpSpPr>
       <p:sp>
         <p:nvSpPr>
-          <p:cNvPr id="185" name="Marca"/>
+          <p:cNvPr id="172" name="Marca"/>
           <p:cNvSpPr/>
           <p:nvPr/>
         </p:nvSpPr>
@@ -3114,7 +3097,7 @@
       </p:sp>
       <p:sp>
         <p:nvSpPr>
-          <p:cNvPr id="186" name="Texto 186"/>
+          <p:cNvPr id="173" name="Texto 173"/>
           <p:cNvSpPr txBox="1"/>
           <p:nvPr/>
         </p:nvSpPr>
@@ -3148,7 +3131,7 @@
       </p:sp>
       <p:sp>
         <p:nvSpPr>
-          <p:cNvPr id="187" name="Texto 187"/>
+          <p:cNvPr id="174" name="Texto 174"/>
           <p:cNvSpPr txBox="1"/>
           <p:nvPr/>
         </p:nvSpPr>
@@ -3175,21 +3158,21 @@
                   <a:srgbClr val="990F3D"/>
                 </a:solidFill>
               </a:rPr>
-              <a:t>La iniciativa 2, sobre el ciclo de vida</a:t>
-            </a:r>
-          </a:p>
-        </p:txBody>
-      </p:sp>
-      <p:sp>
-        <p:nvSpPr>
-          <p:cNvPr id="188" name="Texto 188"/>
+              <a:t>Ejemplo 2 · Cuando una iniciativa llega a producción</a:t>
+            </a:r>
+          </a:p>
+        </p:txBody>
+      </p:sp>
+      <p:sp>
+        <p:nvSpPr>
+          <p:cNvPr id="169" name="Texto 169"/>
           <p:cNvSpPr txBox="1"/>
           <p:nvPr/>
         </p:nvSpPr>
         <p:spPr>
           <a:xfrm>
             <a:off x="609600" y="1330000"/>
-            <a:ext cx="10972800" cy="450000"/>
+            <a:ext cx="10972800" cy="500000"/>
           </a:xfrm>
           <a:prstGeom prst="rect">
             <a:avLst/>
@@ -3204,26 +3187,169 @@
           <a:p>
             <a:pPr algn="l"/>
             <a:r>
+              <a:rPr lang="es-ES" sz="1700" b="1" dirty="0">
+                <a:solidFill>
+                  <a:srgbClr val="2F2B28"/>
+                </a:solidFill>
+              </a:rPr>
+              <a:t>Asistente de respuesta a incidencias de TI de primer nivel</a:t>
+            </a:r>
+          </a:p>
+        </p:txBody>
+      </p:sp>
+      <p:sp>
+        <p:nvSpPr>
+          <p:cNvPr id="170" name="Texto 170"/>
+          <p:cNvSpPr txBox="1"/>
+          <p:nvPr/>
+        </p:nvSpPr>
+        <p:spPr>
+          <a:xfrm>
+            <a:off x="609600" y="1900000"/>
+            <a:ext cx="10972800" cy="3550000"/>
+          </a:xfrm>
+          <a:prstGeom prst="rect">
+            <a:avLst/>
+          </a:prstGeom>
+          <a:noFill/>
+        </p:spPr>
+        <p:txBody>
+          <a:bodyPr wrap="square" anchor="t" lIns="45720" rIns="45720">
+            <a:noAutofit/>
+          </a:bodyPr>
+          <a:lstStyle/>
+          <a:p>
+            <a:pPr marL="285750" indent="-285750">
+              <a:spcAft>
+                <a:spcPts val="400"/>
+              </a:spcAft>
+              <a:buClr>
+                <a:srgbClr val="990F3D"/>
+              </a:buClr>
+              <a:buFont typeface="Arial"/>
+              <a:buChar char="•"/>
+            </a:pPr>
+            <a:r>
               <a:rPr lang="es-ES" sz="1500" dirty="0">
                 <a:solidFill>
-                  <a:srgbClr val="564D47"/>
-                </a:solidFill>
-              </a:rPr>
-              <a:t>Recorrió las fases 0 a 6 y sigue en uso; la fase 7 llegará con G7</a:t>
-            </a:r>
-          </a:p>
-        </p:txBody>
-      </p:sp>
-      <p:sp>
-        <p:nvSpPr>
-          <p:cNvPr id="168" name="Caja 168"/>
+                  <a:srgbClr val="2F2B28"/>
+                </a:solidFill>
+              </a:rPr>
+              <a:t>Fases 0 y 1: TI la patrocina; frente a la alternativa sin IA (más plantilla), se propone la esfera de operaciones con ambición Optimizar (P07).</a:t>
+            </a:r>
+          </a:p>
+          <a:p>
+            <a:pPr marL="285750" indent="-285750">
+              <a:spcAft>
+                <a:spcPts val="400"/>
+              </a:spcAft>
+              <a:buClr>
+                <a:srgbClr val="990F3D"/>
+              </a:buClr>
+              <a:buFont typeface="Arial"/>
+              <a:buChar char="•"/>
+            </a:pPr>
+            <a:r>
+              <a:rPr lang="es-ES" sz="1500" dirty="0">
+                <a:solidFill>
+                  <a:srgbClr val="2F2B28"/>
+                </a:solidFill>
+              </a:rPr>
+              <a:t>Fase 2: hipótesis de un 30 % menos de tiempo de resolución en incidencias sencillas; el piloto controlado da un 32 %.</a:t>
+            </a:r>
+          </a:p>
+          <a:p>
+            <a:pPr marL="285750" indent="-285750">
+              <a:spcAft>
+                <a:spcPts val="400"/>
+              </a:spcAft>
+              <a:buClr>
+                <a:srgbClr val="990F3D"/>
+              </a:buClr>
+              <a:buFont typeface="Arial"/>
+              <a:buChar char="•"/>
+            </a:pPr>
+            <a:r>
+              <a:rPr lang="es-ES" sz="1500" dirty="0">
+                <a:solidFill>
+                  <a:srgbClr val="2F2B28"/>
+                </a:solidFill>
+              </a:rPr>
+              <a:t>Fase 3: sin sesgo relevante, riesgo residual medio aceptado por su órgano (P12), proveedor evaluado (P14). G3, Continuar.</a:t>
+            </a:r>
+          </a:p>
+          <a:p>
+            <a:pPr marL="285750" indent="-285750">
+              <a:spcAft>
+                <a:spcPts val="400"/>
+              </a:spcAft>
+              <a:buClr>
+                <a:srgbClr val="990F3D"/>
+              </a:buClr>
+              <a:buFont typeface="Arial"/>
+              <a:buChar char="•"/>
+            </a:pPr>
+            <a:r>
+              <a:rPr lang="es-ES" sz="1500" dirty="0">
+                <a:solidFill>
+                  <a:srgbClr val="2F2B28"/>
+                </a:solidFill>
+              </a:rPr>
+              <a:t>Fases 4 y 5: supervisión humana obligatoria por encima de cierta gravedad (P17), reversión probada (P19) y firma de puesta en producción (P23).</a:t>
+            </a:r>
+          </a:p>
+          <a:p>
+            <a:pPr marL="285750" indent="-285750">
+              <a:spcAft>
+                <a:spcPts val="400"/>
+              </a:spcAft>
+              <a:buClr>
+                <a:srgbClr val="990F3D"/>
+              </a:buClr>
+              <a:buFont typeface="Arial"/>
+              <a:buChar char="•"/>
+            </a:pPr>
+            <a:r>
+              <a:rPr lang="es-ES" sz="1500" dirty="0">
+                <a:solidFill>
+                  <a:srgbClr val="2F2B28"/>
+                </a:solidFill>
+              </a:rPr>
+              <a:t>Fase 6: catorce meses en uso. Control de gestión valida 1,1 M€ al año (P28); la capacidad liberada se reasignó a incidencias complejas.</a:t>
+            </a:r>
+          </a:p>
+          <a:p>
+            <a:pPr marL="285750" indent="-285750">
+              <a:spcAft>
+                <a:spcPts val="400"/>
+              </a:spcAft>
+              <a:buClr>
+                <a:srgbClr val="990F3D"/>
+              </a:buClr>
+              <a:buFont typeface="Arial"/>
+              <a:buChar char="•"/>
+            </a:pPr>
+            <a:r>
+              <a:rPr lang="es-ES" sz="1500" dirty="0">
+                <a:solidFill>
+                  <a:srgbClr val="2F2B28"/>
+                </a:solidFill>
+              </a:rPr>
+              <a:t>En el embudo está en «En uso»; en el panel suma al neto anual porque su valor está validado, no declarado.</a:t>
+            </a:r>
+          </a:p>
+        </p:txBody>
+      </p:sp>
+      <p:sp>
+        <p:nvSpPr>
+          <p:cNvPr id="171" name="Caja 171"/>
           <p:cNvSpPr/>
           <p:nvPr/>
         </p:nvSpPr>
         <p:spPr>
           <a:xfrm>
-            <a:off x="681000" y="2350000"/>
-            <a:ext cx="1240000" cy="1500000"/>
+            <a:off x="609600" y="5600000"/>
+            <a:ext cx="10972800" cy="900000"/>
           </a:xfrm>
           <a:prstGeom prst="roundRect">
             <a:avLst>
@@ -3245,693 +3371,12 @@
           <a:p>
             <a:pPr algn="ctr"/>
             <a:r>
-              <a:rPr lang="es-ES" sz="2400" b="1" dirty="0">
+              <a:rPr lang="es-ES" sz="2100" b="1" dirty="0">
                 <a:solidFill>
                   <a:srgbClr val="FFFFFF"/>
                 </a:solidFill>
               </a:rPr>
-              <a:t>F0</a:t>
-            </a:r>
-          </a:p>
-          <a:p>
-            <a:pPr algn="ctr"/>
-            <a:r>
-              <a:rPr lang="es-ES" sz="1050" dirty="0">
-                <a:solidFill>
-                  <a:srgbClr val="FFFFFF"/>
-                </a:solidFill>
-              </a:rPr>
-              <a:t>Contexto y restricciones</a:t>
-            </a:r>
-          </a:p>
-        </p:txBody>
-      </p:sp>
-      <p:sp>
-        <p:nvSpPr>
-          <p:cNvPr id="169" name="Texto 169"/>
-          <p:cNvSpPr txBox="1"/>
-          <p:nvPr/>
-        </p:nvSpPr>
-        <p:spPr>
-          <a:xfrm>
-            <a:off x="1591000" y="3900000"/>
-            <a:ext cx="800000" cy="300000"/>
-          </a:xfrm>
-          <a:prstGeom prst="rect">
-            <a:avLst/>
-          </a:prstGeom>
-          <a:noFill/>
-        </p:spPr>
-        <p:txBody>
-          <a:bodyPr wrap="square" anchor="t" lIns="45720" rIns="45720">
-            <a:noAutofit/>
-          </a:bodyPr>
-          <a:lstStyle/>
-          <a:p>
-            <a:pPr algn="ctr"/>
-            <a:r>
-              <a:rPr lang="es-ES" sz="1200" b="1" dirty="0">
-                <a:solidFill>
-                  <a:srgbClr val="990F3D"/>
-                </a:solidFill>
-              </a:rPr>
-              <a:t>G0</a:t>
-            </a:r>
-          </a:p>
-        </p:txBody>
-      </p:sp>
-      <p:sp>
-        <p:nvSpPr>
-          <p:cNvPr id="170" name="Caja 170"/>
-          <p:cNvSpPr/>
-          <p:nvPr/>
-        </p:nvSpPr>
-        <p:spPr>
-          <a:xfrm>
-            <a:off x="2051000" y="2350000"/>
-            <a:ext cx="1240000" cy="1500000"/>
-          </a:xfrm>
-          <a:prstGeom prst="roundRect">
-            <a:avLst>
-              <a:gd name="adj" fmla="val 6000"/>
-            </a:avLst>
-          </a:prstGeom>
-          <a:solidFill>
-            <a:srgbClr val="0D7680"/>
-          </a:solidFill>
-          <a:ln>
-            <a:noFill/>
-          </a:ln>
-        </p:spPr>
-        <p:txBody>
-          <a:bodyPr wrap="square" anchor="ctr" lIns="45720" rIns="45720">
-            <a:noAutofit/>
-          </a:bodyPr>
-          <a:lstStyle/>
-          <a:p>
-            <a:pPr algn="ctr"/>
-            <a:r>
-              <a:rPr lang="es-ES" sz="2400" b="1" dirty="0">
-                <a:solidFill>
-                  <a:srgbClr val="FFFFFF"/>
-                </a:solidFill>
-              </a:rPr>
-              <a:t>F1</a:t>
-            </a:r>
-          </a:p>
-          <a:p>
-            <a:pPr algn="ctr"/>
-            <a:r>
-              <a:rPr lang="es-ES" sz="1050" dirty="0">
-                <a:solidFill>
-                  <a:srgbClr val="FFFFFF"/>
-                </a:solidFill>
-              </a:rPr>
-              <a:t>Descubrimiento de oportunidades</a:t>
-            </a:r>
-          </a:p>
-        </p:txBody>
-      </p:sp>
-      <p:sp>
-        <p:nvSpPr>
-          <p:cNvPr id="171" name="Texto 171"/>
-          <p:cNvSpPr txBox="1"/>
-          <p:nvPr/>
-        </p:nvSpPr>
-        <p:spPr>
-          <a:xfrm>
-            <a:off x="2961000" y="3900000"/>
-            <a:ext cx="800000" cy="300000"/>
-          </a:xfrm>
-          <a:prstGeom prst="rect">
-            <a:avLst/>
-          </a:prstGeom>
-          <a:noFill/>
-        </p:spPr>
-        <p:txBody>
-          <a:bodyPr wrap="square" anchor="t" lIns="45720" rIns="45720">
-            <a:noAutofit/>
-          </a:bodyPr>
-          <a:lstStyle/>
-          <a:p>
-            <a:pPr algn="ctr"/>
-            <a:r>
-              <a:rPr lang="es-ES" sz="1200" b="1" dirty="0">
-                <a:solidFill>
-                  <a:srgbClr val="990F3D"/>
-                </a:solidFill>
-              </a:rPr>
-              <a:t>G1</a:t>
-            </a:r>
-          </a:p>
-        </p:txBody>
-      </p:sp>
-      <p:sp>
-        <p:nvSpPr>
-          <p:cNvPr id="172" name="Caja 172"/>
-          <p:cNvSpPr/>
-          <p:nvPr/>
-        </p:nvSpPr>
-        <p:spPr>
-          <a:xfrm>
-            <a:off x="3421000" y="2350000"/>
-            <a:ext cx="1240000" cy="1500000"/>
-          </a:xfrm>
-          <a:prstGeom prst="roundRect">
-            <a:avLst>
-              <a:gd name="adj" fmla="val 6000"/>
-            </a:avLst>
-          </a:prstGeom>
-          <a:solidFill>
-            <a:srgbClr val="0D7680"/>
-          </a:solidFill>
-          <a:ln>
-            <a:noFill/>
-          </a:ln>
-        </p:spPr>
-        <p:txBody>
-          <a:bodyPr wrap="square" anchor="ctr" lIns="45720" rIns="45720">
-            <a:noAutofit/>
-          </a:bodyPr>
-          <a:lstStyle/>
-          <a:p>
-            <a:pPr algn="ctr"/>
-            <a:r>
-              <a:rPr lang="es-ES" sz="2400" b="1" dirty="0">
-                <a:solidFill>
-                  <a:srgbClr val="FFFFFF"/>
-                </a:solidFill>
-              </a:rPr>
-              <a:t>F2</a:t>
-            </a:r>
-          </a:p>
-          <a:p>
-            <a:pPr algn="ctr"/>
-            <a:r>
-              <a:rPr lang="es-ES" sz="1050" dirty="0">
-                <a:solidFill>
-                  <a:srgbClr val="FFFFFF"/>
-                </a:solidFill>
-              </a:rPr>
-              <a:t>Hipótesis de valor</a:t>
-            </a:r>
-          </a:p>
-        </p:txBody>
-      </p:sp>
-      <p:sp>
-        <p:nvSpPr>
-          <p:cNvPr id="173" name="Texto 173"/>
-          <p:cNvSpPr txBox="1"/>
-          <p:nvPr/>
-        </p:nvSpPr>
-        <p:spPr>
-          <a:xfrm>
-            <a:off x="4331000" y="3900000"/>
-            <a:ext cx="800000" cy="300000"/>
-          </a:xfrm>
-          <a:prstGeom prst="rect">
-            <a:avLst/>
-          </a:prstGeom>
-          <a:noFill/>
-        </p:spPr>
-        <p:txBody>
-          <a:bodyPr wrap="square" anchor="t" lIns="45720" rIns="45720">
-            <a:noAutofit/>
-          </a:bodyPr>
-          <a:lstStyle/>
-          <a:p>
-            <a:pPr algn="ctr"/>
-            <a:r>
-              <a:rPr lang="es-ES" sz="1200" b="1" dirty="0">
-                <a:solidFill>
-                  <a:srgbClr val="990F3D"/>
-                </a:solidFill>
-              </a:rPr>
-              <a:t>G2</a:t>
-            </a:r>
-          </a:p>
-        </p:txBody>
-      </p:sp>
-      <p:sp>
-        <p:nvSpPr>
-          <p:cNvPr id="174" name="Caja 174"/>
-          <p:cNvSpPr/>
-          <p:nvPr/>
-        </p:nvSpPr>
-        <p:spPr>
-          <a:xfrm>
-            <a:off x="4791000" y="2350000"/>
-            <a:ext cx="1240000" cy="1500000"/>
-          </a:xfrm>
-          <a:prstGeom prst="roundRect">
-            <a:avLst>
-              <a:gd name="adj" fmla="val 6000"/>
-            </a:avLst>
-          </a:prstGeom>
-          <a:solidFill>
-            <a:srgbClr val="0D7680"/>
-          </a:solidFill>
-          <a:ln>
-            <a:noFill/>
-          </a:ln>
-        </p:spPr>
-        <p:txBody>
-          <a:bodyPr wrap="square" anchor="ctr" lIns="45720" rIns="45720">
-            <a:noAutofit/>
-          </a:bodyPr>
-          <a:lstStyle/>
-          <a:p>
-            <a:pPr algn="ctr"/>
-            <a:r>
-              <a:rPr lang="es-ES" sz="2400" b="1" dirty="0">
-                <a:solidFill>
-                  <a:srgbClr val="FFFFFF"/>
-                </a:solidFill>
-              </a:rPr>
-              <a:t>F3</a:t>
-            </a:r>
-          </a:p>
-          <a:p>
-            <a:pPr algn="ctr"/>
-            <a:r>
-              <a:rPr lang="es-ES" sz="1050" dirty="0">
-                <a:solidFill>
-                  <a:srgbClr val="FFFFFF"/>
-                </a:solidFill>
-              </a:rPr>
-              <a:t>Viabilidad y riesgo</a:t>
-            </a:r>
-          </a:p>
-        </p:txBody>
-      </p:sp>
-      <p:sp>
-        <p:nvSpPr>
-          <p:cNvPr id="175" name="Texto 175"/>
-          <p:cNvSpPr txBox="1"/>
-          <p:nvPr/>
-        </p:nvSpPr>
-        <p:spPr>
-          <a:xfrm>
-            <a:off x="5701000" y="3900000"/>
-            <a:ext cx="800000" cy="300000"/>
-          </a:xfrm>
-          <a:prstGeom prst="rect">
-            <a:avLst/>
-          </a:prstGeom>
-          <a:noFill/>
-        </p:spPr>
-        <p:txBody>
-          <a:bodyPr wrap="square" anchor="t" lIns="45720" rIns="45720">
-            <a:noAutofit/>
-          </a:bodyPr>
-          <a:lstStyle/>
-          <a:p>
-            <a:pPr algn="ctr"/>
-            <a:r>
-              <a:rPr lang="es-ES" sz="1200" b="1" dirty="0">
-                <a:solidFill>
-                  <a:srgbClr val="990F3D"/>
-                </a:solidFill>
-              </a:rPr>
-              <a:t>G3</a:t>
-            </a:r>
-          </a:p>
-        </p:txBody>
-      </p:sp>
-      <p:sp>
-        <p:nvSpPr>
-          <p:cNvPr id="176" name="Caja 176"/>
-          <p:cNvSpPr/>
-          <p:nvPr/>
-        </p:nvSpPr>
-        <p:spPr>
-          <a:xfrm>
-            <a:off x="6161000" y="2350000"/>
-            <a:ext cx="1240000" cy="1500000"/>
-          </a:xfrm>
-          <a:prstGeom prst="roundRect">
-            <a:avLst>
-              <a:gd name="adj" fmla="val 6000"/>
-            </a:avLst>
-          </a:prstGeom>
-          <a:solidFill>
-            <a:srgbClr val="0D7680"/>
-          </a:solidFill>
-          <a:ln>
-            <a:noFill/>
-          </a:ln>
-        </p:spPr>
-        <p:txBody>
-          <a:bodyPr wrap="square" anchor="ctr" lIns="45720" rIns="45720">
-            <a:noAutofit/>
-          </a:bodyPr>
-          <a:lstStyle/>
-          <a:p>
-            <a:pPr algn="ctr"/>
-            <a:r>
-              <a:rPr lang="es-ES" sz="2400" b="1" dirty="0">
-                <a:solidFill>
-                  <a:srgbClr val="FFFFFF"/>
-                </a:solidFill>
-              </a:rPr>
-              <a:t>F4</a:t>
-            </a:r>
-          </a:p>
-          <a:p>
-            <a:pPr algn="ctr"/>
-            <a:r>
-              <a:rPr lang="es-ES" sz="1050" dirty="0">
-                <a:solidFill>
-                  <a:srgbClr val="FFFFFF"/>
-                </a:solidFill>
-              </a:rPr>
-              <a:t>Diseño de la solución</a:t>
-            </a:r>
-          </a:p>
-        </p:txBody>
-      </p:sp>
-      <p:sp>
-        <p:nvSpPr>
-          <p:cNvPr id="177" name="Texto 177"/>
-          <p:cNvSpPr txBox="1"/>
-          <p:nvPr/>
-        </p:nvSpPr>
-        <p:spPr>
-          <a:xfrm>
-            <a:off x="7071000" y="3900000"/>
-            <a:ext cx="800000" cy="300000"/>
-          </a:xfrm>
-          <a:prstGeom prst="rect">
-            <a:avLst/>
-          </a:prstGeom>
-          <a:noFill/>
-        </p:spPr>
-        <p:txBody>
-          <a:bodyPr wrap="square" anchor="t" lIns="45720" rIns="45720">
-            <a:noAutofit/>
-          </a:bodyPr>
-          <a:lstStyle/>
-          <a:p>
-            <a:pPr algn="ctr"/>
-            <a:r>
-              <a:rPr lang="es-ES" sz="1200" b="1" dirty="0">
-                <a:solidFill>
-                  <a:srgbClr val="990F3D"/>
-                </a:solidFill>
-              </a:rPr>
-              <a:t>G4</a:t>
-            </a:r>
-          </a:p>
-        </p:txBody>
-      </p:sp>
-      <p:sp>
-        <p:nvSpPr>
-          <p:cNvPr id="178" name="Caja 178"/>
-          <p:cNvSpPr/>
-          <p:nvPr/>
-        </p:nvSpPr>
-        <p:spPr>
-          <a:xfrm>
-            <a:off x="7531000" y="2350000"/>
-            <a:ext cx="1240000" cy="1500000"/>
-          </a:xfrm>
-          <a:prstGeom prst="roundRect">
-            <a:avLst>
-              <a:gd name="adj" fmla="val 6000"/>
-            </a:avLst>
-          </a:prstGeom>
-          <a:solidFill>
-            <a:srgbClr val="0D7680"/>
-          </a:solidFill>
-          <a:ln>
-            <a:noFill/>
-          </a:ln>
-        </p:spPr>
-        <p:txBody>
-          <a:bodyPr wrap="square" anchor="ctr" lIns="45720" rIns="45720">
-            <a:noAutofit/>
-          </a:bodyPr>
-          <a:lstStyle/>
-          <a:p>
-            <a:pPr algn="ctr"/>
-            <a:r>
-              <a:rPr lang="es-ES" sz="2400" b="1" dirty="0">
-                <a:solidFill>
-                  <a:srgbClr val="FFFFFF"/>
-                </a:solidFill>
-              </a:rPr>
-              <a:t>F5</a:t>
-            </a:r>
-          </a:p>
-          <a:p>
-            <a:pPr algn="ctr"/>
-            <a:r>
-              <a:rPr lang="es-ES" sz="1050" dirty="0">
-                <a:solidFill>
-                  <a:srgbClr val="FFFFFF"/>
-                </a:solidFill>
-              </a:rPr>
-              <a:t>Entrega y validación</a:t>
-            </a:r>
-          </a:p>
-        </p:txBody>
-      </p:sp>
-      <p:sp>
-        <p:nvSpPr>
-          <p:cNvPr id="179" name="Texto 179"/>
-          <p:cNvSpPr txBox="1"/>
-          <p:nvPr/>
-        </p:nvSpPr>
-        <p:spPr>
-          <a:xfrm>
-            <a:off x="8441000" y="3900000"/>
-            <a:ext cx="800000" cy="300000"/>
-          </a:xfrm>
-          <a:prstGeom prst="rect">
-            <a:avLst/>
-          </a:prstGeom>
-          <a:noFill/>
-        </p:spPr>
-        <p:txBody>
-          <a:bodyPr wrap="square" anchor="t" lIns="45720" rIns="45720">
-            <a:noAutofit/>
-          </a:bodyPr>
-          <a:lstStyle/>
-          <a:p>
-            <a:pPr algn="ctr"/>
-            <a:r>
-              <a:rPr lang="es-ES" sz="1200" b="1" dirty="0">
-                <a:solidFill>
-                  <a:srgbClr val="990F3D"/>
-                </a:solidFill>
-              </a:rPr>
-              <a:t>G5</a:t>
-            </a:r>
-          </a:p>
-        </p:txBody>
-      </p:sp>
-      <p:sp>
-        <p:nvSpPr>
-          <p:cNvPr id="180" name="Caja 180"/>
-          <p:cNvSpPr/>
-          <p:nvPr/>
-        </p:nvSpPr>
-        <p:spPr>
-          <a:xfrm>
-            <a:off x="8901000" y="2350000"/>
-            <a:ext cx="1240000" cy="1500000"/>
-          </a:xfrm>
-          <a:prstGeom prst="roundRect">
-            <a:avLst>
-              <a:gd name="adj" fmla="val 6000"/>
-            </a:avLst>
-          </a:prstGeom>
-          <a:solidFill>
-            <a:srgbClr val="0D7680"/>
-          </a:solidFill>
-          <a:ln>
-            <a:noFill/>
-          </a:ln>
-        </p:spPr>
-        <p:txBody>
-          <a:bodyPr wrap="square" anchor="ctr" lIns="45720" rIns="45720">
-            <a:noAutofit/>
-          </a:bodyPr>
-          <a:lstStyle/>
-          <a:p>
-            <a:pPr algn="ctr"/>
-            <a:r>
-              <a:rPr lang="es-ES" sz="2400" b="1" dirty="0">
-                <a:solidFill>
-                  <a:srgbClr val="FFFFFF"/>
-                </a:solidFill>
-              </a:rPr>
-              <a:t>F6</a:t>
-            </a:r>
-          </a:p>
-          <a:p>
-            <a:pPr algn="ctr"/>
-            <a:r>
-              <a:rPr lang="es-ES" sz="1050" dirty="0">
-                <a:solidFill>
-                  <a:srgbClr val="FFFFFF"/>
-                </a:solidFill>
-              </a:rPr>
-              <a:t>Operación y gobierno</a:t>
-            </a:r>
-          </a:p>
-        </p:txBody>
-      </p:sp>
-      <p:sp>
-        <p:nvSpPr>
-          <p:cNvPr id="181" name="Texto 181"/>
-          <p:cNvSpPr txBox="1"/>
-          <p:nvPr/>
-        </p:nvSpPr>
-        <p:spPr>
-          <a:xfrm>
-            <a:off x="9811000" y="3900000"/>
-            <a:ext cx="800000" cy="300000"/>
-          </a:xfrm>
-          <a:prstGeom prst="rect">
-            <a:avLst/>
-          </a:prstGeom>
-          <a:noFill/>
-        </p:spPr>
-        <p:txBody>
-          <a:bodyPr wrap="square" anchor="t" lIns="45720" rIns="45720">
-            <a:noAutofit/>
-          </a:bodyPr>
-          <a:lstStyle/>
-          <a:p>
-            <a:pPr algn="ctr"/>
-            <a:r>
-              <a:rPr lang="es-ES" sz="1200" b="1" dirty="0">
-                <a:solidFill>
-                  <a:srgbClr val="990F3D"/>
-                </a:solidFill>
-              </a:rPr>
-              <a:t>R6</a:t>
-            </a:r>
-          </a:p>
-        </p:txBody>
-      </p:sp>
-      <p:sp>
-        <p:nvSpPr>
-          <p:cNvPr id="182" name="Caja 182"/>
-          <p:cNvSpPr/>
-          <p:nvPr/>
-        </p:nvSpPr>
-        <p:spPr>
-          <a:xfrm>
-            <a:off x="10271000" y="2350000"/>
-            <a:ext cx="1240000" cy="1500000"/>
-          </a:xfrm>
-          <a:prstGeom prst="roundRect">
-            <a:avLst>
-              <a:gd name="adj" fmla="val 6000"/>
-            </a:avLst>
-          </a:prstGeom>
-          <a:solidFill>
-            <a:srgbClr val="C9A78D"/>
-          </a:solidFill>
-          <a:ln>
-            <a:noFill/>
-          </a:ln>
-        </p:spPr>
-        <p:txBody>
-          <a:bodyPr wrap="square" anchor="ctr" lIns="45720" rIns="45720">
-            <a:noAutofit/>
-          </a:bodyPr>
-          <a:lstStyle/>
-          <a:p>
-            <a:pPr algn="ctr"/>
-            <a:r>
-              <a:rPr lang="es-ES" sz="2400" b="1" dirty="0">
-                <a:solidFill>
-                  <a:srgbClr val="564D47"/>
-                </a:solidFill>
-              </a:rPr>
-              <a:t>F7</a:t>
-            </a:r>
-          </a:p>
-          <a:p>
-            <a:pPr algn="ctr"/>
-            <a:r>
-              <a:rPr lang="es-ES" sz="1050" dirty="0">
-                <a:solidFill>
-                  <a:srgbClr val="564D47"/>
-                </a:solidFill>
-              </a:rPr>
-              <a:t>Evolución o retirada</a:t>
-            </a:r>
-          </a:p>
-        </p:txBody>
-      </p:sp>
-      <p:sp>
-        <p:nvSpPr>
-          <p:cNvPr id="183" name="Texto 183"/>
-          <p:cNvSpPr txBox="1"/>
-          <p:nvPr/>
-        </p:nvSpPr>
-        <p:spPr>
-          <a:xfrm>
-            <a:off x="11181000" y="3900000"/>
-            <a:ext cx="800000" cy="300000"/>
-          </a:xfrm>
-          <a:prstGeom prst="rect">
-            <a:avLst/>
-          </a:prstGeom>
-          <a:noFill/>
-        </p:spPr>
-        <p:txBody>
-          <a:bodyPr wrap="square" anchor="t" lIns="45720" rIns="45720">
-            <a:noAutofit/>
-          </a:bodyPr>
-          <a:lstStyle/>
-          <a:p>
-            <a:pPr algn="ctr"/>
-            <a:r>
-              <a:rPr lang="es-ES" sz="1200" b="1" dirty="0">
-                <a:solidFill>
-                  <a:srgbClr val="990F3D"/>
-                </a:solidFill>
-              </a:rPr>
-              <a:t>G7</a:t>
-            </a:r>
-          </a:p>
-        </p:txBody>
-      </p:sp>
-      <p:sp>
-        <p:nvSpPr>
-          <p:cNvPr id="184" name="Texto 184"/>
-          <p:cNvSpPr txBox="1"/>
-          <p:nvPr/>
-        </p:nvSpPr>
-        <p:spPr>
-          <a:xfrm>
-            <a:off x="609600" y="4430000"/>
-            <a:ext cx="10972800" cy="600000"/>
-          </a:xfrm>
-          <a:prstGeom prst="rect">
-            <a:avLst/>
-          </a:prstGeom>
-          <a:noFill/>
-        </p:spPr>
-        <p:txBody>
-          <a:bodyPr wrap="square" anchor="t" lIns="45720" rIns="45720">
-            <a:noAutofit/>
-          </a:bodyPr>
-          <a:lstStyle/>
-          <a:p>
-            <a:pPr algn="ctr"/>
-            <a:r>
-              <a:rPr lang="es-ES" sz="2200" b="1" dirty="0">
-                <a:solidFill>
-                  <a:srgbClr val="0D7680"/>
-                </a:solidFill>
-              </a:rPr>
-              <a:t>EN USO · cada R6 confirma que sigue aportando valor bajo control</a:t>
+              <a:t>EN PRODUCCIÓN · 1,1 M€ DE RETORNO ANUAL VALIDADO · R6 TRIMESTRAL</a:t>
             </a:r>
           </a:p>
         </p:txBody>
@@ -3971,7 +3416,7 @@
       </p:grpSpPr>
       <p:sp>
         <p:nvSpPr>
-          <p:cNvPr id="190" name="Marca"/>
+          <p:cNvPr id="192" name="Marca"/>
           <p:cNvSpPr/>
           <p:nvPr/>
         </p:nvSpPr>
@@ -3995,7 +3440,7 @@
       </p:sp>
       <p:sp>
         <p:nvSpPr>
-          <p:cNvPr id="191" name="Texto 191"/>
+          <p:cNvPr id="193" name="Texto 193"/>
           <p:cNvSpPr txBox="1"/>
           <p:nvPr/>
         </p:nvSpPr>
@@ -4029,7 +3474,7 @@
       </p:sp>
       <p:sp>
         <p:nvSpPr>
-          <p:cNvPr id="192" name="Texto 192"/>
+          <p:cNvPr id="194" name="Texto 194"/>
           <p:cNvSpPr txBox="1"/>
           <p:nvPr/>
         </p:nvSpPr>
@@ -4056,130 +3501,763 @@
                   <a:srgbClr val="990F3D"/>
                 </a:solidFill>
               </a:rPr>
-              <a:t>Cómo se mide el valor</a:t>
-            </a:r>
-          </a:p>
-        </p:txBody>
-      </p:sp>
-      <p:sp>
-        <p:nvSpPr>
-          <p:cNvPr id="189" name="Texto 189"/>
-          <p:cNvSpPr txBox="1"/>
-          <p:nvPr/>
-        </p:nvSpPr>
-        <p:spPr>
-          <a:xfrm>
-            <a:off x="609600" y="1750000"/>
-            <a:ext cx="10972800" cy="4400000"/>
-          </a:xfrm>
-          <a:prstGeom prst="rect">
-            <a:avLst/>
-          </a:prstGeom>
-          <a:noFill/>
-        </p:spPr>
-        <p:txBody>
-          <a:bodyPr wrap="square" anchor="t" lIns="45720" rIns="45720">
-            <a:noAutofit/>
-          </a:bodyPr>
-          <a:lstStyle/>
-          <a:p>
-            <a:pPr marL="285750" indent="-285750">
-              <a:spcAft>
-                <a:spcPts val="400"/>
-              </a:spcAft>
-              <a:buClr>
-                <a:srgbClr val="990F3D"/>
-              </a:buClr>
-              <a:buFont typeface="Arial"/>
-              <a:buChar char="•"/>
-            </a:pPr>
-            <a:r>
-              <a:rPr lang="es-ES" sz="1800" dirty="0">
-                <a:solidFill>
-                  <a:srgbClr val="2F2B28"/>
-                </a:solidFill>
-              </a:rPr>
-              <a:t>Todo importe lleva fórmula y estado: validado (control de gestión), declarado (el equipo) o estimado.</a:t>
-            </a:r>
-          </a:p>
-          <a:p>
-            <a:pPr marL="285750" indent="-285750">
-              <a:spcAft>
-                <a:spcPts val="400"/>
-              </a:spcAft>
-              <a:buClr>
-                <a:srgbClr val="990F3D"/>
-              </a:buClr>
-              <a:buFont typeface="Arial"/>
-              <a:buChar char="•"/>
-            </a:pPr>
-            <a:r>
-              <a:rPr lang="es-ES" sz="1800" dirty="0">
-                <a:solidFill>
-                  <a:srgbClr val="2F2B28"/>
-                </a:solidFill>
-              </a:rPr>
-              <a:t>Las horas liberadas no son ahorro hasta que se materializan: baja un coste o se reasignan a una actividad con valor.</a:t>
-            </a:r>
-          </a:p>
-          <a:p>
-            <a:pPr marL="285750" indent="-285750">
-              <a:spcAft>
-                <a:spcPts val="400"/>
-              </a:spcAft>
-              <a:buClr>
-                <a:srgbClr val="990F3D"/>
-              </a:buClr>
-              <a:buFont typeface="Arial"/>
-              <a:buChar char="•"/>
-            </a:pPr>
-            <a:r>
-              <a:rPr lang="es-ES" sz="1800" dirty="0">
-                <a:solidFill>
-                  <a:srgbClr val="2F2B28"/>
-                </a:solidFill>
-              </a:rPr>
-              <a:t>El coste es completo: construcción, consumo, operación, supervisión humana y retirada.</a:t>
-            </a:r>
-          </a:p>
-          <a:p>
-            <a:pPr marL="285750" indent="-285750">
-              <a:spcAft>
-                <a:spcPts val="400"/>
-              </a:spcAft>
-              <a:buClr>
-                <a:srgbClr val="990F3D"/>
-              </a:buClr>
-              <a:buFont typeface="Arial"/>
-              <a:buChar char="•"/>
-            </a:pPr>
-            <a:r>
-              <a:rPr lang="es-ES" sz="1800" dirty="0">
-                <a:solidFill>
-                  <a:srgbClr val="2F2B28"/>
-                </a:solidFill>
-              </a:rPr>
-              <a:t>El índice de transformación usa ocho señales de evidencia para separar transformar de solo eficientar.</a:t>
-            </a:r>
-          </a:p>
-          <a:p>
-            <a:pPr marL="285750" indent="-285750">
-              <a:spcAft>
-                <a:spcPts val="400"/>
-              </a:spcAft>
-              <a:buClr>
-                <a:srgbClr val="990F3D"/>
-              </a:buClr>
-              <a:buFont typeface="Arial"/>
-              <a:buChar char="•"/>
-            </a:pPr>
-            <a:r>
-              <a:rPr lang="es-ES" sz="1800" dirty="0">
-                <a:solidFill>
-                  <a:srgbClr val="2F2B28"/>
-                </a:solidFill>
-              </a:rPr>
-              <a:t>Diez reglas de medición (documento 40). Ninguna cifra entra en el neto de la cartera sin su estado.</a:t>
+              <a:t>La iniciativa 2, sobre el ciclo de vida</a:t>
+            </a:r>
+          </a:p>
+        </p:txBody>
+      </p:sp>
+      <p:sp>
+        <p:nvSpPr>
+          <p:cNvPr id="195" name="Texto 195"/>
+          <p:cNvSpPr txBox="1"/>
+          <p:nvPr/>
+        </p:nvSpPr>
+        <p:spPr>
+          <a:xfrm>
+            <a:off x="609600" y="1330000"/>
+            <a:ext cx="10972800" cy="450000"/>
+          </a:xfrm>
+          <a:prstGeom prst="rect">
+            <a:avLst/>
+          </a:prstGeom>
+          <a:noFill/>
+        </p:spPr>
+        <p:txBody>
+          <a:bodyPr wrap="square" anchor="t" lIns="45720" rIns="45720">
+            <a:noAutofit/>
+          </a:bodyPr>
+          <a:lstStyle/>
+          <a:p>
+            <a:pPr algn="l"/>
+            <a:r>
+              <a:rPr lang="es-ES" sz="1500" dirty="0">
+                <a:solidFill>
+                  <a:srgbClr val="564D47"/>
+                </a:solidFill>
+              </a:rPr>
+              <a:t>Recorrió las fases 0 a 6 y sigue en uso; la fase 7 llegará con G7</a:t>
+            </a:r>
+          </a:p>
+        </p:txBody>
+      </p:sp>
+      <p:sp>
+        <p:nvSpPr>
+          <p:cNvPr id="175" name="Caja 175"/>
+          <p:cNvSpPr/>
+          <p:nvPr/>
+        </p:nvSpPr>
+        <p:spPr>
+          <a:xfrm>
+            <a:off x="681000" y="2350000"/>
+            <a:ext cx="1240000" cy="1500000"/>
+          </a:xfrm>
+          <a:prstGeom prst="roundRect">
+            <a:avLst>
+              <a:gd name="adj" fmla="val 6000"/>
+            </a:avLst>
+          </a:prstGeom>
+          <a:solidFill>
+            <a:srgbClr val="0D7680"/>
+          </a:solidFill>
+          <a:ln>
+            <a:noFill/>
+          </a:ln>
+        </p:spPr>
+        <p:txBody>
+          <a:bodyPr wrap="square" anchor="ctr" lIns="45720" rIns="45720">
+            <a:noAutofit/>
+          </a:bodyPr>
+          <a:lstStyle/>
+          <a:p>
+            <a:pPr algn="ctr"/>
+            <a:r>
+              <a:rPr lang="es-ES" sz="2400" b="1" dirty="0">
+                <a:solidFill>
+                  <a:srgbClr val="FFFFFF"/>
+                </a:solidFill>
+              </a:rPr>
+              <a:t>F0</a:t>
+            </a:r>
+          </a:p>
+          <a:p>
+            <a:pPr algn="ctr"/>
+            <a:r>
+              <a:rPr lang="es-ES" sz="1050" dirty="0">
+                <a:solidFill>
+                  <a:srgbClr val="FFFFFF"/>
+                </a:solidFill>
+              </a:rPr>
+              <a:t>Contexto y restricciones</a:t>
+            </a:r>
+          </a:p>
+        </p:txBody>
+      </p:sp>
+      <p:sp>
+        <p:nvSpPr>
+          <p:cNvPr id="176" name="Texto 176"/>
+          <p:cNvSpPr txBox="1"/>
+          <p:nvPr/>
+        </p:nvSpPr>
+        <p:spPr>
+          <a:xfrm>
+            <a:off x="1591000" y="3900000"/>
+            <a:ext cx="800000" cy="300000"/>
+          </a:xfrm>
+          <a:prstGeom prst="rect">
+            <a:avLst/>
+          </a:prstGeom>
+          <a:noFill/>
+        </p:spPr>
+        <p:txBody>
+          <a:bodyPr wrap="square" anchor="t" lIns="45720" rIns="45720">
+            <a:noAutofit/>
+          </a:bodyPr>
+          <a:lstStyle/>
+          <a:p>
+            <a:pPr algn="ctr"/>
+            <a:r>
+              <a:rPr lang="es-ES" sz="1200" b="1" dirty="0">
+                <a:solidFill>
+                  <a:srgbClr val="990F3D"/>
+                </a:solidFill>
+              </a:rPr>
+              <a:t>G0</a:t>
+            </a:r>
+          </a:p>
+        </p:txBody>
+      </p:sp>
+      <p:sp>
+        <p:nvSpPr>
+          <p:cNvPr id="177" name="Caja 177"/>
+          <p:cNvSpPr/>
+          <p:nvPr/>
+        </p:nvSpPr>
+        <p:spPr>
+          <a:xfrm>
+            <a:off x="2051000" y="2350000"/>
+            <a:ext cx="1240000" cy="1500000"/>
+          </a:xfrm>
+          <a:prstGeom prst="roundRect">
+            <a:avLst>
+              <a:gd name="adj" fmla="val 6000"/>
+            </a:avLst>
+          </a:prstGeom>
+          <a:solidFill>
+            <a:srgbClr val="0D7680"/>
+          </a:solidFill>
+          <a:ln>
+            <a:noFill/>
+          </a:ln>
+        </p:spPr>
+        <p:txBody>
+          <a:bodyPr wrap="square" anchor="ctr" lIns="45720" rIns="45720">
+            <a:noAutofit/>
+          </a:bodyPr>
+          <a:lstStyle/>
+          <a:p>
+            <a:pPr algn="ctr"/>
+            <a:r>
+              <a:rPr lang="es-ES" sz="2400" b="1" dirty="0">
+                <a:solidFill>
+                  <a:srgbClr val="FFFFFF"/>
+                </a:solidFill>
+              </a:rPr>
+              <a:t>F1</a:t>
+            </a:r>
+          </a:p>
+          <a:p>
+            <a:pPr algn="ctr"/>
+            <a:r>
+              <a:rPr lang="es-ES" sz="1050" dirty="0">
+                <a:solidFill>
+                  <a:srgbClr val="FFFFFF"/>
+                </a:solidFill>
+              </a:rPr>
+              <a:t>Descubrimiento de oportunidades</a:t>
+            </a:r>
+          </a:p>
+        </p:txBody>
+      </p:sp>
+      <p:sp>
+        <p:nvSpPr>
+          <p:cNvPr id="178" name="Texto 178"/>
+          <p:cNvSpPr txBox="1"/>
+          <p:nvPr/>
+        </p:nvSpPr>
+        <p:spPr>
+          <a:xfrm>
+            <a:off x="2961000" y="3900000"/>
+            <a:ext cx="800000" cy="300000"/>
+          </a:xfrm>
+          <a:prstGeom prst="rect">
+            <a:avLst/>
+          </a:prstGeom>
+          <a:noFill/>
+        </p:spPr>
+        <p:txBody>
+          <a:bodyPr wrap="square" anchor="t" lIns="45720" rIns="45720">
+            <a:noAutofit/>
+          </a:bodyPr>
+          <a:lstStyle/>
+          <a:p>
+            <a:pPr algn="ctr"/>
+            <a:r>
+              <a:rPr lang="es-ES" sz="1200" b="1" dirty="0">
+                <a:solidFill>
+                  <a:srgbClr val="990F3D"/>
+                </a:solidFill>
+              </a:rPr>
+              <a:t>G1</a:t>
+            </a:r>
+          </a:p>
+        </p:txBody>
+      </p:sp>
+      <p:sp>
+        <p:nvSpPr>
+          <p:cNvPr id="179" name="Caja 179"/>
+          <p:cNvSpPr/>
+          <p:nvPr/>
+        </p:nvSpPr>
+        <p:spPr>
+          <a:xfrm>
+            <a:off x="3421000" y="2350000"/>
+            <a:ext cx="1240000" cy="1500000"/>
+          </a:xfrm>
+          <a:prstGeom prst="roundRect">
+            <a:avLst>
+              <a:gd name="adj" fmla="val 6000"/>
+            </a:avLst>
+          </a:prstGeom>
+          <a:solidFill>
+            <a:srgbClr val="0D7680"/>
+          </a:solidFill>
+          <a:ln>
+            <a:noFill/>
+          </a:ln>
+        </p:spPr>
+        <p:txBody>
+          <a:bodyPr wrap="square" anchor="ctr" lIns="45720" rIns="45720">
+            <a:noAutofit/>
+          </a:bodyPr>
+          <a:lstStyle/>
+          <a:p>
+            <a:pPr algn="ctr"/>
+            <a:r>
+              <a:rPr lang="es-ES" sz="2400" b="1" dirty="0">
+                <a:solidFill>
+                  <a:srgbClr val="FFFFFF"/>
+                </a:solidFill>
+              </a:rPr>
+              <a:t>F2</a:t>
+            </a:r>
+          </a:p>
+          <a:p>
+            <a:pPr algn="ctr"/>
+            <a:r>
+              <a:rPr lang="es-ES" sz="1050" dirty="0">
+                <a:solidFill>
+                  <a:srgbClr val="FFFFFF"/>
+                </a:solidFill>
+              </a:rPr>
+              <a:t>Hipótesis de valor</a:t>
+            </a:r>
+          </a:p>
+        </p:txBody>
+      </p:sp>
+      <p:sp>
+        <p:nvSpPr>
+          <p:cNvPr id="180" name="Texto 180"/>
+          <p:cNvSpPr txBox="1"/>
+          <p:nvPr/>
+        </p:nvSpPr>
+        <p:spPr>
+          <a:xfrm>
+            <a:off x="4331000" y="3900000"/>
+            <a:ext cx="800000" cy="300000"/>
+          </a:xfrm>
+          <a:prstGeom prst="rect">
+            <a:avLst/>
+          </a:prstGeom>
+          <a:noFill/>
+        </p:spPr>
+        <p:txBody>
+          <a:bodyPr wrap="square" anchor="t" lIns="45720" rIns="45720">
+            <a:noAutofit/>
+          </a:bodyPr>
+          <a:lstStyle/>
+          <a:p>
+            <a:pPr algn="ctr"/>
+            <a:r>
+              <a:rPr lang="es-ES" sz="1200" b="1" dirty="0">
+                <a:solidFill>
+                  <a:srgbClr val="990F3D"/>
+                </a:solidFill>
+              </a:rPr>
+              <a:t>G2</a:t>
+            </a:r>
+          </a:p>
+        </p:txBody>
+      </p:sp>
+      <p:sp>
+        <p:nvSpPr>
+          <p:cNvPr id="181" name="Caja 181"/>
+          <p:cNvSpPr/>
+          <p:nvPr/>
+        </p:nvSpPr>
+        <p:spPr>
+          <a:xfrm>
+            <a:off x="4791000" y="2350000"/>
+            <a:ext cx="1240000" cy="1500000"/>
+          </a:xfrm>
+          <a:prstGeom prst="roundRect">
+            <a:avLst>
+              <a:gd name="adj" fmla="val 6000"/>
+            </a:avLst>
+          </a:prstGeom>
+          <a:solidFill>
+            <a:srgbClr val="0D7680"/>
+          </a:solidFill>
+          <a:ln>
+            <a:noFill/>
+          </a:ln>
+        </p:spPr>
+        <p:txBody>
+          <a:bodyPr wrap="square" anchor="ctr" lIns="45720" rIns="45720">
+            <a:noAutofit/>
+          </a:bodyPr>
+          <a:lstStyle/>
+          <a:p>
+            <a:pPr algn="ctr"/>
+            <a:r>
+              <a:rPr lang="es-ES" sz="2400" b="1" dirty="0">
+                <a:solidFill>
+                  <a:srgbClr val="FFFFFF"/>
+                </a:solidFill>
+              </a:rPr>
+              <a:t>F3</a:t>
+            </a:r>
+          </a:p>
+          <a:p>
+            <a:pPr algn="ctr"/>
+            <a:r>
+              <a:rPr lang="es-ES" sz="1050" dirty="0">
+                <a:solidFill>
+                  <a:srgbClr val="FFFFFF"/>
+                </a:solidFill>
+              </a:rPr>
+              <a:t>Viabilidad y riesgo</a:t>
+            </a:r>
+          </a:p>
+        </p:txBody>
+      </p:sp>
+      <p:sp>
+        <p:nvSpPr>
+          <p:cNvPr id="182" name="Texto 182"/>
+          <p:cNvSpPr txBox="1"/>
+          <p:nvPr/>
+        </p:nvSpPr>
+        <p:spPr>
+          <a:xfrm>
+            <a:off x="5701000" y="3900000"/>
+            <a:ext cx="800000" cy="300000"/>
+          </a:xfrm>
+          <a:prstGeom prst="rect">
+            <a:avLst/>
+          </a:prstGeom>
+          <a:noFill/>
+        </p:spPr>
+        <p:txBody>
+          <a:bodyPr wrap="square" anchor="t" lIns="45720" rIns="45720">
+            <a:noAutofit/>
+          </a:bodyPr>
+          <a:lstStyle/>
+          <a:p>
+            <a:pPr algn="ctr"/>
+            <a:r>
+              <a:rPr lang="es-ES" sz="1200" b="1" dirty="0">
+                <a:solidFill>
+                  <a:srgbClr val="990F3D"/>
+                </a:solidFill>
+              </a:rPr>
+              <a:t>G3</a:t>
+            </a:r>
+          </a:p>
+        </p:txBody>
+      </p:sp>
+      <p:sp>
+        <p:nvSpPr>
+          <p:cNvPr id="183" name="Caja 183"/>
+          <p:cNvSpPr/>
+          <p:nvPr/>
+        </p:nvSpPr>
+        <p:spPr>
+          <a:xfrm>
+            <a:off x="6161000" y="2350000"/>
+            <a:ext cx="1240000" cy="1500000"/>
+          </a:xfrm>
+          <a:prstGeom prst="roundRect">
+            <a:avLst>
+              <a:gd name="adj" fmla="val 6000"/>
+            </a:avLst>
+          </a:prstGeom>
+          <a:solidFill>
+            <a:srgbClr val="0D7680"/>
+          </a:solidFill>
+          <a:ln>
+            <a:noFill/>
+          </a:ln>
+        </p:spPr>
+        <p:txBody>
+          <a:bodyPr wrap="square" anchor="ctr" lIns="45720" rIns="45720">
+            <a:noAutofit/>
+          </a:bodyPr>
+          <a:lstStyle/>
+          <a:p>
+            <a:pPr algn="ctr"/>
+            <a:r>
+              <a:rPr lang="es-ES" sz="2400" b="1" dirty="0">
+                <a:solidFill>
+                  <a:srgbClr val="FFFFFF"/>
+                </a:solidFill>
+              </a:rPr>
+              <a:t>F4</a:t>
+            </a:r>
+          </a:p>
+          <a:p>
+            <a:pPr algn="ctr"/>
+            <a:r>
+              <a:rPr lang="es-ES" sz="1050" dirty="0">
+                <a:solidFill>
+                  <a:srgbClr val="FFFFFF"/>
+                </a:solidFill>
+              </a:rPr>
+              <a:t>Diseño de la solución</a:t>
+            </a:r>
+          </a:p>
+        </p:txBody>
+      </p:sp>
+      <p:sp>
+        <p:nvSpPr>
+          <p:cNvPr id="184" name="Texto 184"/>
+          <p:cNvSpPr txBox="1"/>
+          <p:nvPr/>
+        </p:nvSpPr>
+        <p:spPr>
+          <a:xfrm>
+            <a:off x="7071000" y="3900000"/>
+            <a:ext cx="800000" cy="300000"/>
+          </a:xfrm>
+          <a:prstGeom prst="rect">
+            <a:avLst/>
+          </a:prstGeom>
+          <a:noFill/>
+        </p:spPr>
+        <p:txBody>
+          <a:bodyPr wrap="square" anchor="t" lIns="45720" rIns="45720">
+            <a:noAutofit/>
+          </a:bodyPr>
+          <a:lstStyle/>
+          <a:p>
+            <a:pPr algn="ctr"/>
+            <a:r>
+              <a:rPr lang="es-ES" sz="1200" b="1" dirty="0">
+                <a:solidFill>
+                  <a:srgbClr val="990F3D"/>
+                </a:solidFill>
+              </a:rPr>
+              <a:t>G4</a:t>
+            </a:r>
+          </a:p>
+        </p:txBody>
+      </p:sp>
+      <p:sp>
+        <p:nvSpPr>
+          <p:cNvPr id="185" name="Caja 185"/>
+          <p:cNvSpPr/>
+          <p:nvPr/>
+        </p:nvSpPr>
+        <p:spPr>
+          <a:xfrm>
+            <a:off x="7531000" y="2350000"/>
+            <a:ext cx="1240000" cy="1500000"/>
+          </a:xfrm>
+          <a:prstGeom prst="roundRect">
+            <a:avLst>
+              <a:gd name="adj" fmla="val 6000"/>
+            </a:avLst>
+          </a:prstGeom>
+          <a:solidFill>
+            <a:srgbClr val="0D7680"/>
+          </a:solidFill>
+          <a:ln>
+            <a:noFill/>
+          </a:ln>
+        </p:spPr>
+        <p:txBody>
+          <a:bodyPr wrap="square" anchor="ctr" lIns="45720" rIns="45720">
+            <a:noAutofit/>
+          </a:bodyPr>
+          <a:lstStyle/>
+          <a:p>
+            <a:pPr algn="ctr"/>
+            <a:r>
+              <a:rPr lang="es-ES" sz="2400" b="1" dirty="0">
+                <a:solidFill>
+                  <a:srgbClr val="FFFFFF"/>
+                </a:solidFill>
+              </a:rPr>
+              <a:t>F5</a:t>
+            </a:r>
+          </a:p>
+          <a:p>
+            <a:pPr algn="ctr"/>
+            <a:r>
+              <a:rPr lang="es-ES" sz="1050" dirty="0">
+                <a:solidFill>
+                  <a:srgbClr val="FFFFFF"/>
+                </a:solidFill>
+              </a:rPr>
+              <a:t>Entrega y validación</a:t>
+            </a:r>
+          </a:p>
+        </p:txBody>
+      </p:sp>
+      <p:sp>
+        <p:nvSpPr>
+          <p:cNvPr id="186" name="Texto 186"/>
+          <p:cNvSpPr txBox="1"/>
+          <p:nvPr/>
+        </p:nvSpPr>
+        <p:spPr>
+          <a:xfrm>
+            <a:off x="8441000" y="3900000"/>
+            <a:ext cx="800000" cy="300000"/>
+          </a:xfrm>
+          <a:prstGeom prst="rect">
+            <a:avLst/>
+          </a:prstGeom>
+          <a:noFill/>
+        </p:spPr>
+        <p:txBody>
+          <a:bodyPr wrap="square" anchor="t" lIns="45720" rIns="45720">
+            <a:noAutofit/>
+          </a:bodyPr>
+          <a:lstStyle/>
+          <a:p>
+            <a:pPr algn="ctr"/>
+            <a:r>
+              <a:rPr lang="es-ES" sz="1200" b="1" dirty="0">
+                <a:solidFill>
+                  <a:srgbClr val="990F3D"/>
+                </a:solidFill>
+              </a:rPr>
+              <a:t>G5</a:t>
+            </a:r>
+          </a:p>
+        </p:txBody>
+      </p:sp>
+      <p:sp>
+        <p:nvSpPr>
+          <p:cNvPr id="187" name="Caja 187"/>
+          <p:cNvSpPr/>
+          <p:nvPr/>
+        </p:nvSpPr>
+        <p:spPr>
+          <a:xfrm>
+            <a:off x="8901000" y="2350000"/>
+            <a:ext cx="1240000" cy="1500000"/>
+          </a:xfrm>
+          <a:prstGeom prst="roundRect">
+            <a:avLst>
+              <a:gd name="adj" fmla="val 6000"/>
+            </a:avLst>
+          </a:prstGeom>
+          <a:solidFill>
+            <a:srgbClr val="0D7680"/>
+          </a:solidFill>
+          <a:ln>
+            <a:noFill/>
+          </a:ln>
+        </p:spPr>
+        <p:txBody>
+          <a:bodyPr wrap="square" anchor="ctr" lIns="45720" rIns="45720">
+            <a:noAutofit/>
+          </a:bodyPr>
+          <a:lstStyle/>
+          <a:p>
+            <a:pPr algn="ctr"/>
+            <a:r>
+              <a:rPr lang="es-ES" sz="2400" b="1" dirty="0">
+                <a:solidFill>
+                  <a:srgbClr val="FFFFFF"/>
+                </a:solidFill>
+              </a:rPr>
+              <a:t>F6</a:t>
+            </a:r>
+          </a:p>
+          <a:p>
+            <a:pPr algn="ctr"/>
+            <a:r>
+              <a:rPr lang="es-ES" sz="1050" dirty="0">
+                <a:solidFill>
+                  <a:srgbClr val="FFFFFF"/>
+                </a:solidFill>
+              </a:rPr>
+              <a:t>Operación y gobierno</a:t>
+            </a:r>
+          </a:p>
+        </p:txBody>
+      </p:sp>
+      <p:sp>
+        <p:nvSpPr>
+          <p:cNvPr id="188" name="Texto 188"/>
+          <p:cNvSpPr txBox="1"/>
+          <p:nvPr/>
+        </p:nvSpPr>
+        <p:spPr>
+          <a:xfrm>
+            <a:off x="9811000" y="3900000"/>
+            <a:ext cx="800000" cy="300000"/>
+          </a:xfrm>
+          <a:prstGeom prst="rect">
+            <a:avLst/>
+          </a:prstGeom>
+          <a:noFill/>
+        </p:spPr>
+        <p:txBody>
+          <a:bodyPr wrap="square" anchor="t" lIns="45720" rIns="45720">
+            <a:noAutofit/>
+          </a:bodyPr>
+          <a:lstStyle/>
+          <a:p>
+            <a:pPr algn="ctr"/>
+            <a:r>
+              <a:rPr lang="es-ES" sz="1200" b="1" dirty="0">
+                <a:solidFill>
+                  <a:srgbClr val="990F3D"/>
+                </a:solidFill>
+              </a:rPr>
+              <a:t>R6</a:t>
+            </a:r>
+          </a:p>
+        </p:txBody>
+      </p:sp>
+      <p:sp>
+        <p:nvSpPr>
+          <p:cNvPr id="189" name="Caja 189"/>
+          <p:cNvSpPr/>
+          <p:nvPr/>
+        </p:nvSpPr>
+        <p:spPr>
+          <a:xfrm>
+            <a:off x="10271000" y="2350000"/>
+            <a:ext cx="1240000" cy="1500000"/>
+          </a:xfrm>
+          <a:prstGeom prst="roundRect">
+            <a:avLst>
+              <a:gd name="adj" fmla="val 6000"/>
+            </a:avLst>
+          </a:prstGeom>
+          <a:solidFill>
+            <a:srgbClr val="C9A78D"/>
+          </a:solidFill>
+          <a:ln>
+            <a:noFill/>
+          </a:ln>
+        </p:spPr>
+        <p:txBody>
+          <a:bodyPr wrap="square" anchor="ctr" lIns="45720" rIns="45720">
+            <a:noAutofit/>
+          </a:bodyPr>
+          <a:lstStyle/>
+          <a:p>
+            <a:pPr algn="ctr"/>
+            <a:r>
+              <a:rPr lang="es-ES" sz="2400" b="1" dirty="0">
+                <a:solidFill>
+                  <a:srgbClr val="564D47"/>
+                </a:solidFill>
+              </a:rPr>
+              <a:t>F7</a:t>
+            </a:r>
+          </a:p>
+          <a:p>
+            <a:pPr algn="ctr"/>
+            <a:r>
+              <a:rPr lang="es-ES" sz="1050" dirty="0">
+                <a:solidFill>
+                  <a:srgbClr val="564D47"/>
+                </a:solidFill>
+              </a:rPr>
+              <a:t>Evolución o retirada</a:t>
+            </a:r>
+          </a:p>
+        </p:txBody>
+      </p:sp>
+      <p:sp>
+        <p:nvSpPr>
+          <p:cNvPr id="190" name="Texto 190"/>
+          <p:cNvSpPr txBox="1"/>
+          <p:nvPr/>
+        </p:nvSpPr>
+        <p:spPr>
+          <a:xfrm>
+            <a:off x="11181000" y="3900000"/>
+            <a:ext cx="800000" cy="300000"/>
+          </a:xfrm>
+          <a:prstGeom prst="rect">
+            <a:avLst/>
+          </a:prstGeom>
+          <a:noFill/>
+        </p:spPr>
+        <p:txBody>
+          <a:bodyPr wrap="square" anchor="t" lIns="45720" rIns="45720">
+            <a:noAutofit/>
+          </a:bodyPr>
+          <a:lstStyle/>
+          <a:p>
+            <a:pPr algn="ctr"/>
+            <a:r>
+              <a:rPr lang="es-ES" sz="1200" b="1" dirty="0">
+                <a:solidFill>
+                  <a:srgbClr val="990F3D"/>
+                </a:solidFill>
+              </a:rPr>
+              <a:t>G7</a:t>
+            </a:r>
+          </a:p>
+        </p:txBody>
+      </p:sp>
+      <p:sp>
+        <p:nvSpPr>
+          <p:cNvPr id="191" name="Texto 191"/>
+          <p:cNvSpPr txBox="1"/>
+          <p:nvPr/>
+        </p:nvSpPr>
+        <p:spPr>
+          <a:xfrm>
+            <a:off x="609600" y="4430000"/>
+            <a:ext cx="10972800" cy="600000"/>
+          </a:xfrm>
+          <a:prstGeom prst="rect">
+            <a:avLst/>
+          </a:prstGeom>
+          <a:noFill/>
+        </p:spPr>
+        <p:txBody>
+          <a:bodyPr wrap="square" anchor="t" lIns="45720" rIns="45720">
+            <a:noAutofit/>
+          </a:bodyPr>
+          <a:lstStyle/>
+          <a:p>
+            <a:pPr algn="ctr"/>
+            <a:r>
+              <a:rPr lang="es-ES" sz="2200" b="1" dirty="0">
+                <a:solidFill>
+                  <a:srgbClr val="0D7680"/>
+                </a:solidFill>
+              </a:rPr>
+              <a:t>EN USO · cada R6 confirma que sigue aportando valor bajo control</a:t>
             </a:r>
           </a:p>
         </p:txBody>
@@ -4198,7 +4276,7 @@
     <p:bg>
       <p:bgPr>
         <a:solidFill>
-          <a:srgbClr val="1A1817"/>
+          <a:srgbClr val="FBE2CD"/>
         </a:solidFill>
         <a:effectLst/>
       </p:bgPr>
@@ -4219,13 +4297,13 @@
       </p:grpSpPr>
       <p:sp>
         <p:nvSpPr>
-          <p:cNvPr id="193" name="Marca"/>
+          <p:cNvPr id="197" name="Marca"/>
           <p:cNvSpPr/>
           <p:nvPr/>
         </p:nvSpPr>
         <p:spPr>
           <a:xfrm>
-            <a:off x="609600" y="2400000"/>
+            <a:off x="609600" y="365760"/>
             <a:ext cx="182880" cy="182880"/>
           </a:xfrm>
           <a:prstGeom prst="rect">
@@ -4243,48 +4321,48 @@
       </p:sp>
       <p:sp>
         <p:nvSpPr>
-          <p:cNvPr id="194" name="Texto 194"/>
-          <p:cNvSpPr txBox="1"/>
-          <p:nvPr/>
-        </p:nvSpPr>
-        <p:spPr>
-          <a:xfrm>
-            <a:off x="838200" y="2320000"/>
-            <a:ext cx="9000000" cy="400000"/>
-          </a:xfrm>
-          <a:prstGeom prst="rect">
-            <a:avLst/>
-          </a:prstGeom>
-          <a:noFill/>
-        </p:spPr>
-        <p:txBody>
-          <a:bodyPr wrap="square" anchor="t" lIns="45720" rIns="45720">
+          <p:cNvPr id="198" name="Texto 198"/>
+          <p:cNvSpPr txBox="1"/>
+          <p:nvPr/>
+        </p:nvSpPr>
+        <p:spPr>
+          <a:xfrm>
+            <a:off x="838200" y="300000"/>
+            <a:ext cx="10500000" cy="320000"/>
+          </a:xfrm>
+          <a:prstGeom prst="rect">
+            <a:avLst/>
+          </a:prstGeom>
+          <a:noFill/>
+        </p:spPr>
+        <p:txBody>
+          <a:bodyPr wrap="square" anchor="ctr" lIns="45720" rIns="45720">
             <a:noAutofit/>
           </a:bodyPr>
           <a:lstStyle/>
           <a:p>
             <a:pPr algn="l"/>
             <a:r>
-              <a:rPr lang="es-ES" sz="1600" b="1" dirty="0">
-                <a:solidFill>
-                  <a:srgbClr val="F3CFB2"/>
-                </a:solidFill>
-              </a:rPr>
-              <a:t>PARA EL PARTNER</a:t>
-            </a:r>
-          </a:p>
-        </p:txBody>
-      </p:sp>
-      <p:sp>
-        <p:nvSpPr>
-          <p:cNvPr id="195" name="Texto 195"/>
-          <p:cNvSpPr txBox="1"/>
-          <p:nvPr/>
-        </p:nvSpPr>
-        <p:spPr>
-          <a:xfrm>
-            <a:off x="609600" y="2850000"/>
-            <a:ext cx="10972800" cy="1400000"/>
+              <a:rPr lang="es-ES" sz="1400" b="1" dirty="0">
+                <a:solidFill>
+                  <a:srgbClr val="1A1817"/>
+                </a:solidFill>
+              </a:rPr>
+              <a:t>SEVEN-G · CURSO · PARTNER · INTEGRARLO EN SU METODOLOGÍA</a:t>
+            </a:r>
+          </a:p>
+        </p:txBody>
+      </p:sp>
+      <p:sp>
+        <p:nvSpPr>
+          <p:cNvPr id="199" name="Texto 199"/>
+          <p:cNvSpPr txBox="1"/>
+          <p:nvPr/>
+        </p:nvSpPr>
+        <p:spPr>
+          <a:xfrm>
+            <a:off x="609600" y="700000"/>
+            <a:ext cx="10972800" cy="650000"/>
           </a:xfrm>
           <a:prstGeom prst="rect">
             <a:avLst/>
@@ -4299,12 +4377,12 @@
           <a:p>
             <a:pPr algn="l"/>
             <a:r>
-              <a:rPr lang="es-ES" sz="4000" b="1" dirty="0">
-                <a:solidFill>
-                  <a:srgbClr val="FBE2CD"/>
-                </a:solidFill>
-              </a:rPr>
-              <a:t>Integrar SEVEN-G en su propia metodología o producto</a:t>
+              <a:rPr lang="es-ES" sz="2700" b="1" dirty="0">
+                <a:solidFill>
+                  <a:srgbClr val="990F3D"/>
+                </a:solidFill>
+              </a:rPr>
+              <a:t>Cómo se mide el valor</a:t>
             </a:r>
           </a:p>
         </p:txBody>
@@ -4317,28 +4395,117 @@
         </p:nvSpPr>
         <p:spPr>
           <a:xfrm>
-            <a:off x="609600" y="4400000"/>
-            <a:ext cx="10500000" cy="900000"/>
-          </a:xfrm>
-          <a:prstGeom prst="rect">
-            <a:avLst/>
-          </a:prstGeom>
-          <a:noFill/>
-        </p:spPr>
-        <p:txBody>
-          <a:bodyPr wrap="square" anchor="t" lIns="45720" rIns="45720">
-            <a:noAutofit/>
-          </a:bodyPr>
-          <a:lstStyle/>
-          <a:p>
-            <a:pPr algn="l"/>
-            <a:r>
-              <a:rPr lang="es-ES" sz="1700" dirty="0">
-                <a:solidFill>
-                  <a:srgbClr val="F3CFB2"/>
-                </a:solidFill>
-              </a:rPr>
-              <a:t>Aquí, «partner» es la empresa que incorpora el marco a lo suyo bajo su licencia abierta. No existe programa de socios ni la figura de «partner oficial».</a:t>
+            <a:off x="609600" y="1750000"/>
+            <a:ext cx="10972800" cy="4400000"/>
+          </a:xfrm>
+          <a:prstGeom prst="rect">
+            <a:avLst/>
+          </a:prstGeom>
+          <a:noFill/>
+        </p:spPr>
+        <p:txBody>
+          <a:bodyPr wrap="square" anchor="t" lIns="45720" rIns="45720">
+            <a:noAutofit/>
+          </a:bodyPr>
+          <a:lstStyle/>
+          <a:p>
+            <a:pPr marL="285750" indent="-285750">
+              <a:spcAft>
+                <a:spcPts val="400"/>
+              </a:spcAft>
+              <a:buClr>
+                <a:srgbClr val="990F3D"/>
+              </a:buClr>
+              <a:buFont typeface="Arial"/>
+              <a:buChar char="•"/>
+            </a:pPr>
+            <a:r>
+              <a:rPr lang="es-ES" sz="1800" dirty="0">
+                <a:solidFill>
+                  <a:srgbClr val="2F2B28"/>
+                </a:solidFill>
+              </a:rPr>
+              <a:t>Todo importe lleva fórmula y estado: validado (control de gestión), declarado (el equipo) o estimado.</a:t>
+            </a:r>
+          </a:p>
+          <a:p>
+            <a:pPr marL="285750" indent="-285750">
+              <a:spcAft>
+                <a:spcPts val="400"/>
+              </a:spcAft>
+              <a:buClr>
+                <a:srgbClr val="990F3D"/>
+              </a:buClr>
+              <a:buFont typeface="Arial"/>
+              <a:buChar char="•"/>
+            </a:pPr>
+            <a:r>
+              <a:rPr lang="es-ES" sz="1800" dirty="0">
+                <a:solidFill>
+                  <a:srgbClr val="2F2B28"/>
+                </a:solidFill>
+              </a:rPr>
+              <a:t>Las horas liberadas no son ahorro hasta que se materializan: baja un coste o se reasignan a una actividad con valor.</a:t>
+            </a:r>
+          </a:p>
+          <a:p>
+            <a:pPr marL="285750" indent="-285750">
+              <a:spcAft>
+                <a:spcPts val="400"/>
+              </a:spcAft>
+              <a:buClr>
+                <a:srgbClr val="990F3D"/>
+              </a:buClr>
+              <a:buFont typeface="Arial"/>
+              <a:buChar char="•"/>
+            </a:pPr>
+            <a:r>
+              <a:rPr lang="es-ES" sz="1800" dirty="0">
+                <a:solidFill>
+                  <a:srgbClr val="2F2B28"/>
+                </a:solidFill>
+              </a:rPr>
+              <a:t>El coste es completo: construcción, consumo, operación, supervisión humana y retirada.</a:t>
+            </a:r>
+          </a:p>
+          <a:p>
+            <a:pPr marL="285750" indent="-285750">
+              <a:spcAft>
+                <a:spcPts val="400"/>
+              </a:spcAft>
+              <a:buClr>
+                <a:srgbClr val="990F3D"/>
+              </a:buClr>
+              <a:buFont typeface="Arial"/>
+              <a:buChar char="•"/>
+            </a:pPr>
+            <a:r>
+              <a:rPr lang="es-ES" sz="1800" dirty="0">
+                <a:solidFill>
+                  <a:srgbClr val="2F2B28"/>
+                </a:solidFill>
+              </a:rPr>
+              <a:t>El índice de transformación usa ocho señales de evidencia para separar transformar de solo eficientar.</a:t>
+            </a:r>
+          </a:p>
+          <a:p>
+            <a:pPr marL="285750" indent="-285750">
+              <a:spcAft>
+                <a:spcPts val="400"/>
+              </a:spcAft>
+              <a:buClr>
+                <a:srgbClr val="990F3D"/>
+              </a:buClr>
+              <a:buFont typeface="Arial"/>
+              <a:buChar char="•"/>
+            </a:pPr>
+            <a:r>
+              <a:rPr lang="es-ES" sz="1800" dirty="0">
+                <a:solidFill>
+                  <a:srgbClr val="2F2B28"/>
+                </a:solidFill>
+              </a:rPr>
+              <a:t>Diez reglas de medición (documento 40). Ninguna cifra entra en el neto de la cartera sin su estado.</a:t>
             </a:r>
           </a:p>
         </p:txBody>
@@ -4639,7 +4806,7 @@
     <p:bg>
       <p:bgPr>
         <a:solidFill>
-          <a:srgbClr val="FBE2CD"/>
+          <a:srgbClr val="1A1817"/>
         </a:solidFill>
         <a:effectLst/>
       </p:bgPr>
@@ -4660,13 +4827,13 @@
       </p:grpSpPr>
       <p:sp>
         <p:nvSpPr>
-          <p:cNvPr id="207" name="Marca"/>
+          <p:cNvPr id="200" name="Marca"/>
           <p:cNvSpPr/>
           <p:nvPr/>
         </p:nvSpPr>
         <p:spPr>
           <a:xfrm>
-            <a:off x="609600" y="365760"/>
+            <a:off x="609600" y="2400000"/>
             <a:ext cx="182880" cy="182880"/>
           </a:xfrm>
           <a:prstGeom prst="rect">
@@ -4684,48 +4851,48 @@
       </p:sp>
       <p:sp>
         <p:nvSpPr>
-          <p:cNvPr id="208" name="Texto 208"/>
-          <p:cNvSpPr txBox="1"/>
-          <p:nvPr/>
-        </p:nvSpPr>
-        <p:spPr>
-          <a:xfrm>
-            <a:off x="838200" y="300000"/>
-            <a:ext cx="10500000" cy="320000"/>
-          </a:xfrm>
-          <a:prstGeom prst="rect">
-            <a:avLst/>
-          </a:prstGeom>
-          <a:noFill/>
-        </p:spPr>
-        <p:txBody>
-          <a:bodyPr wrap="square" anchor="ctr" lIns="45720" rIns="45720">
+          <p:cNvPr id="201" name="Texto 201"/>
+          <p:cNvSpPr txBox="1"/>
+          <p:nvPr/>
+        </p:nvSpPr>
+        <p:spPr>
+          <a:xfrm>
+            <a:off x="838200" y="2320000"/>
+            <a:ext cx="9000000" cy="400000"/>
+          </a:xfrm>
+          <a:prstGeom prst="rect">
+            <a:avLst/>
+          </a:prstGeom>
+          <a:noFill/>
+        </p:spPr>
+        <p:txBody>
+          <a:bodyPr wrap="square" anchor="t" lIns="45720" rIns="45720">
             <a:noAutofit/>
           </a:bodyPr>
           <a:lstStyle/>
           <a:p>
             <a:pPr algn="l"/>
             <a:r>
-              <a:rPr lang="es-ES" sz="1400" b="1" dirty="0">
-                <a:solidFill>
-                  <a:srgbClr val="1A1817"/>
-                </a:solidFill>
-              </a:rPr>
-              <a:t>SEVEN-G · CURSO · PARTNER · INTEGRARLO EN SU METODOLOGÍA</a:t>
-            </a:r>
-          </a:p>
-        </p:txBody>
-      </p:sp>
-      <p:sp>
-        <p:nvSpPr>
-          <p:cNvPr id="209" name="Texto 209"/>
-          <p:cNvSpPr txBox="1"/>
-          <p:nvPr/>
-        </p:nvSpPr>
-        <p:spPr>
-          <a:xfrm>
-            <a:off x="609600" y="700000"/>
-            <a:ext cx="10972800" cy="650000"/>
+              <a:rPr lang="es-ES" sz="1600" b="1" dirty="0">
+                <a:solidFill>
+                  <a:srgbClr val="F3CFB2"/>
+                </a:solidFill>
+              </a:rPr>
+              <a:t>PARA EL PARTNER</a:t>
+            </a:r>
+          </a:p>
+        </p:txBody>
+      </p:sp>
+      <p:sp>
+        <p:nvSpPr>
+          <p:cNvPr id="202" name="Texto 202"/>
+          <p:cNvSpPr txBox="1"/>
+          <p:nvPr/>
+        </p:nvSpPr>
+        <p:spPr>
+          <a:xfrm>
+            <a:off x="609600" y="2850000"/>
+            <a:ext cx="10972800" cy="1400000"/>
           </a:xfrm>
           <a:prstGeom prst="rect">
             <a:avLst/>
@@ -4740,26 +4907,26 @@
           <a:p>
             <a:pPr algn="l"/>
             <a:r>
-              <a:rPr lang="es-ES" sz="2700" b="1" dirty="0">
-                <a:solidFill>
-                  <a:srgbClr val="990F3D"/>
-                </a:solidFill>
-              </a:rPr>
-              <a:t>Qué permite la licencia y qué exige</a:t>
-            </a:r>
-          </a:p>
-        </p:txBody>
-      </p:sp>
-      <p:sp>
-        <p:nvSpPr>
-          <p:cNvPr id="210" name="Texto 210"/>
-          <p:cNvSpPr txBox="1"/>
-          <p:nvPr/>
-        </p:nvSpPr>
-        <p:spPr>
-          <a:xfrm>
-            <a:off x="609600" y="1330000"/>
-            <a:ext cx="10972800" cy="450000"/>
+              <a:rPr lang="es-ES" sz="4000" b="1" dirty="0">
+                <a:solidFill>
+                  <a:srgbClr val="FBE2CD"/>
+                </a:solidFill>
+              </a:rPr>
+              <a:t>Integrar SEVEN-G en su propia metodología o producto</a:t>
+            </a:r>
+          </a:p>
+        </p:txBody>
+      </p:sp>
+      <p:sp>
+        <p:nvSpPr>
+          <p:cNvPr id="203" name="Texto 203"/>
+          <p:cNvSpPr txBox="1"/>
+          <p:nvPr/>
+        </p:nvSpPr>
+        <p:spPr>
+          <a:xfrm>
+            <a:off x="609600" y="4400000"/>
+            <a:ext cx="10500000" cy="900000"/>
           </a:xfrm>
           <a:prstGeom prst="rect">
             <a:avLst/>
@@ -4774,394 +4941,12 @@
           <a:p>
             <a:pPr algn="l"/>
             <a:r>
-              <a:rPr lang="es-ES" sz="1500" dirty="0">
-                <a:solidFill>
-                  <a:srgbClr val="564D47"/>
-                </a:solidFill>
-              </a:rPr>
-              <a:t>Contenidos: CC BY 4.0. Código de las herramientas: MIT</a:t>
-            </a:r>
-          </a:p>
-        </p:txBody>
-      </p:sp>
-      <p:sp>
-        <p:nvSpPr>
-          <p:cNvPr id="197" name="Caja 197"/>
-          <p:cNvSpPr/>
-          <p:nvPr/>
-        </p:nvSpPr>
-        <p:spPr>
-          <a:xfrm>
-            <a:off x="609600" y="2050000"/>
-            <a:ext cx="3577600" cy="800000"/>
-          </a:xfrm>
-          <a:prstGeom prst="roundRect">
-            <a:avLst>
-              <a:gd name="adj" fmla="val 6000"/>
-            </a:avLst>
-          </a:prstGeom>
-          <a:solidFill>
-            <a:srgbClr val="0D7680"/>
-          </a:solidFill>
-          <a:ln>
-            <a:noFill/>
-          </a:ln>
-        </p:spPr>
-        <p:txBody>
-          <a:bodyPr wrap="square" anchor="ctr" lIns="45720" rIns="45720">
-            <a:noAutofit/>
-          </a:bodyPr>
-          <a:lstStyle/>
-          <a:p>
-            <a:pPr algn="ctr"/>
-            <a:r>
-              <a:rPr lang="es-ES" sz="1700" b="1" dirty="0">
-                <a:solidFill>
-                  <a:srgbClr val="FFFFFF"/>
-                </a:solidFill>
-              </a:rPr>
-              <a:t>Permite</a:t>
-            </a:r>
-          </a:p>
-        </p:txBody>
-      </p:sp>
-      <p:sp>
-        <p:nvSpPr>
-          <p:cNvPr id="198" name="Caja 198"/>
-          <p:cNvSpPr/>
-          <p:nvPr/>
-        </p:nvSpPr>
-        <p:spPr>
-          <a:xfrm>
-            <a:off x="609600" y="2790000"/>
-            <a:ext cx="3577600" cy="2500000"/>
-          </a:xfrm>
-          <a:prstGeom prst="roundRect">
-            <a:avLst>
-              <a:gd name="adj" fmla="val 6000"/>
-            </a:avLst>
-          </a:prstGeom>
-          <a:solidFill>
-            <a:srgbClr val="F3CFB2"/>
-          </a:solidFill>
-          <a:ln>
-            <a:noFill/>
-          </a:ln>
-        </p:spPr>
-        <p:txBody>
-          <a:bodyPr wrap="square" anchor="ctr" lIns="45720" rIns="45720">
-            <a:noAutofit/>
-          </a:bodyPr>
-          <a:lstStyle/>
-          <a:p>
-            <a:pPr algn="ctr"/>
-            <a:r>
-              <a:rPr lang="es-ES" sz="1000" b="1" dirty="0">
-                <a:solidFill>
-                  <a:srgbClr val="2F2B28"/>
-                </a:solidFill>
-              </a:rPr>
-              <a:t/>
-            </a:r>
-          </a:p>
-        </p:txBody>
-      </p:sp>
-      <p:sp>
-        <p:nvSpPr>
-          <p:cNvPr id="199" name="Texto 199"/>
-          <p:cNvSpPr txBox="1"/>
-          <p:nvPr/>
-        </p:nvSpPr>
-        <p:spPr>
-          <a:xfrm>
-            <a:off x="649600" y="2890000"/>
-            <a:ext cx="3497600" cy="2340000"/>
-          </a:xfrm>
-          <a:prstGeom prst="rect">
-            <a:avLst/>
-          </a:prstGeom>
-          <a:noFill/>
-        </p:spPr>
-        <p:txBody>
-          <a:bodyPr wrap="square" anchor="t" lIns="45720" rIns="45720">
-            <a:noAutofit/>
-          </a:bodyPr>
-          <a:lstStyle/>
-          <a:p>
-            <a:pPr algn="l"/>
-            <a:r>
-              <a:rPr lang="es-ES" sz="1300" dirty="0">
-                <a:solidFill>
-                  <a:srgbClr val="2F2B28"/>
-                </a:solidFill>
-              </a:rPr>
-              <a:t>Copiar, adaptar, traducir, recortar, renombrar, mezclar con su metodología e integrar en productos, también con fines comerciales, sin pedir permiso ni pagar.</a:t>
-            </a:r>
-          </a:p>
-        </p:txBody>
-      </p:sp>
-      <p:sp>
-        <p:nvSpPr>
-          <p:cNvPr id="200" name="Caja 200"/>
-          <p:cNvSpPr/>
-          <p:nvPr/>
-        </p:nvSpPr>
-        <p:spPr>
-          <a:xfrm>
-            <a:off x="4307200" y="2050000"/>
-            <a:ext cx="3577600" cy="800000"/>
-          </a:xfrm>
-          <a:prstGeom prst="roundRect">
-            <a:avLst>
-              <a:gd name="adj" fmla="val 6000"/>
-            </a:avLst>
-          </a:prstGeom>
-          <a:solidFill>
-            <a:srgbClr val="0F5499"/>
-          </a:solidFill>
-          <a:ln>
-            <a:noFill/>
-          </a:ln>
-        </p:spPr>
-        <p:txBody>
-          <a:bodyPr wrap="square" anchor="ctr" lIns="45720" rIns="45720">
-            <a:noAutofit/>
-          </a:bodyPr>
-          <a:lstStyle/>
-          <a:p>
-            <a:pPr algn="ctr"/>
-            <a:r>
-              <a:rPr lang="es-ES" sz="1700" b="1" dirty="0">
-                <a:solidFill>
-                  <a:srgbClr val="FFFFFF"/>
-                </a:solidFill>
-              </a:rPr>
-              <a:t>Exige</a:t>
-            </a:r>
-          </a:p>
-        </p:txBody>
-      </p:sp>
-      <p:sp>
-        <p:nvSpPr>
-          <p:cNvPr id="201" name="Caja 201"/>
-          <p:cNvSpPr/>
-          <p:nvPr/>
-        </p:nvSpPr>
-        <p:spPr>
-          <a:xfrm>
-            <a:off x="4307200" y="2790000"/>
-            <a:ext cx="3577600" cy="2500000"/>
-          </a:xfrm>
-          <a:prstGeom prst="roundRect">
-            <a:avLst>
-              <a:gd name="adj" fmla="val 6000"/>
-            </a:avLst>
-          </a:prstGeom>
-          <a:solidFill>
-            <a:srgbClr val="F3CFB2"/>
-          </a:solidFill>
-          <a:ln>
-            <a:noFill/>
-          </a:ln>
-        </p:spPr>
-        <p:txBody>
-          <a:bodyPr wrap="square" anchor="ctr" lIns="45720" rIns="45720">
-            <a:noAutofit/>
-          </a:bodyPr>
-          <a:lstStyle/>
-          <a:p>
-            <a:pPr algn="ctr"/>
-            <a:r>
-              <a:rPr lang="es-ES" sz="1000" b="1" dirty="0">
-                <a:solidFill>
-                  <a:srgbClr val="2F2B28"/>
-                </a:solidFill>
-              </a:rPr>
-              <a:t/>
-            </a:r>
-          </a:p>
-        </p:txBody>
-      </p:sp>
-      <p:sp>
-        <p:nvSpPr>
-          <p:cNvPr id="202" name="Texto 202"/>
-          <p:cNvSpPr txBox="1"/>
-          <p:nvPr/>
-        </p:nvSpPr>
-        <p:spPr>
-          <a:xfrm>
-            <a:off x="4347200" y="2890000"/>
-            <a:ext cx="3497600" cy="2340000"/>
-          </a:xfrm>
-          <a:prstGeom prst="rect">
-            <a:avLst/>
-          </a:prstGeom>
-          <a:noFill/>
-        </p:spPr>
-        <p:txBody>
-          <a:bodyPr wrap="square" anchor="t" lIns="45720" rIns="45720">
-            <a:noAutofit/>
-          </a:bodyPr>
-          <a:lstStyle/>
-          <a:p>
-            <a:pPr algn="l"/>
-            <a:r>
-              <a:rPr lang="es-ES" sz="1300" dirty="0">
-                <a:solidFill>
-                  <a:srgbClr val="2F2B28"/>
-                </a:solidFill>
-              </a:rPr>
-              <a:t>Reconocer la autoría (Fernando García Varela), enlazar la licencia, indicar los cambios y conservar el aviso legal. En el código, mantener el aviso de derechos de autor y la licencia MIT.</a:t>
-            </a:r>
-          </a:p>
-        </p:txBody>
-      </p:sp>
-      <p:sp>
-        <p:nvSpPr>
-          <p:cNvPr id="203" name="Caja 203"/>
-          <p:cNvSpPr/>
-          <p:nvPr/>
-        </p:nvSpPr>
-        <p:spPr>
-          <a:xfrm>
-            <a:off x="8004800" y="2050000"/>
-            <a:ext cx="3577600" cy="800000"/>
-          </a:xfrm>
-          <a:prstGeom prst="roundRect">
-            <a:avLst>
-              <a:gd name="adj" fmla="val 6000"/>
-            </a:avLst>
-          </a:prstGeom>
-          <a:solidFill>
-            <a:srgbClr val="990F3D"/>
-          </a:solidFill>
-          <a:ln>
-            <a:noFill/>
-          </a:ln>
-        </p:spPr>
-        <p:txBody>
-          <a:bodyPr wrap="square" anchor="ctr" lIns="45720" rIns="45720">
-            <a:noAutofit/>
-          </a:bodyPr>
-          <a:lstStyle/>
-          <a:p>
-            <a:pPr algn="ctr"/>
-            <a:r>
-              <a:rPr lang="es-ES" sz="1700" b="1" dirty="0">
-                <a:solidFill>
-                  <a:srgbClr val="FFFFFF"/>
-                </a:solidFill>
-              </a:rPr>
-              <a:t>No cede</a:t>
-            </a:r>
-          </a:p>
-        </p:txBody>
-      </p:sp>
-      <p:sp>
-        <p:nvSpPr>
-          <p:cNvPr id="204" name="Caja 204"/>
-          <p:cNvSpPr/>
-          <p:nvPr/>
-        </p:nvSpPr>
-        <p:spPr>
-          <a:xfrm>
-            <a:off x="8004800" y="2790000"/>
-            <a:ext cx="3577600" cy="2500000"/>
-          </a:xfrm>
-          <a:prstGeom prst="roundRect">
-            <a:avLst>
-              <a:gd name="adj" fmla="val 6000"/>
-            </a:avLst>
-          </a:prstGeom>
-          <a:solidFill>
-            <a:srgbClr val="F3CFB2"/>
-          </a:solidFill>
-          <a:ln>
-            <a:noFill/>
-          </a:ln>
-        </p:spPr>
-        <p:txBody>
-          <a:bodyPr wrap="square" anchor="ctr" lIns="45720" rIns="45720">
-            <a:noAutofit/>
-          </a:bodyPr>
-          <a:lstStyle/>
-          <a:p>
-            <a:pPr algn="ctr"/>
-            <a:r>
-              <a:rPr lang="es-ES" sz="1000" b="1" dirty="0">
-                <a:solidFill>
-                  <a:srgbClr val="2F2B28"/>
-                </a:solidFill>
-              </a:rPr>
-              <a:t/>
-            </a:r>
-          </a:p>
-        </p:txBody>
-      </p:sp>
-      <p:sp>
-        <p:nvSpPr>
-          <p:cNvPr id="205" name="Texto 205"/>
-          <p:cNvSpPr txBox="1"/>
-          <p:nvPr/>
-        </p:nvSpPr>
-        <p:spPr>
-          <a:xfrm>
-            <a:off x="8044800" y="2890000"/>
-            <a:ext cx="3497600" cy="2340000"/>
-          </a:xfrm>
-          <a:prstGeom prst="rect">
-            <a:avLst/>
-          </a:prstGeom>
-          <a:noFill/>
-        </p:spPr>
-        <p:txBody>
-          <a:bodyPr wrap="square" anchor="t" lIns="45720" rIns="45720">
-            <a:noAutofit/>
-          </a:bodyPr>
-          <a:lstStyle/>
-          <a:p>
-            <a:pPr algn="l"/>
-            <a:r>
-              <a:rPr lang="es-ES" sz="1300" dirty="0">
-                <a:solidFill>
-                  <a:srgbClr val="2F2B28"/>
-                </a:solidFill>
-              </a:rPr>
-              <a:t>La marca: SEVEN-G es una marca registrada. Puede nombrarla para decir con exactitud qué ha usado; no para sugerir aval, acreditación o certificación.</a:t>
-            </a:r>
-          </a:p>
-        </p:txBody>
-      </p:sp>
-      <p:sp>
-        <p:nvSpPr>
-          <p:cNvPr id="206" name="Texto 206"/>
-          <p:cNvSpPr txBox="1"/>
-          <p:nvPr/>
-        </p:nvSpPr>
-        <p:spPr>
-          <a:xfrm>
-            <a:off x="609600" y="6150000"/>
-            <a:ext cx="10972800" cy="500000"/>
-          </a:xfrm>
-          <a:prstGeom prst="rect">
-            <a:avLst/>
-          </a:prstGeom>
-          <a:noFill/>
-        </p:spPr>
-        <p:txBody>
-          <a:bodyPr wrap="square" anchor="t" lIns="45720" rIns="45720">
-            <a:noAutofit/>
-          </a:bodyPr>
-          <a:lstStyle/>
-          <a:p>
-            <a:pPr algn="l"/>
-            <a:r>
-              <a:rPr lang="es-ES" sz="1400" b="1" dirty="0">
-                <a:solidFill>
-                  <a:srgbClr val="0F5499"/>
-                </a:solidFill>
-              </a:rPr>
-              <a:t>Las versiones publicadas no se revocan: lo que integre hoy podrá seguir usándolo (documento 93).</a:t>
+              <a:rPr lang="es-ES" sz="1700" dirty="0">
+                <a:solidFill>
+                  <a:srgbClr val="F3CFB2"/>
+                </a:solidFill>
+              </a:rPr>
+              <a:t>Aquí, «partner» es la empresa que incorpora el marco a lo suyo bajo su licencia abierta. No existe programa de socios ni la figura de «partner oficial».</a:t>
             </a:r>
           </a:p>
         </p:txBody>
@@ -5201,7 +4986,7 @@
       </p:grpSpPr>
       <p:sp>
         <p:nvSpPr>
-          <p:cNvPr id="224" name="Marca"/>
+          <p:cNvPr id="214" name="Marca"/>
           <p:cNvSpPr/>
           <p:nvPr/>
         </p:nvSpPr>
@@ -5225,7 +5010,7 @@
       </p:sp>
       <p:sp>
         <p:nvSpPr>
-          <p:cNvPr id="225" name="Texto 225"/>
+          <p:cNvPr id="215" name="Texto 215"/>
           <p:cNvSpPr txBox="1"/>
           <p:nvPr/>
         </p:nvSpPr>
@@ -5259,7 +5044,7 @@
       </p:sp>
       <p:sp>
         <p:nvSpPr>
-          <p:cNvPr id="226" name="Texto 226"/>
+          <p:cNvPr id="216" name="Texto 216"/>
           <p:cNvSpPr txBox="1"/>
           <p:nvPr/>
         </p:nvSpPr>
@@ -5286,14 +5071,14 @@
                   <a:srgbClr val="990F3D"/>
                 </a:solidFill>
               </a:rPr>
-              <a:t>Adopción modular: cuatro componentes</a:t>
-            </a:r>
-          </a:p>
-        </p:txBody>
-      </p:sp>
-      <p:sp>
-        <p:nvSpPr>
-          <p:cNvPr id="227" name="Texto 227"/>
+              <a:t>Qué permite la licencia y qué exige</a:t>
+            </a:r>
+          </a:p>
+        </p:txBody>
+      </p:sp>
+      <p:sp>
+        <p:nvSpPr>
+          <p:cNvPr id="217" name="Texto 217"/>
           <p:cNvSpPr txBox="1"/>
           <p:nvPr/>
         </p:nvSpPr>
@@ -5320,21 +5105,21 @@
                   <a:srgbClr val="564D47"/>
                 </a:solidFill>
               </a:rPr>
-              <a:t>Puede integrar el marco entero o solo las piezas que le faltan a su metodología</a:t>
-            </a:r>
-          </a:p>
-        </p:txBody>
-      </p:sp>
-      <p:sp>
-        <p:nvSpPr>
-          <p:cNvPr id="211" name="Caja 211"/>
+              <a:t>Contenidos: CC BY 4.0. Código de las herramientas: MIT</a:t>
+            </a:r>
+          </a:p>
+        </p:txBody>
+      </p:sp>
+      <p:sp>
+        <p:nvSpPr>
+          <p:cNvPr id="204" name="Caja 204"/>
           <p:cNvSpPr/>
           <p:nvPr/>
         </p:nvSpPr>
         <p:spPr>
           <a:xfrm>
             <a:off x="609600" y="2050000"/>
-            <a:ext cx="2653200" cy="800000"/>
+            <a:ext cx="3577600" cy="800000"/>
           </a:xfrm>
           <a:prstGeom prst="roundRect">
             <a:avLst>
@@ -5342,7 +5127,7 @@
             </a:avLst>
           </a:prstGeom>
           <a:solidFill>
-            <a:srgbClr val="593380"/>
+            <a:srgbClr val="0D7680"/>
           </a:solidFill>
           <a:ln>
             <a:noFill/>
@@ -5361,21 +5146,21 @@
                   <a:srgbClr val="FFFFFF"/>
                 </a:solidFill>
               </a:rPr>
-              <a:t>A · Mapa de impacto</a:t>
-            </a:r>
-          </a:p>
-        </p:txBody>
-      </p:sp>
-      <p:sp>
-        <p:nvSpPr>
-          <p:cNvPr id="212" name="Caja 212"/>
+              <a:t>Permite</a:t>
+            </a:r>
+          </a:p>
+        </p:txBody>
+      </p:sp>
+      <p:sp>
+        <p:nvSpPr>
+          <p:cNvPr id="205" name="Caja 205"/>
           <p:cNvSpPr/>
           <p:nvPr/>
         </p:nvSpPr>
         <p:spPr>
           <a:xfrm>
             <a:off x="609600" y="2790000"/>
-            <a:ext cx="2653200" cy="2500000"/>
+            <a:ext cx="3577600" cy="2500000"/>
           </a:xfrm>
           <a:prstGeom prst="roundRect">
             <a:avLst>
@@ -5409,14 +5194,14 @@
       </p:sp>
       <p:sp>
         <p:nvSpPr>
-          <p:cNvPr id="213" name="Texto 213"/>
+          <p:cNvPr id="206" name="Texto 206"/>
           <p:cNvSpPr txBox="1"/>
           <p:nvPr/>
         </p:nvSpPr>
         <p:spPr>
           <a:xfrm>
             <a:off x="649600" y="2890000"/>
-            <a:ext cx="2573200" cy="2340000"/>
+            <a:ext cx="3497600" cy="2340000"/>
           </a:xfrm>
           <a:prstGeom prst="rect">
             <a:avLst/>
@@ -5436,21 +5221,21 @@
                   <a:srgbClr val="2F2B28"/>
                 </a:solidFill>
               </a:rPr>
-              <a:t>Nueve esferas por tres niveles de ambición (Optimizar, Aumentar, Transformar). Sirve para priorizar y para hablar con el consejo sin tecnología.</a:t>
-            </a:r>
-          </a:p>
-        </p:txBody>
-      </p:sp>
-      <p:sp>
-        <p:nvSpPr>
-          <p:cNvPr id="214" name="Caja 214"/>
+              <a:t>Copiar, adaptar, traducir, recortar, renombrar, mezclar con su metodología e integrar en productos, también con fines comerciales, sin pedir permiso ni pagar.</a:t>
+            </a:r>
+          </a:p>
+        </p:txBody>
+      </p:sp>
+      <p:sp>
+        <p:nvSpPr>
+          <p:cNvPr id="207" name="Caja 207"/>
           <p:cNvSpPr/>
           <p:nvPr/>
         </p:nvSpPr>
         <p:spPr>
           <a:xfrm>
-            <a:off x="3382800" y="2050000"/>
-            <a:ext cx="2653200" cy="800000"/>
+            <a:off x="4307200" y="2050000"/>
+            <a:ext cx="3577600" cy="800000"/>
           </a:xfrm>
           <a:prstGeom prst="roundRect">
             <a:avLst>
@@ -5477,21 +5262,21 @@
                   <a:srgbClr val="FFFFFF"/>
                 </a:solidFill>
               </a:rPr>
-              <a:t>B · Gobierno</a:t>
-            </a:r>
-          </a:p>
-        </p:txBody>
-      </p:sp>
-      <p:sp>
-        <p:nvSpPr>
-          <p:cNvPr id="215" name="Caja 215"/>
+              <a:t>Exige</a:t>
+            </a:r>
+          </a:p>
+        </p:txBody>
+      </p:sp>
+      <p:sp>
+        <p:nvSpPr>
+          <p:cNvPr id="208" name="Caja 208"/>
           <p:cNvSpPr/>
           <p:nvPr/>
         </p:nvSpPr>
         <p:spPr>
           <a:xfrm>
-            <a:off x="3382800" y="2790000"/>
-            <a:ext cx="2653200" cy="2500000"/>
+            <a:off x="4307200" y="2790000"/>
+            <a:ext cx="3577600" cy="2500000"/>
           </a:xfrm>
           <a:prstGeom prst="roundRect">
             <a:avLst>
@@ -5525,14 +5310,14 @@
       </p:sp>
       <p:sp>
         <p:nvSpPr>
-          <p:cNvPr id="216" name="Texto 216"/>
-          <p:cNvSpPr txBox="1"/>
-          <p:nvPr/>
-        </p:nvSpPr>
-        <p:spPr>
-          <a:xfrm>
-            <a:off x="3422800" y="2890000"/>
-            <a:ext cx="2573200" cy="2340000"/>
+          <p:cNvPr id="209" name="Texto 209"/>
+          <p:cNvSpPr txBox="1"/>
+          <p:nvPr/>
+        </p:nvSpPr>
+        <p:spPr>
+          <a:xfrm>
+            <a:off x="4347200" y="2890000"/>
+            <a:ext cx="3497600" cy="2340000"/>
           </a:xfrm>
           <a:prstGeom prst="rect">
             <a:avLst/>
@@ -5552,21 +5337,21 @@
                   <a:srgbClr val="2F2B28"/>
                 </a:solidFill>
               </a:rPr>
-              <a:t>Fases, puertas con validación dual, separación de funciones, riesgos, regulación y no conformidades.</a:t>
-            </a:r>
-          </a:p>
-        </p:txBody>
-      </p:sp>
-      <p:sp>
-        <p:nvSpPr>
-          <p:cNvPr id="217" name="Caja 217"/>
+              <a:t>Reconocer la autoría (Fernando García Varela), enlazar la licencia, indicar los cambios y conservar el aviso legal. En el código, mantener el aviso de derechos de autor y la licencia MIT.</a:t>
+            </a:r>
+          </a:p>
+        </p:txBody>
+      </p:sp>
+      <p:sp>
+        <p:nvSpPr>
+          <p:cNvPr id="210" name="Caja 210"/>
           <p:cNvSpPr/>
           <p:nvPr/>
         </p:nvSpPr>
         <p:spPr>
           <a:xfrm>
-            <a:off x="6156000" y="2050000"/>
-            <a:ext cx="2653200" cy="800000"/>
+            <a:off x="8004800" y="2050000"/>
+            <a:ext cx="3577600" cy="800000"/>
           </a:xfrm>
           <a:prstGeom prst="roundRect">
             <a:avLst>
@@ -5574,7 +5359,7 @@
             </a:avLst>
           </a:prstGeom>
           <a:solidFill>
-            <a:srgbClr val="0D7680"/>
+            <a:srgbClr val="990F3D"/>
           </a:solidFill>
           <a:ln>
             <a:noFill/>
@@ -5593,21 +5378,21 @@
                   <a:srgbClr val="FFFFFF"/>
                 </a:solidFill>
               </a:rPr>
-              <a:t>C · Medición</a:t>
-            </a:r>
-          </a:p>
-        </p:txBody>
-      </p:sp>
-      <p:sp>
-        <p:nvSpPr>
-          <p:cNvPr id="218" name="Caja 218"/>
+              <a:t>No cede</a:t>
+            </a:r>
+          </a:p>
+        </p:txBody>
+      </p:sp>
+      <p:sp>
+        <p:nvSpPr>
+          <p:cNvPr id="211" name="Caja 211"/>
           <p:cNvSpPr/>
           <p:nvPr/>
         </p:nvSpPr>
         <p:spPr>
           <a:xfrm>
-            <a:off x="6156000" y="2790000"/>
-            <a:ext cx="2653200" cy="2500000"/>
+            <a:off x="8004800" y="2790000"/>
+            <a:ext cx="3577600" cy="2500000"/>
           </a:xfrm>
           <a:prstGeom prst="roundRect">
             <a:avLst>
@@ -5641,14 +5426,14 @@
       </p:sp>
       <p:sp>
         <p:nvSpPr>
-          <p:cNvPr id="219" name="Texto 219"/>
-          <p:cNvSpPr txBox="1"/>
-          <p:nvPr/>
-        </p:nvSpPr>
-        <p:spPr>
-          <a:xfrm>
-            <a:off x="6196000" y="2890000"/>
-            <a:ext cx="2573200" cy="2340000"/>
+          <p:cNvPr id="212" name="Texto 212"/>
+          <p:cNvSpPr txBox="1"/>
+          <p:nvPr/>
+        </p:nvSpPr>
+        <p:spPr>
+          <a:xfrm>
+            <a:off x="8044800" y="2890000"/>
+            <a:ext cx="3497600" cy="2340000"/>
           </a:xfrm>
           <a:prstGeom prst="rect">
             <a:avLst/>
@@ -5668,130 +5453,14 @@
                   <a:srgbClr val="2F2B28"/>
                 </a:solidFill>
               </a:rPr>
-              <a:t>Diez reglas de medición, estados del importe, costes completos e índice de transformación.</a:t>
-            </a:r>
-          </a:p>
-        </p:txBody>
-      </p:sp>
-      <p:sp>
-        <p:nvSpPr>
-          <p:cNvPr id="220" name="Caja 220"/>
-          <p:cNvSpPr/>
-          <p:nvPr/>
-        </p:nvSpPr>
-        <p:spPr>
-          <a:xfrm>
-            <a:off x="8929200" y="2050000"/>
-            <a:ext cx="2653200" cy="800000"/>
-          </a:xfrm>
-          <a:prstGeom prst="roundRect">
-            <a:avLst>
-              <a:gd name="adj" fmla="val 6000"/>
-            </a:avLst>
-          </a:prstGeom>
-          <a:solidFill>
-            <a:srgbClr val="A5822A"/>
-          </a:solidFill>
-          <a:ln>
-            <a:noFill/>
-          </a:ln>
-        </p:spPr>
-        <p:txBody>
-          <a:bodyPr wrap="square" anchor="ctr" lIns="45720" rIns="45720">
-            <a:noAutofit/>
-          </a:bodyPr>
-          <a:lstStyle/>
-          <a:p>
-            <a:pPr algn="ctr"/>
-            <a:r>
-              <a:rPr lang="es-ES" sz="1700" b="1" dirty="0">
-                <a:solidFill>
-                  <a:srgbClr val="FFFFFF"/>
-                </a:solidFill>
-              </a:rPr>
-              <a:t>D · Herramientas</a:t>
-            </a:r>
-          </a:p>
-        </p:txBody>
-      </p:sp>
-      <p:sp>
-        <p:nvSpPr>
-          <p:cNvPr id="221" name="Caja 221"/>
-          <p:cNvSpPr/>
-          <p:nvPr/>
-        </p:nvSpPr>
-        <p:spPr>
-          <a:xfrm>
-            <a:off x="8929200" y="2790000"/>
-            <a:ext cx="2653200" cy="2500000"/>
-          </a:xfrm>
-          <a:prstGeom prst="roundRect">
-            <a:avLst>
-              <a:gd name="adj" fmla="val 6000"/>
-            </a:avLst>
-          </a:prstGeom>
-          <a:solidFill>
-            <a:srgbClr val="F3CFB2"/>
-          </a:solidFill>
-          <a:ln>
-            <a:noFill/>
-          </a:ln>
-        </p:spPr>
-        <p:txBody>
-          <a:bodyPr wrap="square" anchor="ctr" lIns="45720" rIns="45720">
-            <a:noAutofit/>
-          </a:bodyPr>
-          <a:lstStyle/>
-          <a:p>
-            <a:pPr algn="ctr"/>
-            <a:r>
-              <a:rPr lang="es-ES" sz="1000" b="1" dirty="0">
-                <a:solidFill>
-                  <a:srgbClr val="2F2B28"/>
-                </a:solidFill>
-              </a:rPr>
-              <a:t/>
-            </a:r>
-          </a:p>
-        </p:txBody>
-      </p:sp>
-      <p:sp>
-        <p:nvSpPr>
-          <p:cNvPr id="222" name="Texto 222"/>
-          <p:cNvSpPr txBox="1"/>
-          <p:nvPr/>
-        </p:nvSpPr>
-        <p:spPr>
-          <a:xfrm>
-            <a:off x="8969200" y="2890000"/>
-            <a:ext cx="2573200" cy="2340000"/>
-          </a:xfrm>
-          <a:prstGeom prst="rect">
-            <a:avLst/>
-          </a:prstGeom>
-          <a:noFill/>
-        </p:spPr>
-        <p:txBody>
-          <a:bodyPr wrap="square" anchor="t" lIns="45720" rIns="45720">
-            <a:noAutofit/>
-          </a:bodyPr>
-          <a:lstStyle/>
-          <a:p>
-            <a:pPr algn="l"/>
-            <a:r>
-              <a:rPr lang="es-ES" sz="1300" dirty="0">
-                <a:solidFill>
-                  <a:srgbClr val="2F2B28"/>
-                </a:solidFill>
-              </a:rPr>
-              <a:t>Registro T01, calculadoras, diagnóstico de madurez y panel del consejo: HTML sin servidor, datos en JSON, código MIT.</a:t>
-            </a:r>
-          </a:p>
-        </p:txBody>
-      </p:sp>
-      <p:sp>
-        <p:nvSpPr>
-          <p:cNvPr id="223" name="Texto 223"/>
+              <a:t>La marca: SEVEN-G es una marca registrada. Puede nombrarla para decir con exactitud qué ha usado; no para sugerir aval, acreditación o certificación.</a:t>
+            </a:r>
+          </a:p>
+        </p:txBody>
+      </p:sp>
+      <p:sp>
+        <p:nvSpPr>
+          <p:cNvPr id="213" name="Texto 213"/>
           <p:cNvSpPr txBox="1"/>
           <p:nvPr/>
         </p:nvSpPr>
@@ -5818,7 +5487,7 @@
                   <a:srgbClr val="0F5499"/>
                 </a:solidFill>
               </a:rPr>
-              <a:t>Si lo llama «SEVEN-G», respete sus seis reglas esenciales; si no, diga «adaptado de» e indique qué cambia.</a:t>
+              <a:t>Las versiones publicadas no se revocan: lo que integre hoy podrá seguir usándolo (documento 93).</a:t>
             </a:r>
           </a:p>
         </p:txBody>
@@ -5858,7 +5527,7 @@
       </p:grpSpPr>
       <p:sp>
         <p:nvSpPr>
-          <p:cNvPr id="229" name="Marca"/>
+          <p:cNvPr id="231" name="Marca"/>
           <p:cNvSpPr/>
           <p:nvPr/>
         </p:nvSpPr>
@@ -5882,7 +5551,7 @@
       </p:sp>
       <p:sp>
         <p:nvSpPr>
-          <p:cNvPr id="230" name="Texto 230"/>
+          <p:cNvPr id="232" name="Texto 232"/>
           <p:cNvSpPr txBox="1"/>
           <p:nvPr/>
         </p:nvSpPr>
@@ -5916,7 +5585,7 @@
       </p:sp>
       <p:sp>
         <p:nvSpPr>
-          <p:cNvPr id="231" name="Texto 231"/>
+          <p:cNvPr id="233" name="Texto 233"/>
           <p:cNvSpPr txBox="1"/>
           <p:nvPr/>
         </p:nvSpPr>
@@ -5943,130 +5612,539 @@
                   <a:srgbClr val="990F3D"/>
                 </a:solidFill>
               </a:rPr>
-              <a:t>Cómo encajarlo en su metodología</a:t>
-            </a:r>
-          </a:p>
-        </p:txBody>
-      </p:sp>
-      <p:sp>
-        <p:nvSpPr>
-          <p:cNvPr id="228" name="Texto 228"/>
-          <p:cNvSpPr txBox="1"/>
-          <p:nvPr/>
-        </p:nvSpPr>
-        <p:spPr>
-          <a:xfrm>
-            <a:off x="609600" y="1750000"/>
-            <a:ext cx="10972800" cy="4400000"/>
-          </a:xfrm>
-          <a:prstGeom prst="rect">
-            <a:avLst/>
-          </a:prstGeom>
-          <a:noFill/>
-        </p:spPr>
-        <p:txBody>
-          <a:bodyPr wrap="square" anchor="t" lIns="45720" rIns="45720">
-            <a:noAutofit/>
-          </a:bodyPr>
-          <a:lstStyle/>
-          <a:p>
-            <a:pPr marL="285750" indent="-285750">
-              <a:spcAft>
-                <a:spcPts val="400"/>
-              </a:spcAft>
-              <a:buClr>
-                <a:srgbClr val="990F3D"/>
-              </a:buClr>
-              <a:buFont typeface="Arial"/>
-              <a:buChar char="•"/>
-            </a:pPr>
-            <a:r>
-              <a:rPr lang="es-ES" sz="1700" dirty="0">
-                <a:solidFill>
-                  <a:srgbClr val="2F2B28"/>
-                </a:solidFill>
-              </a:rPr>
-              <a:t>Haga una tabla de correspondencias: sus etapas frente a las fases 0 a 7, sus comités frente a los órganos, sus entregables frente a las plantillas P.</a:t>
-            </a:r>
-          </a:p>
-          <a:p>
-            <a:pPr marL="285750" indent="-285750">
-              <a:spcAft>
-                <a:spcPts val="400"/>
-              </a:spcAft>
-              <a:buClr>
-                <a:srgbClr val="990F3D"/>
-              </a:buClr>
-              <a:buFont typeface="Arial"/>
-              <a:buChar char="•"/>
-            </a:pPr>
-            <a:r>
-              <a:rPr lang="es-ES" sz="1700" dirty="0">
-                <a:solidFill>
-                  <a:srgbClr val="2F2B28"/>
-                </a:solidFill>
-              </a:rPr>
-              <a:t>Conserve los códigos (G0–G7, P01–P74, T01–T22) o publique su equivalencia: sus clientes podrán contrastar con la fuente.</a:t>
-            </a:r>
-          </a:p>
-          <a:p>
-            <a:pPr marL="285750" indent="-285750">
-              <a:spcAft>
-                <a:spcPts val="400"/>
-              </a:spcAft>
-              <a:buClr>
-                <a:srgbClr val="990F3D"/>
-              </a:buClr>
-              <a:buFont typeface="Arial"/>
-              <a:buChar char="•"/>
-            </a:pPr>
-            <a:r>
-              <a:rPr lang="es-ES" sz="1700" dirty="0">
-                <a:solidFill>
-                  <a:srgbClr val="2F2B28"/>
-                </a:solidFill>
-              </a:rPr>
-              <a:t>Puede cambiar nombres, umbrales, plazos y pesos. No cambie lo que protege al cliente: separación de funciones, evidencia antes de decidir y estado de cada importe.</a:t>
-            </a:r>
-          </a:p>
-          <a:p>
-            <a:pPr marL="285750" indent="-285750">
-              <a:spcAft>
-                <a:spcPts val="400"/>
-              </a:spcAft>
-              <a:buClr>
-                <a:srgbClr val="990F3D"/>
-              </a:buClr>
-              <a:buFont typeface="Arial"/>
-              <a:buChar char="•"/>
-            </a:pPr>
-            <a:r>
-              <a:rPr lang="es-ES" sz="1700" dirty="0">
-                <a:solidFill>
-                  <a:srgbClr val="2F2B28"/>
-                </a:solidFill>
-              </a:rPr>
-              <a:t>Indique la versión de partida y sus cambios; cuando el marco evolucione, decida si actualiza y dígalo.</a:t>
-            </a:r>
-          </a:p>
-          <a:p>
-            <a:pPr marL="285750" indent="-285750">
-              <a:spcAft>
-                <a:spcPts val="400"/>
-              </a:spcAft>
-              <a:buClr>
-                <a:srgbClr val="990F3D"/>
-              </a:buClr>
-              <a:buFont typeface="Arial"/>
-              <a:buChar char="•"/>
-            </a:pPr>
-            <a:r>
-              <a:rPr lang="es-ES" sz="1700" dirty="0">
-                <a:solidFill>
-                  <a:srgbClr val="2F2B28"/>
-                </a:solidFill>
-              </a:rPr>
-              <a:t>En una obra que mezcla marcos debe quedar claro qué procede de SEVEN-G. Sus aportaciones puede licenciarlas como quiera, sin impedir la licencia del original.</a:t>
+              <a:t>Adopción modular: cuatro componentes</a:t>
+            </a:r>
+          </a:p>
+        </p:txBody>
+      </p:sp>
+      <p:sp>
+        <p:nvSpPr>
+          <p:cNvPr id="234" name="Texto 234"/>
+          <p:cNvSpPr txBox="1"/>
+          <p:nvPr/>
+        </p:nvSpPr>
+        <p:spPr>
+          <a:xfrm>
+            <a:off x="609600" y="1330000"/>
+            <a:ext cx="10972800" cy="450000"/>
+          </a:xfrm>
+          <a:prstGeom prst="rect">
+            <a:avLst/>
+          </a:prstGeom>
+          <a:noFill/>
+        </p:spPr>
+        <p:txBody>
+          <a:bodyPr wrap="square" anchor="t" lIns="45720" rIns="45720">
+            <a:noAutofit/>
+          </a:bodyPr>
+          <a:lstStyle/>
+          <a:p>
+            <a:pPr algn="l"/>
+            <a:r>
+              <a:rPr lang="es-ES" sz="1500" dirty="0">
+                <a:solidFill>
+                  <a:srgbClr val="564D47"/>
+                </a:solidFill>
+              </a:rPr>
+              <a:t>Puede integrar el marco entero o solo las piezas que le faltan a su metodología</a:t>
+            </a:r>
+          </a:p>
+        </p:txBody>
+      </p:sp>
+      <p:sp>
+        <p:nvSpPr>
+          <p:cNvPr id="218" name="Caja 218"/>
+          <p:cNvSpPr/>
+          <p:nvPr/>
+        </p:nvSpPr>
+        <p:spPr>
+          <a:xfrm>
+            <a:off x="609600" y="2050000"/>
+            <a:ext cx="2653200" cy="800000"/>
+          </a:xfrm>
+          <a:prstGeom prst="roundRect">
+            <a:avLst>
+              <a:gd name="adj" fmla="val 6000"/>
+            </a:avLst>
+          </a:prstGeom>
+          <a:solidFill>
+            <a:srgbClr val="593380"/>
+          </a:solidFill>
+          <a:ln>
+            <a:noFill/>
+          </a:ln>
+        </p:spPr>
+        <p:txBody>
+          <a:bodyPr wrap="square" anchor="ctr" lIns="45720" rIns="45720">
+            <a:noAutofit/>
+          </a:bodyPr>
+          <a:lstStyle/>
+          <a:p>
+            <a:pPr algn="ctr"/>
+            <a:r>
+              <a:rPr lang="es-ES" sz="1700" b="1" dirty="0">
+                <a:solidFill>
+                  <a:srgbClr val="FFFFFF"/>
+                </a:solidFill>
+              </a:rPr>
+              <a:t>A · Mapa de impacto</a:t>
+            </a:r>
+          </a:p>
+        </p:txBody>
+      </p:sp>
+      <p:sp>
+        <p:nvSpPr>
+          <p:cNvPr id="219" name="Caja 219"/>
+          <p:cNvSpPr/>
+          <p:nvPr/>
+        </p:nvSpPr>
+        <p:spPr>
+          <a:xfrm>
+            <a:off x="609600" y="2790000"/>
+            <a:ext cx="2653200" cy="2500000"/>
+          </a:xfrm>
+          <a:prstGeom prst="roundRect">
+            <a:avLst>
+              <a:gd name="adj" fmla="val 6000"/>
+            </a:avLst>
+          </a:prstGeom>
+          <a:solidFill>
+            <a:srgbClr val="F3CFB2"/>
+          </a:solidFill>
+          <a:ln>
+            <a:noFill/>
+          </a:ln>
+        </p:spPr>
+        <p:txBody>
+          <a:bodyPr wrap="square" anchor="ctr" lIns="45720" rIns="45720">
+            <a:noAutofit/>
+          </a:bodyPr>
+          <a:lstStyle/>
+          <a:p>
+            <a:pPr algn="ctr"/>
+            <a:r>
+              <a:rPr lang="es-ES" sz="1000" b="1" dirty="0">
+                <a:solidFill>
+                  <a:srgbClr val="2F2B28"/>
+                </a:solidFill>
+              </a:rPr>
+              <a:t/>
+            </a:r>
+          </a:p>
+        </p:txBody>
+      </p:sp>
+      <p:sp>
+        <p:nvSpPr>
+          <p:cNvPr id="220" name="Texto 220"/>
+          <p:cNvSpPr txBox="1"/>
+          <p:nvPr/>
+        </p:nvSpPr>
+        <p:spPr>
+          <a:xfrm>
+            <a:off x="649600" y="2890000"/>
+            <a:ext cx="2573200" cy="2340000"/>
+          </a:xfrm>
+          <a:prstGeom prst="rect">
+            <a:avLst/>
+          </a:prstGeom>
+          <a:noFill/>
+        </p:spPr>
+        <p:txBody>
+          <a:bodyPr wrap="square" anchor="t" lIns="45720" rIns="45720">
+            <a:noAutofit/>
+          </a:bodyPr>
+          <a:lstStyle/>
+          <a:p>
+            <a:pPr algn="l"/>
+            <a:r>
+              <a:rPr lang="es-ES" sz="1300" dirty="0">
+                <a:solidFill>
+                  <a:srgbClr val="2F2B28"/>
+                </a:solidFill>
+              </a:rPr>
+              <a:t>Nueve esferas por tres niveles de ambición (Optimizar, Aumentar, Transformar). Sirve para priorizar y para hablar con el consejo sin tecnología.</a:t>
+            </a:r>
+          </a:p>
+        </p:txBody>
+      </p:sp>
+      <p:sp>
+        <p:nvSpPr>
+          <p:cNvPr id="221" name="Caja 221"/>
+          <p:cNvSpPr/>
+          <p:nvPr/>
+        </p:nvSpPr>
+        <p:spPr>
+          <a:xfrm>
+            <a:off x="3382800" y="2050000"/>
+            <a:ext cx="2653200" cy="800000"/>
+          </a:xfrm>
+          <a:prstGeom prst="roundRect">
+            <a:avLst>
+              <a:gd name="adj" fmla="val 6000"/>
+            </a:avLst>
+          </a:prstGeom>
+          <a:solidFill>
+            <a:srgbClr val="0F5499"/>
+          </a:solidFill>
+          <a:ln>
+            <a:noFill/>
+          </a:ln>
+        </p:spPr>
+        <p:txBody>
+          <a:bodyPr wrap="square" anchor="ctr" lIns="45720" rIns="45720">
+            <a:noAutofit/>
+          </a:bodyPr>
+          <a:lstStyle/>
+          <a:p>
+            <a:pPr algn="ctr"/>
+            <a:r>
+              <a:rPr lang="es-ES" sz="1700" b="1" dirty="0">
+                <a:solidFill>
+                  <a:srgbClr val="FFFFFF"/>
+                </a:solidFill>
+              </a:rPr>
+              <a:t>B · Gobierno</a:t>
+            </a:r>
+          </a:p>
+        </p:txBody>
+      </p:sp>
+      <p:sp>
+        <p:nvSpPr>
+          <p:cNvPr id="222" name="Caja 222"/>
+          <p:cNvSpPr/>
+          <p:nvPr/>
+        </p:nvSpPr>
+        <p:spPr>
+          <a:xfrm>
+            <a:off x="3382800" y="2790000"/>
+            <a:ext cx="2653200" cy="2500000"/>
+          </a:xfrm>
+          <a:prstGeom prst="roundRect">
+            <a:avLst>
+              <a:gd name="adj" fmla="val 6000"/>
+            </a:avLst>
+          </a:prstGeom>
+          <a:solidFill>
+            <a:srgbClr val="F3CFB2"/>
+          </a:solidFill>
+          <a:ln>
+            <a:noFill/>
+          </a:ln>
+        </p:spPr>
+        <p:txBody>
+          <a:bodyPr wrap="square" anchor="ctr" lIns="45720" rIns="45720">
+            <a:noAutofit/>
+          </a:bodyPr>
+          <a:lstStyle/>
+          <a:p>
+            <a:pPr algn="ctr"/>
+            <a:r>
+              <a:rPr lang="es-ES" sz="1000" b="1" dirty="0">
+                <a:solidFill>
+                  <a:srgbClr val="2F2B28"/>
+                </a:solidFill>
+              </a:rPr>
+              <a:t/>
+            </a:r>
+          </a:p>
+        </p:txBody>
+      </p:sp>
+      <p:sp>
+        <p:nvSpPr>
+          <p:cNvPr id="223" name="Texto 223"/>
+          <p:cNvSpPr txBox="1"/>
+          <p:nvPr/>
+        </p:nvSpPr>
+        <p:spPr>
+          <a:xfrm>
+            <a:off x="3422800" y="2890000"/>
+            <a:ext cx="2573200" cy="2340000"/>
+          </a:xfrm>
+          <a:prstGeom prst="rect">
+            <a:avLst/>
+          </a:prstGeom>
+          <a:noFill/>
+        </p:spPr>
+        <p:txBody>
+          <a:bodyPr wrap="square" anchor="t" lIns="45720" rIns="45720">
+            <a:noAutofit/>
+          </a:bodyPr>
+          <a:lstStyle/>
+          <a:p>
+            <a:pPr algn="l"/>
+            <a:r>
+              <a:rPr lang="es-ES" sz="1300" dirty="0">
+                <a:solidFill>
+                  <a:srgbClr val="2F2B28"/>
+                </a:solidFill>
+              </a:rPr>
+              <a:t>Fases, puertas con validación dual, separación de funciones, riesgos, regulación y no conformidades.</a:t>
+            </a:r>
+          </a:p>
+        </p:txBody>
+      </p:sp>
+      <p:sp>
+        <p:nvSpPr>
+          <p:cNvPr id="224" name="Caja 224"/>
+          <p:cNvSpPr/>
+          <p:nvPr/>
+        </p:nvSpPr>
+        <p:spPr>
+          <a:xfrm>
+            <a:off x="6156000" y="2050000"/>
+            <a:ext cx="2653200" cy="800000"/>
+          </a:xfrm>
+          <a:prstGeom prst="roundRect">
+            <a:avLst>
+              <a:gd name="adj" fmla="val 6000"/>
+            </a:avLst>
+          </a:prstGeom>
+          <a:solidFill>
+            <a:srgbClr val="0D7680"/>
+          </a:solidFill>
+          <a:ln>
+            <a:noFill/>
+          </a:ln>
+        </p:spPr>
+        <p:txBody>
+          <a:bodyPr wrap="square" anchor="ctr" lIns="45720" rIns="45720">
+            <a:noAutofit/>
+          </a:bodyPr>
+          <a:lstStyle/>
+          <a:p>
+            <a:pPr algn="ctr"/>
+            <a:r>
+              <a:rPr lang="es-ES" sz="1700" b="1" dirty="0">
+                <a:solidFill>
+                  <a:srgbClr val="FFFFFF"/>
+                </a:solidFill>
+              </a:rPr>
+              <a:t>C · Medición</a:t>
+            </a:r>
+          </a:p>
+        </p:txBody>
+      </p:sp>
+      <p:sp>
+        <p:nvSpPr>
+          <p:cNvPr id="225" name="Caja 225"/>
+          <p:cNvSpPr/>
+          <p:nvPr/>
+        </p:nvSpPr>
+        <p:spPr>
+          <a:xfrm>
+            <a:off x="6156000" y="2790000"/>
+            <a:ext cx="2653200" cy="2500000"/>
+          </a:xfrm>
+          <a:prstGeom prst="roundRect">
+            <a:avLst>
+              <a:gd name="adj" fmla="val 6000"/>
+            </a:avLst>
+          </a:prstGeom>
+          <a:solidFill>
+            <a:srgbClr val="F3CFB2"/>
+          </a:solidFill>
+          <a:ln>
+            <a:noFill/>
+          </a:ln>
+        </p:spPr>
+        <p:txBody>
+          <a:bodyPr wrap="square" anchor="ctr" lIns="45720" rIns="45720">
+            <a:noAutofit/>
+          </a:bodyPr>
+          <a:lstStyle/>
+          <a:p>
+            <a:pPr algn="ctr"/>
+            <a:r>
+              <a:rPr lang="es-ES" sz="1000" b="1" dirty="0">
+                <a:solidFill>
+                  <a:srgbClr val="2F2B28"/>
+                </a:solidFill>
+              </a:rPr>
+              <a:t/>
+            </a:r>
+          </a:p>
+        </p:txBody>
+      </p:sp>
+      <p:sp>
+        <p:nvSpPr>
+          <p:cNvPr id="226" name="Texto 226"/>
+          <p:cNvSpPr txBox="1"/>
+          <p:nvPr/>
+        </p:nvSpPr>
+        <p:spPr>
+          <a:xfrm>
+            <a:off x="6196000" y="2890000"/>
+            <a:ext cx="2573200" cy="2340000"/>
+          </a:xfrm>
+          <a:prstGeom prst="rect">
+            <a:avLst/>
+          </a:prstGeom>
+          <a:noFill/>
+        </p:spPr>
+        <p:txBody>
+          <a:bodyPr wrap="square" anchor="t" lIns="45720" rIns="45720">
+            <a:noAutofit/>
+          </a:bodyPr>
+          <a:lstStyle/>
+          <a:p>
+            <a:pPr algn="l"/>
+            <a:r>
+              <a:rPr lang="es-ES" sz="1300" dirty="0">
+                <a:solidFill>
+                  <a:srgbClr val="2F2B28"/>
+                </a:solidFill>
+              </a:rPr>
+              <a:t>Diez reglas de medición, estados del importe, costes completos e índice de transformación.</a:t>
+            </a:r>
+          </a:p>
+        </p:txBody>
+      </p:sp>
+      <p:sp>
+        <p:nvSpPr>
+          <p:cNvPr id="227" name="Caja 227"/>
+          <p:cNvSpPr/>
+          <p:nvPr/>
+        </p:nvSpPr>
+        <p:spPr>
+          <a:xfrm>
+            <a:off x="8929200" y="2050000"/>
+            <a:ext cx="2653200" cy="800000"/>
+          </a:xfrm>
+          <a:prstGeom prst="roundRect">
+            <a:avLst>
+              <a:gd name="adj" fmla="val 6000"/>
+            </a:avLst>
+          </a:prstGeom>
+          <a:solidFill>
+            <a:srgbClr val="A5822A"/>
+          </a:solidFill>
+          <a:ln>
+            <a:noFill/>
+          </a:ln>
+        </p:spPr>
+        <p:txBody>
+          <a:bodyPr wrap="square" anchor="ctr" lIns="45720" rIns="45720">
+            <a:noAutofit/>
+          </a:bodyPr>
+          <a:lstStyle/>
+          <a:p>
+            <a:pPr algn="ctr"/>
+            <a:r>
+              <a:rPr lang="es-ES" sz="1700" b="1" dirty="0">
+                <a:solidFill>
+                  <a:srgbClr val="FFFFFF"/>
+                </a:solidFill>
+              </a:rPr>
+              <a:t>D · Herramientas</a:t>
+            </a:r>
+          </a:p>
+        </p:txBody>
+      </p:sp>
+      <p:sp>
+        <p:nvSpPr>
+          <p:cNvPr id="228" name="Caja 228"/>
+          <p:cNvSpPr/>
+          <p:nvPr/>
+        </p:nvSpPr>
+        <p:spPr>
+          <a:xfrm>
+            <a:off x="8929200" y="2790000"/>
+            <a:ext cx="2653200" cy="2500000"/>
+          </a:xfrm>
+          <a:prstGeom prst="roundRect">
+            <a:avLst>
+              <a:gd name="adj" fmla="val 6000"/>
+            </a:avLst>
+          </a:prstGeom>
+          <a:solidFill>
+            <a:srgbClr val="F3CFB2"/>
+          </a:solidFill>
+          <a:ln>
+            <a:noFill/>
+          </a:ln>
+        </p:spPr>
+        <p:txBody>
+          <a:bodyPr wrap="square" anchor="ctr" lIns="45720" rIns="45720">
+            <a:noAutofit/>
+          </a:bodyPr>
+          <a:lstStyle/>
+          <a:p>
+            <a:pPr algn="ctr"/>
+            <a:r>
+              <a:rPr lang="es-ES" sz="1000" b="1" dirty="0">
+                <a:solidFill>
+                  <a:srgbClr val="2F2B28"/>
+                </a:solidFill>
+              </a:rPr>
+              <a:t/>
+            </a:r>
+          </a:p>
+        </p:txBody>
+      </p:sp>
+      <p:sp>
+        <p:nvSpPr>
+          <p:cNvPr id="229" name="Texto 229"/>
+          <p:cNvSpPr txBox="1"/>
+          <p:nvPr/>
+        </p:nvSpPr>
+        <p:spPr>
+          <a:xfrm>
+            <a:off x="8969200" y="2890000"/>
+            <a:ext cx="2573200" cy="2340000"/>
+          </a:xfrm>
+          <a:prstGeom prst="rect">
+            <a:avLst/>
+          </a:prstGeom>
+          <a:noFill/>
+        </p:spPr>
+        <p:txBody>
+          <a:bodyPr wrap="square" anchor="t" lIns="45720" rIns="45720">
+            <a:noAutofit/>
+          </a:bodyPr>
+          <a:lstStyle/>
+          <a:p>
+            <a:pPr algn="l"/>
+            <a:r>
+              <a:rPr lang="es-ES" sz="1300" dirty="0">
+                <a:solidFill>
+                  <a:srgbClr val="2F2B28"/>
+                </a:solidFill>
+              </a:rPr>
+              <a:t>Registro T01, calculadoras, diagnóstico de madurez y panel del consejo: HTML sin servidor, datos en JSON, código MIT.</a:t>
+            </a:r>
+          </a:p>
+        </p:txBody>
+      </p:sp>
+      <p:sp>
+        <p:nvSpPr>
+          <p:cNvPr id="230" name="Texto 230"/>
+          <p:cNvSpPr txBox="1"/>
+          <p:nvPr/>
+        </p:nvSpPr>
+        <p:spPr>
+          <a:xfrm>
+            <a:off x="609600" y="6150000"/>
+            <a:ext cx="10972800" cy="500000"/>
+          </a:xfrm>
+          <a:prstGeom prst="rect">
+            <a:avLst/>
+          </a:prstGeom>
+          <a:noFill/>
+        </p:spPr>
+        <p:txBody>
+          <a:bodyPr wrap="square" anchor="t" lIns="45720" rIns="45720">
+            <a:noAutofit/>
+          </a:bodyPr>
+          <a:lstStyle/>
+          <a:p>
+            <a:pPr algn="l"/>
+            <a:r>
+              <a:rPr lang="es-ES" sz="1400" b="1" dirty="0">
+                <a:solidFill>
+                  <a:srgbClr val="0F5499"/>
+                </a:solidFill>
+              </a:rPr>
+              <a:t>Si lo llama «SEVEN-G», respete sus seis reglas esenciales; si no, diga «adaptado de» e indique qué cambia.</a:t>
             </a:r>
           </a:p>
         </p:txBody>
@@ -6106,7 +6184,7 @@
       </p:grpSpPr>
       <p:sp>
         <p:nvSpPr>
-          <p:cNvPr id="233" name="Marca"/>
+          <p:cNvPr id="236" name="Marca"/>
           <p:cNvSpPr/>
           <p:nvPr/>
         </p:nvSpPr>
@@ -6130,7 +6208,7 @@
       </p:sp>
       <p:sp>
         <p:nvSpPr>
-          <p:cNvPr id="234" name="Texto 234"/>
+          <p:cNvPr id="237" name="Texto 237"/>
           <p:cNvSpPr txBox="1"/>
           <p:nvPr/>
         </p:nvSpPr>
@@ -6164,7 +6242,7 @@
       </p:sp>
       <p:sp>
         <p:nvSpPr>
-          <p:cNvPr id="235" name="Texto 235"/>
+          <p:cNvPr id="238" name="Texto 238"/>
           <p:cNvSpPr txBox="1"/>
           <p:nvPr/>
         </p:nvSpPr>
@@ -6191,14 +6269,14 @@
                   <a:srgbClr val="990F3D"/>
                 </a:solidFill>
               </a:rPr>
-              <a:t>Integración técnica: datos y herramientas</a:t>
-            </a:r>
-          </a:p>
-        </p:txBody>
-      </p:sp>
-      <p:sp>
-        <p:nvSpPr>
-          <p:cNvPr id="232" name="Texto 232"/>
+              <a:t>Cómo encajarlo en su metodología</a:t>
+            </a:r>
+          </a:p>
+        </p:txBody>
+      </p:sp>
+      <p:sp>
+        <p:nvSpPr>
+          <p:cNvPr id="235" name="Texto 235"/>
           <p:cNvSpPr txBox="1"/>
           <p:nvPr/>
         </p:nvSpPr>
@@ -6234,7 +6312,7 @@
                   <a:srgbClr val="2F2B28"/>
                 </a:solidFill>
               </a:rPr>
-              <a:t>Un único modelo de datos para todo: el JSON del registro T01, con su esquema publicado. Se importa, se exporta y se fusiona por código de iniciativa.</a:t>
+              <a:t>Haga una tabla de correspondencias: sus etapas frente a las fases 0 a 7, sus comités frente a los órganos, sus entregables frente a las plantillas P.</a:t>
             </a:r>
           </a:p>
           <a:p>
@@ -6254,7 +6332,7 @@
                   <a:srgbClr val="2F2B28"/>
                 </a:solidFill>
               </a:rPr>
-              <a:t>Puede alimentar ese JSON desde su propia plataforma (gestión de proyectos, GRC, CRM) y generar el panel del consejo con el conector de T17.</a:t>
+              <a:t>Conserve los códigos (G0–G7, P01–P74, T01–T22) o publique su equivalencia: sus clientes podrán contrastar con la fuente.</a:t>
             </a:r>
           </a:p>
           <a:p>
@@ -6274,7 +6352,7 @@
                   <a:srgbClr val="2F2B28"/>
                 </a:solidFill>
               </a:rPr>
-              <a:t>Las herramientas son HTML sin servidor: se alojan donde quiera, con su marca junto al reconocimiento, y no envían datos a nadie.</a:t>
+              <a:t>Puede cambiar nombres, umbrales, plazos y pesos. No cambie lo que protege al cliente: separación de funciones, evidencia antes de decidir y estado de cada importe.</a:t>
             </a:r>
           </a:p>
           <a:p>
@@ -6294,7 +6372,7 @@
                   <a:srgbClr val="2F2B28"/>
                 </a:solidFill>
               </a:rPr>
-              <a:t>Las 74 plantillas se generan en Word desde Markdown: puede cambiar estilos y portada y regenerarlas con su imagen.</a:t>
+              <a:t>Indique la versión de partida y sus cambios; cuando el marco evolucione, decida si actualiza y dígalo.</a:t>
             </a:r>
           </a:p>
           <a:p>
@@ -6314,27 +6392,7 @@
                   <a:srgbClr val="2F2B28"/>
                 </a:solidFill>
               </a:rPr>
-              <a:t>Los esquemas nuevos solo añaden campos opcionales: los ficheros antiguos siguen funcionando.</a:t>
-            </a:r>
-          </a:p>
-          <a:p>
-            <a:pPr marL="285750" indent="-285750">
-              <a:spcAft>
-                <a:spcPts val="400"/>
-              </a:spcAft>
-              <a:buClr>
-                <a:srgbClr val="990F3D"/>
-              </a:buClr>
-              <a:buFont typeface="Arial"/>
-              <a:buChar char="•"/>
-            </a:pPr>
-            <a:r>
-              <a:rPr lang="es-ES" sz="1700" dirty="0">
-                <a:solidFill>
-                  <a:srgbClr val="2F2B28"/>
-                </a:solidFill>
-              </a:rPr>
-              <a:t>Los datos del cliente son del cliente: déjelos siempre en formato abierto.</a:t>
+              <a:t>En una obra que mezcla marcos debe quedar claro qué procede de SEVEN-G. Sus aportaciones puede licenciarlas como quiera, sin impedir la licencia del original.</a:t>
             </a:r>
           </a:p>
         </p:txBody>
@@ -6374,7 +6432,7 @@
       </p:grpSpPr>
       <p:sp>
         <p:nvSpPr>
-          <p:cNvPr id="246" name="Marca"/>
+          <p:cNvPr id="240" name="Marca"/>
           <p:cNvSpPr/>
           <p:nvPr/>
         </p:nvSpPr>
@@ -6398,7 +6456,7 @@
       </p:sp>
       <p:sp>
         <p:nvSpPr>
-          <p:cNvPr id="247" name="Texto 247"/>
+          <p:cNvPr id="241" name="Texto 241"/>
           <p:cNvSpPr txBox="1"/>
           <p:nvPr/>
         </p:nvSpPr>
@@ -6432,7 +6490,7 @@
       </p:sp>
       <p:sp>
         <p:nvSpPr>
-          <p:cNvPr id="248" name="Texto 248"/>
+          <p:cNvPr id="242" name="Texto 242"/>
           <p:cNvSpPr txBox="1"/>
           <p:nvPr/>
         </p:nvSpPr>
@@ -6459,423 +6517,150 @@
                   <a:srgbClr val="990F3D"/>
                 </a:solidFill>
               </a:rPr>
-              <a:t>Cómo nombrarlo ante sus clientes</a:t>
-            </a:r>
-          </a:p>
-        </p:txBody>
-      </p:sp>
-      <p:sp>
-        <p:nvSpPr>
-          <p:cNvPr id="249" name="Texto 249"/>
-          <p:cNvSpPr txBox="1"/>
-          <p:nvPr/>
-        </p:nvSpPr>
-        <p:spPr>
-          <a:xfrm>
-            <a:off x="609600" y="1330000"/>
-            <a:ext cx="10972800" cy="450000"/>
-          </a:xfrm>
-          <a:prstGeom prst="rect">
-            <a:avLst/>
-          </a:prstGeom>
-          <a:noFill/>
-        </p:spPr>
-        <p:txBody>
-          <a:bodyPr wrap="square" anchor="t" lIns="45720" rIns="45720">
-            <a:noAutofit/>
-          </a:bodyPr>
-          <a:lstStyle/>
-          <a:p>
-            <a:pPr algn="l"/>
-            <a:r>
-              <a:rPr lang="es-ES" sz="1500" dirty="0">
-                <a:solidFill>
-                  <a:srgbClr val="564D47"/>
-                </a:solidFill>
-              </a:rPr>
-              <a:t>Decir con exactitud qué se ha usado es obligatorio; sugerir aval no está permitido</a:t>
-            </a:r>
-          </a:p>
-        </p:txBody>
-      </p:sp>
-      <p:sp>
-        <p:nvSpPr>
-          <p:cNvPr id="236" name="Caja 236"/>
-          <p:cNvSpPr/>
-          <p:nvPr/>
-        </p:nvSpPr>
-        <p:spPr>
-          <a:xfrm>
-            <a:off x="609600" y="2050000"/>
-            <a:ext cx="3577600" cy="800000"/>
-          </a:xfrm>
-          <a:prstGeom prst="roundRect">
-            <a:avLst>
-              <a:gd name="adj" fmla="val 6000"/>
-            </a:avLst>
-          </a:prstGeom>
-          <a:solidFill>
-            <a:srgbClr val="0D7680"/>
-          </a:solidFill>
-          <a:ln>
-            <a:noFill/>
-          </a:ln>
-        </p:spPr>
-        <p:txBody>
-          <a:bodyPr wrap="square" anchor="ctr" lIns="45720" rIns="45720">
-            <a:noAutofit/>
-          </a:bodyPr>
-          <a:lstStyle/>
-          <a:p>
-            <a:pPr algn="ctr"/>
-            <a:r>
-              <a:rPr lang="es-ES" sz="1700" b="1" dirty="0">
-                <a:solidFill>
-                  <a:srgbClr val="FFFFFF"/>
-                </a:solidFill>
-              </a:rPr>
-              <a:t>Adecuado</a:t>
-            </a:r>
-          </a:p>
-        </p:txBody>
-      </p:sp>
-      <p:sp>
-        <p:nvSpPr>
-          <p:cNvPr id="237" name="Caja 237"/>
-          <p:cNvSpPr/>
-          <p:nvPr/>
-        </p:nvSpPr>
-        <p:spPr>
-          <a:xfrm>
-            <a:off x="609600" y="2790000"/>
-            <a:ext cx="3577600" cy="2500000"/>
-          </a:xfrm>
-          <a:prstGeom prst="roundRect">
-            <a:avLst>
-              <a:gd name="adj" fmla="val 6000"/>
-            </a:avLst>
-          </a:prstGeom>
-          <a:solidFill>
-            <a:srgbClr val="F3CFB2"/>
-          </a:solidFill>
-          <a:ln>
-            <a:noFill/>
-          </a:ln>
-        </p:spPr>
-        <p:txBody>
-          <a:bodyPr wrap="square" anchor="ctr" lIns="45720" rIns="45720">
-            <a:noAutofit/>
-          </a:bodyPr>
-          <a:lstStyle/>
-          <a:p>
-            <a:pPr algn="ctr"/>
-            <a:r>
-              <a:rPr lang="es-ES" sz="1000" b="1" dirty="0">
-                <a:solidFill>
-                  <a:srgbClr val="2F2B28"/>
-                </a:solidFill>
-              </a:rPr>
-              <a:t/>
-            </a:r>
-          </a:p>
-        </p:txBody>
-      </p:sp>
-      <p:sp>
-        <p:nvSpPr>
-          <p:cNvPr id="238" name="Texto 238"/>
-          <p:cNvSpPr txBox="1"/>
-          <p:nvPr/>
-        </p:nvSpPr>
-        <p:spPr>
-          <a:xfrm>
-            <a:off x="649600" y="2890000"/>
-            <a:ext cx="3497600" cy="2340000"/>
-          </a:xfrm>
-          <a:prstGeom prst="rect">
-            <a:avLst/>
-          </a:prstGeom>
-          <a:noFill/>
-        </p:spPr>
-        <p:txBody>
-          <a:bodyPr wrap="square" anchor="t" lIns="45720" rIns="45720">
-            <a:noAutofit/>
-          </a:bodyPr>
-          <a:lstStyle/>
-          <a:p>
-            <a:pPr algn="l"/>
-            <a:r>
-              <a:rPr lang="es-ES" sz="1300" dirty="0">
-                <a:solidFill>
-                  <a:srgbClr val="2F2B28"/>
-                </a:solidFill>
-              </a:rPr>
-              <a:t>«Basado en SEVEN-G (versión 0.80).»   «Adaptado de SEVEN-G; cambios: …»   «Incluye el registro de iniciativas de SEVEN-G (MIT).»   «Esta adaptación no está respaldada por el autor.»</a:t>
-            </a:r>
-          </a:p>
-        </p:txBody>
-      </p:sp>
-      <p:sp>
-        <p:nvSpPr>
-          <p:cNvPr id="239" name="Caja 239"/>
-          <p:cNvSpPr/>
-          <p:nvPr/>
-        </p:nvSpPr>
-        <p:spPr>
-          <a:xfrm>
-            <a:off x="4307200" y="2050000"/>
-            <a:ext cx="3577600" cy="800000"/>
-          </a:xfrm>
-          <a:prstGeom prst="roundRect">
-            <a:avLst>
-              <a:gd name="adj" fmla="val 6000"/>
-            </a:avLst>
-          </a:prstGeom>
-          <a:solidFill>
-            <a:srgbClr val="990F3D"/>
-          </a:solidFill>
-          <a:ln>
-            <a:noFill/>
-          </a:ln>
-        </p:spPr>
-        <p:txBody>
-          <a:bodyPr wrap="square" anchor="ctr" lIns="45720" rIns="45720">
-            <a:noAutofit/>
-          </a:bodyPr>
-          <a:lstStyle/>
-          <a:p>
-            <a:pPr algn="ctr"/>
-            <a:r>
-              <a:rPr lang="es-ES" sz="1700" b="1" dirty="0">
-                <a:solidFill>
-                  <a:srgbClr val="FFFFFF"/>
-                </a:solidFill>
-              </a:rPr>
-              <a:t>No adecuado</a:t>
-            </a:r>
-          </a:p>
-        </p:txBody>
-      </p:sp>
-      <p:sp>
-        <p:nvSpPr>
-          <p:cNvPr id="240" name="Caja 240"/>
-          <p:cNvSpPr/>
-          <p:nvPr/>
-        </p:nvSpPr>
-        <p:spPr>
-          <a:xfrm>
-            <a:off x="4307200" y="2790000"/>
-            <a:ext cx="3577600" cy="2500000"/>
-          </a:xfrm>
-          <a:prstGeom prst="roundRect">
-            <a:avLst>
-              <a:gd name="adj" fmla="val 6000"/>
-            </a:avLst>
-          </a:prstGeom>
-          <a:solidFill>
-            <a:srgbClr val="F3CFB2"/>
-          </a:solidFill>
-          <a:ln>
-            <a:noFill/>
-          </a:ln>
-        </p:spPr>
-        <p:txBody>
-          <a:bodyPr wrap="square" anchor="ctr" lIns="45720" rIns="45720">
-            <a:noAutofit/>
-          </a:bodyPr>
-          <a:lstStyle/>
-          <a:p>
-            <a:pPr algn="ctr"/>
-            <a:r>
-              <a:rPr lang="es-ES" sz="1000" b="1" dirty="0">
-                <a:solidFill>
-                  <a:srgbClr val="2F2B28"/>
-                </a:solidFill>
-              </a:rPr>
-              <a:t/>
-            </a:r>
-          </a:p>
-        </p:txBody>
-      </p:sp>
-      <p:sp>
-        <p:nvSpPr>
-          <p:cNvPr id="241" name="Texto 241"/>
-          <p:cNvSpPr txBox="1"/>
-          <p:nvPr/>
-        </p:nvSpPr>
-        <p:spPr>
-          <a:xfrm>
-            <a:off x="4347200" y="2890000"/>
-            <a:ext cx="3497600" cy="2340000"/>
-          </a:xfrm>
-          <a:prstGeom prst="rect">
-            <a:avLst/>
-          </a:prstGeom>
-          <a:noFill/>
-        </p:spPr>
-        <p:txBody>
-          <a:bodyPr wrap="square" anchor="t" lIns="45720" rIns="45720">
-            <a:noAutofit/>
-          </a:bodyPr>
-          <a:lstStyle/>
-          <a:p>
-            <a:pPr algn="l"/>
-            <a:r>
-              <a:rPr lang="es-ES" sz="1300" dirty="0">
-                <a:solidFill>
-                  <a:srgbClr val="2F2B28"/>
-                </a:solidFill>
-              </a:rPr>
-              <a:t>«Partner oficial», «homologado», «acreditado», «certificación SEVEN-G», o declarar en nombre de SEVEN-G o del autor que un cliente cumple la regulación.</a:t>
-            </a:r>
-          </a:p>
-        </p:txBody>
-      </p:sp>
-      <p:sp>
-        <p:nvSpPr>
-          <p:cNvPr id="242" name="Caja 242"/>
-          <p:cNvSpPr/>
-          <p:nvPr/>
-        </p:nvSpPr>
-        <p:spPr>
-          <a:xfrm>
-            <a:off x="8004800" y="2050000"/>
-            <a:ext cx="3577600" cy="800000"/>
-          </a:xfrm>
-          <a:prstGeom prst="roundRect">
-            <a:avLst>
-              <a:gd name="adj" fmla="val 6000"/>
-            </a:avLst>
-          </a:prstGeom>
-          <a:solidFill>
-            <a:srgbClr val="0F5499"/>
-          </a:solidFill>
-          <a:ln>
-            <a:noFill/>
-          </a:ln>
-        </p:spPr>
-        <p:txBody>
-          <a:bodyPr wrap="square" anchor="ctr" lIns="45720" rIns="45720">
-            <a:noAutofit/>
-          </a:bodyPr>
-          <a:lstStyle/>
-          <a:p>
-            <a:pPr algn="ctr"/>
-            <a:r>
-              <a:rPr lang="es-ES" sz="1700" b="1" dirty="0">
-                <a:solidFill>
-                  <a:srgbClr val="FFFFFF"/>
-                </a:solidFill>
-              </a:rPr>
-              <a:t>Aviso que se conserva</a:t>
-            </a:r>
-          </a:p>
-        </p:txBody>
-      </p:sp>
-      <p:sp>
-        <p:nvSpPr>
-          <p:cNvPr id="243" name="Caja 243"/>
-          <p:cNvSpPr/>
-          <p:nvPr/>
-        </p:nvSpPr>
-        <p:spPr>
-          <a:xfrm>
-            <a:off x="8004800" y="2790000"/>
-            <a:ext cx="3577600" cy="2500000"/>
-          </a:xfrm>
-          <a:prstGeom prst="roundRect">
-            <a:avLst>
-              <a:gd name="adj" fmla="val 6000"/>
-            </a:avLst>
-          </a:prstGeom>
-          <a:solidFill>
-            <a:srgbClr val="F3CFB2"/>
-          </a:solidFill>
-          <a:ln>
-            <a:noFill/>
-          </a:ln>
-        </p:spPr>
-        <p:txBody>
-          <a:bodyPr wrap="square" anchor="ctr" lIns="45720" rIns="45720">
-            <a:noAutofit/>
-          </a:bodyPr>
-          <a:lstStyle/>
-          <a:p>
-            <a:pPr algn="ctr"/>
-            <a:r>
-              <a:rPr lang="es-ES" sz="1000" b="1" dirty="0">
-                <a:solidFill>
-                  <a:srgbClr val="2F2B28"/>
-                </a:solidFill>
-              </a:rPr>
-              <a:t/>
-            </a:r>
-          </a:p>
-        </p:txBody>
-      </p:sp>
-      <p:sp>
-        <p:nvSpPr>
-          <p:cNvPr id="244" name="Texto 244"/>
-          <p:cNvSpPr txBox="1"/>
-          <p:nvPr/>
-        </p:nvSpPr>
-        <p:spPr>
-          <a:xfrm>
-            <a:off x="8044800" y="2890000"/>
-            <a:ext cx="3497600" cy="2340000"/>
-          </a:xfrm>
-          <a:prstGeom prst="rect">
-            <a:avLst/>
-          </a:prstGeom>
-          <a:noFill/>
-        </p:spPr>
-        <p:txBody>
-          <a:bodyPr wrap="square" anchor="t" lIns="45720" rIns="45720">
-            <a:noAutofit/>
-          </a:bodyPr>
-          <a:lstStyle/>
-          <a:p>
-            <a:pPr algn="l"/>
-            <a:r>
-              <a:rPr lang="es-ES" sz="1300" dirty="0">
-                <a:solidFill>
-                  <a:srgbClr val="2F2B28"/>
-                </a:solidFill>
-              </a:rPr>
-              <a:t>«Basado en SEVEN-G (Fernando García Varela, CC BY 4.0). Contenido orientativo, «tal cual», sin garantías; no es asesoramiento jurídico. El autor no valida ni respalda esta obra.»</a:t>
-            </a:r>
-          </a:p>
-        </p:txBody>
-      </p:sp>
-      <p:sp>
-        <p:nvSpPr>
-          <p:cNvPr id="245" name="Texto 245"/>
-          <p:cNvSpPr txBox="1"/>
-          <p:nvPr/>
-        </p:nvSpPr>
-        <p:spPr>
-          <a:xfrm>
-            <a:off x="609600" y="6150000"/>
-            <a:ext cx="10972800" cy="500000"/>
-          </a:xfrm>
-          <a:prstGeom prst="rect">
-            <a:avLst/>
-          </a:prstGeom>
-          <a:noFill/>
-        </p:spPr>
-        <p:txBody>
-          <a:bodyPr wrap="square" anchor="t" lIns="45720" rIns="45720">
-            <a:noAutofit/>
-          </a:bodyPr>
-          <a:lstStyle/>
-          <a:p>
-            <a:pPr algn="l"/>
-            <a:r>
-              <a:rPr lang="es-ES" sz="1400" b="1" dirty="0">
-                <a:solidFill>
-                  <a:srgbClr val="0F5499"/>
-                </a:solidFill>
-              </a:rPr>
-              <a:t>Documento 93, secciones 6, 7, 8 y 11.9.</a:t>
+              <a:t>Integración técnica: datos y herramientas</a:t>
+            </a:r>
+          </a:p>
+        </p:txBody>
+      </p:sp>
+      <p:sp>
+        <p:nvSpPr>
+          <p:cNvPr id="239" name="Texto 239"/>
+          <p:cNvSpPr txBox="1"/>
+          <p:nvPr/>
+        </p:nvSpPr>
+        <p:spPr>
+          <a:xfrm>
+            <a:off x="609600" y="1750000"/>
+            <a:ext cx="10972800" cy="4400000"/>
+          </a:xfrm>
+          <a:prstGeom prst="rect">
+            <a:avLst/>
+          </a:prstGeom>
+          <a:noFill/>
+        </p:spPr>
+        <p:txBody>
+          <a:bodyPr wrap="square" anchor="t" lIns="45720" rIns="45720">
+            <a:noAutofit/>
+          </a:bodyPr>
+          <a:lstStyle/>
+          <a:p>
+            <a:pPr marL="285750" indent="-285750">
+              <a:spcAft>
+                <a:spcPts val="400"/>
+              </a:spcAft>
+              <a:buClr>
+                <a:srgbClr val="990F3D"/>
+              </a:buClr>
+              <a:buFont typeface="Arial"/>
+              <a:buChar char="•"/>
+            </a:pPr>
+            <a:r>
+              <a:rPr lang="es-ES" sz="1700" dirty="0">
+                <a:solidFill>
+                  <a:srgbClr val="2F2B28"/>
+                </a:solidFill>
+              </a:rPr>
+              <a:t>Un único modelo de datos para todo: el JSON del registro T01, con su esquema publicado. Se importa, se exporta y se fusiona por código de iniciativa.</a:t>
+            </a:r>
+          </a:p>
+          <a:p>
+            <a:pPr marL="285750" indent="-285750">
+              <a:spcAft>
+                <a:spcPts val="400"/>
+              </a:spcAft>
+              <a:buClr>
+                <a:srgbClr val="990F3D"/>
+              </a:buClr>
+              <a:buFont typeface="Arial"/>
+              <a:buChar char="•"/>
+            </a:pPr>
+            <a:r>
+              <a:rPr lang="es-ES" sz="1700" dirty="0">
+                <a:solidFill>
+                  <a:srgbClr val="2F2B28"/>
+                </a:solidFill>
+              </a:rPr>
+              <a:t>Puede alimentar ese JSON desde su propia plataforma (gestión de proyectos, GRC, CRM) y generar el panel del consejo con el conector de T17.</a:t>
+            </a:r>
+          </a:p>
+          <a:p>
+            <a:pPr marL="285750" indent="-285750">
+              <a:spcAft>
+                <a:spcPts val="400"/>
+              </a:spcAft>
+              <a:buClr>
+                <a:srgbClr val="990F3D"/>
+              </a:buClr>
+              <a:buFont typeface="Arial"/>
+              <a:buChar char="•"/>
+            </a:pPr>
+            <a:r>
+              <a:rPr lang="es-ES" sz="1700" dirty="0">
+                <a:solidFill>
+                  <a:srgbClr val="2F2B28"/>
+                </a:solidFill>
+              </a:rPr>
+              <a:t>Las herramientas son HTML sin servidor: se alojan donde quiera, con su marca junto al reconocimiento, y no envían datos a nadie.</a:t>
+            </a:r>
+          </a:p>
+          <a:p>
+            <a:pPr marL="285750" indent="-285750">
+              <a:spcAft>
+                <a:spcPts val="400"/>
+              </a:spcAft>
+              <a:buClr>
+                <a:srgbClr val="990F3D"/>
+              </a:buClr>
+              <a:buFont typeface="Arial"/>
+              <a:buChar char="•"/>
+            </a:pPr>
+            <a:r>
+              <a:rPr lang="es-ES" sz="1700" dirty="0">
+                <a:solidFill>
+                  <a:srgbClr val="2F2B28"/>
+                </a:solidFill>
+              </a:rPr>
+              <a:t>Las 74 plantillas se generan en Word desde Markdown: puede cambiar estilos y portada y regenerarlas con su imagen.</a:t>
+            </a:r>
+          </a:p>
+          <a:p>
+            <a:pPr marL="285750" indent="-285750">
+              <a:spcAft>
+                <a:spcPts val="400"/>
+              </a:spcAft>
+              <a:buClr>
+                <a:srgbClr val="990F3D"/>
+              </a:buClr>
+              <a:buFont typeface="Arial"/>
+              <a:buChar char="•"/>
+            </a:pPr>
+            <a:r>
+              <a:rPr lang="es-ES" sz="1700" dirty="0">
+                <a:solidFill>
+                  <a:srgbClr val="2F2B28"/>
+                </a:solidFill>
+              </a:rPr>
+              <a:t>Los esquemas nuevos solo añaden campos opcionales: los ficheros antiguos siguen funcionando.</a:t>
+            </a:r>
+          </a:p>
+          <a:p>
+            <a:pPr marL="285750" indent="-285750">
+              <a:spcAft>
+                <a:spcPts val="400"/>
+              </a:spcAft>
+              <a:buClr>
+                <a:srgbClr val="990F3D"/>
+              </a:buClr>
+              <a:buFont typeface="Arial"/>
+              <a:buChar char="•"/>
+            </a:pPr>
+            <a:r>
+              <a:rPr lang="es-ES" sz="1700" dirty="0">
+                <a:solidFill>
+                  <a:srgbClr val="2F2B28"/>
+                </a:solidFill>
+              </a:rPr>
+              <a:t>Los datos del cliente son del cliente: déjelos siempre en formato abierto.</a:t>
             </a:r>
           </a:p>
         </p:txBody>
@@ -6915,7 +6700,7 @@
       </p:grpSpPr>
       <p:sp>
         <p:nvSpPr>
-          <p:cNvPr id="251" name="Marca"/>
+          <p:cNvPr id="253" name="Marca"/>
           <p:cNvSpPr/>
           <p:nvPr/>
         </p:nvSpPr>
@@ -6939,7 +6724,7 @@
       </p:sp>
       <p:sp>
         <p:nvSpPr>
-          <p:cNvPr id="252" name="Texto 252"/>
+          <p:cNvPr id="254" name="Texto 254"/>
           <p:cNvSpPr txBox="1"/>
           <p:nvPr/>
         </p:nvSpPr>
@@ -6973,7 +6758,7 @@
       </p:sp>
       <p:sp>
         <p:nvSpPr>
-          <p:cNvPr id="253" name="Texto 253"/>
+          <p:cNvPr id="255" name="Texto 255"/>
           <p:cNvSpPr txBox="1"/>
           <p:nvPr/>
         </p:nvSpPr>
@@ -7000,110 +6785,423 @@
                   <a:srgbClr val="990F3D"/>
                 </a:solidFill>
               </a:rPr>
-              <a:t>Mantenerse al día y mejorar el marco</a:t>
-            </a:r>
-          </a:p>
-        </p:txBody>
-      </p:sp>
-      <p:sp>
-        <p:nvSpPr>
-          <p:cNvPr id="250" name="Texto 250"/>
-          <p:cNvSpPr txBox="1"/>
-          <p:nvPr/>
-        </p:nvSpPr>
-        <p:spPr>
-          <a:xfrm>
-            <a:off x="609600" y="1750000"/>
-            <a:ext cx="10972800" cy="4400000"/>
-          </a:xfrm>
-          <a:prstGeom prst="rect">
-            <a:avLst/>
-          </a:prstGeom>
-          <a:noFill/>
-        </p:spPr>
-        <p:txBody>
-          <a:bodyPr wrap="square" anchor="t" lIns="45720" rIns="45720">
-            <a:noAutofit/>
-          </a:bodyPr>
-          <a:lstStyle/>
-          <a:p>
-            <a:pPr marL="285750" indent="-285750">
-              <a:spcAft>
-                <a:spcPts val="400"/>
-              </a:spcAft>
-              <a:buClr>
-                <a:srgbClr val="990F3D"/>
-              </a:buClr>
-              <a:buFont typeface="Arial"/>
-              <a:buChar char="•"/>
-            </a:pPr>
-            <a:r>
-              <a:rPr lang="es-ES" sz="1800" dirty="0">
-                <a:solidFill>
-                  <a:srgbClr val="2F2B28"/>
-                </a:solidFill>
-              </a:rPr>
-              <a:t>El sitio publica la versión del marco y el control de versiones de cada documento: revise los cambios antes de actualizar su adaptación.</a:t>
-            </a:r>
-          </a:p>
-          <a:p>
-            <a:pPr marL="285750" indent="-285750">
-              <a:spcAft>
-                <a:spcPts val="400"/>
-              </a:spcAft>
-              <a:buClr>
-                <a:srgbClr val="990F3D"/>
-              </a:buClr>
-              <a:buFont typeface="Arial"/>
-              <a:buChar char="•"/>
-            </a:pPr>
-            <a:r>
-              <a:rPr lang="es-ES" sz="1800" dirty="0">
-                <a:solidFill>
-                  <a:srgbClr val="2F2B28"/>
-                </a:solidFill>
-              </a:rPr>
-              <a:t>Incidencias y peticiones de mejora: en la página de comunidad, sin cuenta ni correo; se abordan las peticiones con más votos.</a:t>
-            </a:r>
-          </a:p>
-          <a:p>
-            <a:pPr marL="285750" indent="-285750">
-              <a:spcAft>
-                <a:spcPts val="400"/>
-              </a:spcAft>
-              <a:buClr>
-                <a:srgbClr val="990F3D"/>
-              </a:buClr>
-              <a:buFont typeface="Arial"/>
-              <a:buChar char="•"/>
-            </a:pPr>
-            <a:r>
-              <a:rPr lang="es-ES" sz="1800" dirty="0">
-                <a:solidFill>
-                  <a:srgbClr val="2F2B28"/>
-                </a:solidFill>
-              </a:rPr>
-              <a:t>Una traducción suya es una obra derivada: indique que no es oficial, de qué versión procede y quién la ha hecho.</a:t>
-            </a:r>
-          </a:p>
-          <a:p>
-            <a:pPr marL="285750" indent="-285750">
-              <a:spcAft>
-                <a:spcPts val="400"/>
-              </a:spcAft>
-              <a:buClr>
-                <a:srgbClr val="990F3D"/>
-              </a:buClr>
-              <a:buFont typeface="Arial"/>
-              <a:buChar char="•"/>
-            </a:pPr>
-            <a:r>
-              <a:rPr lang="es-ES" sz="1800" dirty="0">
-                <a:solidFill>
-                  <a:srgbClr val="2F2B28"/>
-                </a:solidFill>
-              </a:rPr>
-              <a:t>Si quiere algo que la licencia no da —un desarrollo a medida, formación para su equipo, acuerdo sobre el uso de la marca—, hable con el autor. Esa conversación la inicia usted.</a:t>
+              <a:t>Cómo nombrarlo ante sus clientes</a:t>
+            </a:r>
+          </a:p>
+        </p:txBody>
+      </p:sp>
+      <p:sp>
+        <p:nvSpPr>
+          <p:cNvPr id="256" name="Texto 256"/>
+          <p:cNvSpPr txBox="1"/>
+          <p:nvPr/>
+        </p:nvSpPr>
+        <p:spPr>
+          <a:xfrm>
+            <a:off x="609600" y="1330000"/>
+            <a:ext cx="10972800" cy="450000"/>
+          </a:xfrm>
+          <a:prstGeom prst="rect">
+            <a:avLst/>
+          </a:prstGeom>
+          <a:noFill/>
+        </p:spPr>
+        <p:txBody>
+          <a:bodyPr wrap="square" anchor="t" lIns="45720" rIns="45720">
+            <a:noAutofit/>
+          </a:bodyPr>
+          <a:lstStyle/>
+          <a:p>
+            <a:pPr algn="l"/>
+            <a:r>
+              <a:rPr lang="es-ES" sz="1500" dirty="0">
+                <a:solidFill>
+                  <a:srgbClr val="564D47"/>
+                </a:solidFill>
+              </a:rPr>
+              <a:t>Decir con exactitud qué se ha usado es obligatorio; sugerir aval no está permitido</a:t>
+            </a:r>
+          </a:p>
+        </p:txBody>
+      </p:sp>
+      <p:sp>
+        <p:nvSpPr>
+          <p:cNvPr id="243" name="Caja 243"/>
+          <p:cNvSpPr/>
+          <p:nvPr/>
+        </p:nvSpPr>
+        <p:spPr>
+          <a:xfrm>
+            <a:off x="609600" y="2050000"/>
+            <a:ext cx="3577600" cy="800000"/>
+          </a:xfrm>
+          <a:prstGeom prst="roundRect">
+            <a:avLst>
+              <a:gd name="adj" fmla="val 6000"/>
+            </a:avLst>
+          </a:prstGeom>
+          <a:solidFill>
+            <a:srgbClr val="0D7680"/>
+          </a:solidFill>
+          <a:ln>
+            <a:noFill/>
+          </a:ln>
+        </p:spPr>
+        <p:txBody>
+          <a:bodyPr wrap="square" anchor="ctr" lIns="45720" rIns="45720">
+            <a:noAutofit/>
+          </a:bodyPr>
+          <a:lstStyle/>
+          <a:p>
+            <a:pPr algn="ctr"/>
+            <a:r>
+              <a:rPr lang="es-ES" sz="1700" b="1" dirty="0">
+                <a:solidFill>
+                  <a:srgbClr val="FFFFFF"/>
+                </a:solidFill>
+              </a:rPr>
+              <a:t>Adecuado</a:t>
+            </a:r>
+          </a:p>
+        </p:txBody>
+      </p:sp>
+      <p:sp>
+        <p:nvSpPr>
+          <p:cNvPr id="244" name="Caja 244"/>
+          <p:cNvSpPr/>
+          <p:nvPr/>
+        </p:nvSpPr>
+        <p:spPr>
+          <a:xfrm>
+            <a:off x="609600" y="2790000"/>
+            <a:ext cx="3577600" cy="2500000"/>
+          </a:xfrm>
+          <a:prstGeom prst="roundRect">
+            <a:avLst>
+              <a:gd name="adj" fmla="val 6000"/>
+            </a:avLst>
+          </a:prstGeom>
+          <a:solidFill>
+            <a:srgbClr val="F3CFB2"/>
+          </a:solidFill>
+          <a:ln>
+            <a:noFill/>
+          </a:ln>
+        </p:spPr>
+        <p:txBody>
+          <a:bodyPr wrap="square" anchor="ctr" lIns="45720" rIns="45720">
+            <a:noAutofit/>
+          </a:bodyPr>
+          <a:lstStyle/>
+          <a:p>
+            <a:pPr algn="ctr"/>
+            <a:r>
+              <a:rPr lang="es-ES" sz="1000" b="1" dirty="0">
+                <a:solidFill>
+                  <a:srgbClr val="2F2B28"/>
+                </a:solidFill>
+              </a:rPr>
+              <a:t/>
+            </a:r>
+          </a:p>
+        </p:txBody>
+      </p:sp>
+      <p:sp>
+        <p:nvSpPr>
+          <p:cNvPr id="245" name="Texto 245"/>
+          <p:cNvSpPr txBox="1"/>
+          <p:nvPr/>
+        </p:nvSpPr>
+        <p:spPr>
+          <a:xfrm>
+            <a:off x="649600" y="2890000"/>
+            <a:ext cx="3497600" cy="2340000"/>
+          </a:xfrm>
+          <a:prstGeom prst="rect">
+            <a:avLst/>
+          </a:prstGeom>
+          <a:noFill/>
+        </p:spPr>
+        <p:txBody>
+          <a:bodyPr wrap="square" anchor="t" lIns="45720" rIns="45720">
+            <a:noAutofit/>
+          </a:bodyPr>
+          <a:lstStyle/>
+          <a:p>
+            <a:pPr algn="l"/>
+            <a:r>
+              <a:rPr lang="es-ES" sz="1300" dirty="0">
+                <a:solidFill>
+                  <a:srgbClr val="2F2B28"/>
+                </a:solidFill>
+              </a:rPr>
+              <a:t>«Basado en SEVEN-G (versión 0.80).»   «Adaptado de SEVEN-G; cambios: …»   «Incluye el registro de iniciativas de SEVEN-G (MIT).»   «Esta adaptación no está respaldada por el autor.»</a:t>
+            </a:r>
+          </a:p>
+        </p:txBody>
+      </p:sp>
+      <p:sp>
+        <p:nvSpPr>
+          <p:cNvPr id="246" name="Caja 246"/>
+          <p:cNvSpPr/>
+          <p:nvPr/>
+        </p:nvSpPr>
+        <p:spPr>
+          <a:xfrm>
+            <a:off x="4307200" y="2050000"/>
+            <a:ext cx="3577600" cy="800000"/>
+          </a:xfrm>
+          <a:prstGeom prst="roundRect">
+            <a:avLst>
+              <a:gd name="adj" fmla="val 6000"/>
+            </a:avLst>
+          </a:prstGeom>
+          <a:solidFill>
+            <a:srgbClr val="990F3D"/>
+          </a:solidFill>
+          <a:ln>
+            <a:noFill/>
+          </a:ln>
+        </p:spPr>
+        <p:txBody>
+          <a:bodyPr wrap="square" anchor="ctr" lIns="45720" rIns="45720">
+            <a:noAutofit/>
+          </a:bodyPr>
+          <a:lstStyle/>
+          <a:p>
+            <a:pPr algn="ctr"/>
+            <a:r>
+              <a:rPr lang="es-ES" sz="1700" b="1" dirty="0">
+                <a:solidFill>
+                  <a:srgbClr val="FFFFFF"/>
+                </a:solidFill>
+              </a:rPr>
+              <a:t>No adecuado</a:t>
+            </a:r>
+          </a:p>
+        </p:txBody>
+      </p:sp>
+      <p:sp>
+        <p:nvSpPr>
+          <p:cNvPr id="247" name="Caja 247"/>
+          <p:cNvSpPr/>
+          <p:nvPr/>
+        </p:nvSpPr>
+        <p:spPr>
+          <a:xfrm>
+            <a:off x="4307200" y="2790000"/>
+            <a:ext cx="3577600" cy="2500000"/>
+          </a:xfrm>
+          <a:prstGeom prst="roundRect">
+            <a:avLst>
+              <a:gd name="adj" fmla="val 6000"/>
+            </a:avLst>
+          </a:prstGeom>
+          <a:solidFill>
+            <a:srgbClr val="F3CFB2"/>
+          </a:solidFill>
+          <a:ln>
+            <a:noFill/>
+          </a:ln>
+        </p:spPr>
+        <p:txBody>
+          <a:bodyPr wrap="square" anchor="ctr" lIns="45720" rIns="45720">
+            <a:noAutofit/>
+          </a:bodyPr>
+          <a:lstStyle/>
+          <a:p>
+            <a:pPr algn="ctr"/>
+            <a:r>
+              <a:rPr lang="es-ES" sz="1000" b="1" dirty="0">
+                <a:solidFill>
+                  <a:srgbClr val="2F2B28"/>
+                </a:solidFill>
+              </a:rPr>
+              <a:t/>
+            </a:r>
+          </a:p>
+        </p:txBody>
+      </p:sp>
+      <p:sp>
+        <p:nvSpPr>
+          <p:cNvPr id="248" name="Texto 248"/>
+          <p:cNvSpPr txBox="1"/>
+          <p:nvPr/>
+        </p:nvSpPr>
+        <p:spPr>
+          <a:xfrm>
+            <a:off x="4347200" y="2890000"/>
+            <a:ext cx="3497600" cy="2340000"/>
+          </a:xfrm>
+          <a:prstGeom prst="rect">
+            <a:avLst/>
+          </a:prstGeom>
+          <a:noFill/>
+        </p:spPr>
+        <p:txBody>
+          <a:bodyPr wrap="square" anchor="t" lIns="45720" rIns="45720">
+            <a:noAutofit/>
+          </a:bodyPr>
+          <a:lstStyle/>
+          <a:p>
+            <a:pPr algn="l"/>
+            <a:r>
+              <a:rPr lang="es-ES" sz="1300" dirty="0">
+                <a:solidFill>
+                  <a:srgbClr val="2F2B28"/>
+                </a:solidFill>
+              </a:rPr>
+              <a:t>«Partner oficial», «homologado», «acreditado», «certificación SEVEN-G», o declarar en nombre de SEVEN-G o del autor que un cliente cumple la regulación.</a:t>
+            </a:r>
+          </a:p>
+        </p:txBody>
+      </p:sp>
+      <p:sp>
+        <p:nvSpPr>
+          <p:cNvPr id="249" name="Caja 249"/>
+          <p:cNvSpPr/>
+          <p:nvPr/>
+        </p:nvSpPr>
+        <p:spPr>
+          <a:xfrm>
+            <a:off x="8004800" y="2050000"/>
+            <a:ext cx="3577600" cy="800000"/>
+          </a:xfrm>
+          <a:prstGeom prst="roundRect">
+            <a:avLst>
+              <a:gd name="adj" fmla="val 6000"/>
+            </a:avLst>
+          </a:prstGeom>
+          <a:solidFill>
+            <a:srgbClr val="0F5499"/>
+          </a:solidFill>
+          <a:ln>
+            <a:noFill/>
+          </a:ln>
+        </p:spPr>
+        <p:txBody>
+          <a:bodyPr wrap="square" anchor="ctr" lIns="45720" rIns="45720">
+            <a:noAutofit/>
+          </a:bodyPr>
+          <a:lstStyle/>
+          <a:p>
+            <a:pPr algn="ctr"/>
+            <a:r>
+              <a:rPr lang="es-ES" sz="1700" b="1" dirty="0">
+                <a:solidFill>
+                  <a:srgbClr val="FFFFFF"/>
+                </a:solidFill>
+              </a:rPr>
+              <a:t>Aviso que se conserva</a:t>
+            </a:r>
+          </a:p>
+        </p:txBody>
+      </p:sp>
+      <p:sp>
+        <p:nvSpPr>
+          <p:cNvPr id="250" name="Caja 250"/>
+          <p:cNvSpPr/>
+          <p:nvPr/>
+        </p:nvSpPr>
+        <p:spPr>
+          <a:xfrm>
+            <a:off x="8004800" y="2790000"/>
+            <a:ext cx="3577600" cy="2500000"/>
+          </a:xfrm>
+          <a:prstGeom prst="roundRect">
+            <a:avLst>
+              <a:gd name="adj" fmla="val 6000"/>
+            </a:avLst>
+          </a:prstGeom>
+          <a:solidFill>
+            <a:srgbClr val="F3CFB2"/>
+          </a:solidFill>
+          <a:ln>
+            <a:noFill/>
+          </a:ln>
+        </p:spPr>
+        <p:txBody>
+          <a:bodyPr wrap="square" anchor="ctr" lIns="45720" rIns="45720">
+            <a:noAutofit/>
+          </a:bodyPr>
+          <a:lstStyle/>
+          <a:p>
+            <a:pPr algn="ctr"/>
+            <a:r>
+              <a:rPr lang="es-ES" sz="1000" b="1" dirty="0">
+                <a:solidFill>
+                  <a:srgbClr val="2F2B28"/>
+                </a:solidFill>
+              </a:rPr>
+              <a:t/>
+            </a:r>
+          </a:p>
+        </p:txBody>
+      </p:sp>
+      <p:sp>
+        <p:nvSpPr>
+          <p:cNvPr id="251" name="Texto 251"/>
+          <p:cNvSpPr txBox="1"/>
+          <p:nvPr/>
+        </p:nvSpPr>
+        <p:spPr>
+          <a:xfrm>
+            <a:off x="8044800" y="2890000"/>
+            <a:ext cx="3497600" cy="2340000"/>
+          </a:xfrm>
+          <a:prstGeom prst="rect">
+            <a:avLst/>
+          </a:prstGeom>
+          <a:noFill/>
+        </p:spPr>
+        <p:txBody>
+          <a:bodyPr wrap="square" anchor="t" lIns="45720" rIns="45720">
+            <a:noAutofit/>
+          </a:bodyPr>
+          <a:lstStyle/>
+          <a:p>
+            <a:pPr algn="l"/>
+            <a:r>
+              <a:rPr lang="es-ES" sz="1300" dirty="0">
+                <a:solidFill>
+                  <a:srgbClr val="2F2B28"/>
+                </a:solidFill>
+              </a:rPr>
+              <a:t>«Basado en SEVEN-G (Fernando García Varela, CC BY 4.0). Contenido orientativo, «tal cual», sin garantías; no es asesoramiento jurídico. El autor no valida ni respalda esta obra.»</a:t>
+            </a:r>
+          </a:p>
+        </p:txBody>
+      </p:sp>
+      <p:sp>
+        <p:nvSpPr>
+          <p:cNvPr id="252" name="Texto 252"/>
+          <p:cNvSpPr txBox="1"/>
+          <p:nvPr/>
+        </p:nvSpPr>
+        <p:spPr>
+          <a:xfrm>
+            <a:off x="609600" y="6150000"/>
+            <a:ext cx="10972800" cy="500000"/>
+          </a:xfrm>
+          <a:prstGeom prst="rect">
+            <a:avLst/>
+          </a:prstGeom>
+          <a:noFill/>
+        </p:spPr>
+        <p:txBody>
+          <a:bodyPr wrap="square" anchor="t" lIns="45720" rIns="45720">
+            <a:noAutofit/>
+          </a:bodyPr>
+          <a:lstStyle/>
+          <a:p>
+            <a:pPr algn="l"/>
+            <a:r>
+              <a:rPr lang="es-ES" sz="1400" b="1" dirty="0">
+                <a:solidFill>
+                  <a:srgbClr val="0F5499"/>
+                </a:solidFill>
+              </a:rPr>
+              <a:t>Documento 93, secciones 6, 7, 8 y 11.9.</a:t>
             </a:r>
           </a:p>
         </p:txBody>
@@ -7143,7 +7241,235 @@
       </p:grpSpPr>
       <p:sp>
         <p:nvSpPr>
-          <p:cNvPr id="254" name="Texto 254"/>
+          <p:cNvPr id="258" name="Marca"/>
+          <p:cNvSpPr/>
+          <p:nvPr/>
+        </p:nvSpPr>
+        <p:spPr>
+          <a:xfrm>
+            <a:off x="609600" y="365760"/>
+            <a:ext cx="182880" cy="182880"/>
+          </a:xfrm>
+          <a:prstGeom prst="rect">
+            <a:avLst/>
+          </a:prstGeom>
+          <a:solidFill>
+            <a:srgbClr val="990F3D"/>
+          </a:solidFill>
+        </p:spPr>
+        <p:txBody>
+          <a:bodyPr/>
+          <a:lstStyle/>
+          <a:p/>
+        </p:txBody>
+      </p:sp>
+      <p:sp>
+        <p:nvSpPr>
+          <p:cNvPr id="259" name="Texto 259"/>
+          <p:cNvSpPr txBox="1"/>
+          <p:nvPr/>
+        </p:nvSpPr>
+        <p:spPr>
+          <a:xfrm>
+            <a:off x="838200" y="300000"/>
+            <a:ext cx="10500000" cy="320000"/>
+          </a:xfrm>
+          <a:prstGeom prst="rect">
+            <a:avLst/>
+          </a:prstGeom>
+          <a:noFill/>
+        </p:spPr>
+        <p:txBody>
+          <a:bodyPr wrap="square" anchor="ctr" lIns="45720" rIns="45720">
+            <a:noAutofit/>
+          </a:bodyPr>
+          <a:lstStyle/>
+          <a:p>
+            <a:pPr algn="l"/>
+            <a:r>
+              <a:rPr lang="es-ES" sz="1400" b="1" dirty="0">
+                <a:solidFill>
+                  <a:srgbClr val="1A1817"/>
+                </a:solidFill>
+              </a:rPr>
+              <a:t>SEVEN-G · CURSO · PARTNER · INTEGRARLO EN SU METODOLOGÍA</a:t>
+            </a:r>
+          </a:p>
+        </p:txBody>
+      </p:sp>
+      <p:sp>
+        <p:nvSpPr>
+          <p:cNvPr id="260" name="Texto 260"/>
+          <p:cNvSpPr txBox="1"/>
+          <p:nvPr/>
+        </p:nvSpPr>
+        <p:spPr>
+          <a:xfrm>
+            <a:off x="609600" y="700000"/>
+            <a:ext cx="10972800" cy="650000"/>
+          </a:xfrm>
+          <a:prstGeom prst="rect">
+            <a:avLst/>
+          </a:prstGeom>
+          <a:noFill/>
+        </p:spPr>
+        <p:txBody>
+          <a:bodyPr wrap="square" anchor="t" lIns="45720" rIns="45720">
+            <a:noAutofit/>
+          </a:bodyPr>
+          <a:lstStyle/>
+          <a:p>
+            <a:pPr algn="l"/>
+            <a:r>
+              <a:rPr lang="es-ES" sz="2700" b="1" dirty="0">
+                <a:solidFill>
+                  <a:srgbClr val="990F3D"/>
+                </a:solidFill>
+              </a:rPr>
+              <a:t>Mantenerse al día y mejorar el marco</a:t>
+            </a:r>
+          </a:p>
+        </p:txBody>
+      </p:sp>
+      <p:sp>
+        <p:nvSpPr>
+          <p:cNvPr id="257" name="Texto 257"/>
+          <p:cNvSpPr txBox="1"/>
+          <p:nvPr/>
+        </p:nvSpPr>
+        <p:spPr>
+          <a:xfrm>
+            <a:off x="609600" y="1750000"/>
+            <a:ext cx="10972800" cy="4400000"/>
+          </a:xfrm>
+          <a:prstGeom prst="rect">
+            <a:avLst/>
+          </a:prstGeom>
+          <a:noFill/>
+        </p:spPr>
+        <p:txBody>
+          <a:bodyPr wrap="square" anchor="t" lIns="45720" rIns="45720">
+            <a:noAutofit/>
+          </a:bodyPr>
+          <a:lstStyle/>
+          <a:p>
+            <a:pPr marL="285750" indent="-285750">
+              <a:spcAft>
+                <a:spcPts val="400"/>
+              </a:spcAft>
+              <a:buClr>
+                <a:srgbClr val="990F3D"/>
+              </a:buClr>
+              <a:buFont typeface="Arial"/>
+              <a:buChar char="•"/>
+            </a:pPr>
+            <a:r>
+              <a:rPr lang="es-ES" sz="1800" dirty="0">
+                <a:solidFill>
+                  <a:srgbClr val="2F2B28"/>
+                </a:solidFill>
+              </a:rPr>
+              <a:t>El sitio publica la versión del marco y el control de versiones de cada documento: revise los cambios antes de actualizar su adaptación.</a:t>
+            </a:r>
+          </a:p>
+          <a:p>
+            <a:pPr marL="285750" indent="-285750">
+              <a:spcAft>
+                <a:spcPts val="400"/>
+              </a:spcAft>
+              <a:buClr>
+                <a:srgbClr val="990F3D"/>
+              </a:buClr>
+              <a:buFont typeface="Arial"/>
+              <a:buChar char="•"/>
+            </a:pPr>
+            <a:r>
+              <a:rPr lang="es-ES" sz="1800" dirty="0">
+                <a:solidFill>
+                  <a:srgbClr val="2F2B28"/>
+                </a:solidFill>
+              </a:rPr>
+              <a:t>Incidencias y peticiones de mejora: en la página de comunidad, sin cuenta ni correo; se abordan las peticiones con más votos.</a:t>
+            </a:r>
+          </a:p>
+          <a:p>
+            <a:pPr marL="285750" indent="-285750">
+              <a:spcAft>
+                <a:spcPts val="400"/>
+              </a:spcAft>
+              <a:buClr>
+                <a:srgbClr val="990F3D"/>
+              </a:buClr>
+              <a:buFont typeface="Arial"/>
+              <a:buChar char="•"/>
+            </a:pPr>
+            <a:r>
+              <a:rPr lang="es-ES" sz="1800" dirty="0">
+                <a:solidFill>
+                  <a:srgbClr val="2F2B28"/>
+                </a:solidFill>
+              </a:rPr>
+              <a:t>Una traducción suya es una obra derivada: indique que no es oficial, de qué versión procede y quién la ha hecho.</a:t>
+            </a:r>
+          </a:p>
+          <a:p>
+            <a:pPr marL="285750" indent="-285750">
+              <a:spcAft>
+                <a:spcPts val="400"/>
+              </a:spcAft>
+              <a:buClr>
+                <a:srgbClr val="990F3D"/>
+              </a:buClr>
+              <a:buFont typeface="Arial"/>
+              <a:buChar char="•"/>
+            </a:pPr>
+            <a:r>
+              <a:rPr lang="es-ES" sz="1800" dirty="0">
+                <a:solidFill>
+                  <a:srgbClr val="2F2B28"/>
+                </a:solidFill>
+              </a:rPr>
+              <a:t>Si quiere algo que la licencia no da —un desarrollo a medida, formación para su equipo, acuerdo sobre el uso de la marca—, hable con el autor. Esa conversación la inicia usted.</a:t>
+            </a:r>
+          </a:p>
+        </p:txBody>
+      </p:sp>
+    </p:spTree>
+  </p:cSld>
+  <p:clrMapOvr>
+    <a:overrideClrMapping bg1="lt1" tx1="dk1" bg2="lt2" tx2="dk2" accent1="accent1" accent2="accent2" accent3="accent3" accent4="accent4" accent5="accent5" accent6="accent6" hlink="hlink" folHlink="folHlink"/>
+  </p:clrMapOvr>
+</p:sld>
+</file>
+
+<file path=ppt/slides/slide27.xml><?xml version="1.0" encoding="utf-8"?>
+<p:sld xmlns:a="http://schemas.openxmlformats.org/drawingml/2006/main" xmlns:r="http://schemas.openxmlformats.org/officeDocument/2006/relationships" xmlns:p="http://schemas.openxmlformats.org/presentationml/2006/main">
+  <p:cSld>
+    <p:bg>
+      <p:bgPr>
+        <a:solidFill>
+          <a:srgbClr val="FBE2CD"/>
+        </a:solidFill>
+        <a:effectLst/>
+      </p:bgPr>
+    </p:bg>
+    <p:spTree>
+      <p:nvGrpSpPr>
+        <p:cNvPr id="1" name=""/>
+        <p:cNvGrpSpPr/>
+        <p:nvPr/>
+      </p:nvGrpSpPr>
+      <p:grpSpPr>
+        <a:xfrm>
+          <a:off x="0" y="0"/>
+          <a:ext cx="0" cy="0"/>
+          <a:chOff x="0" y="0"/>
+          <a:chExt cx="0" cy="0"/>
+        </a:xfrm>
+      </p:grpSpPr>
+      <p:sp>
+        <p:nvSpPr>
+          <p:cNvPr id="261" name="Texto 261"/>
           <p:cNvSpPr txBox="1"/>
           <p:nvPr/>
         </p:nvSpPr>
@@ -7177,7 +7503,7 @@
       </p:sp>
       <p:sp>
         <p:nvSpPr>
-          <p:cNvPr id="255" name="Texto 255"/>
+          <p:cNvPr id="262" name="Texto 262"/>
           <p:cNvSpPr txBox="1"/>
           <p:nvPr/>
         </p:nvSpPr>
@@ -7211,7 +7537,7 @@
       </p:sp>
       <p:sp>
         <p:nvSpPr>
-          <p:cNvPr id="256" name="Texto 256"/>
+          <p:cNvPr id="263" name="Texto 263"/>
           <p:cNvSpPr txBox="1"/>
           <p:nvPr/>
         </p:nvSpPr>
@@ -7245,7 +7571,7 @@
       </p:sp>
       <p:sp>
         <p:nvSpPr>
-          <p:cNvPr id="257" name="Texto 257"/>
+          <p:cNvPr id="264" name="Texto 264"/>
           <p:cNvSpPr txBox="1"/>
           <p:nvPr/>
         </p:nvSpPr>
@@ -7279,7 +7605,7 @@
       </p:sp>
       <p:sp>
         <p:nvSpPr>
-          <p:cNvPr id="258" name="Texto 258"/>
+          <p:cNvPr id="265" name="Texto 265"/>
           <p:cNvSpPr txBox="1"/>
           <p:nvPr/>
         </p:nvSpPr>
